--- a/deliverables/video-4-slides/out/Video_4_Reveal_Builds.pptx
+++ b/deliverables/video-4-slides/out/Video_4_Reveal_Builds.pptx
@@ -2200,6 +2200,12 @@
           <a:p>
             <a:r>
               <a:t>Timing: final 15 to 20 seconds.</a:t>
+            </a:r>
+          </a:p>
+          <a:p/>
+          <a:p>
+            <a:r>
+              <a:t>Watch next: Should I Make an Internal Move? 3 Questions to Decide.</a:t>
             </a:r>
           </a:p>
           <a:p/>
@@ -5888,6 +5894,14 @@
 <file path=ppt/slides/slide1.xml><?xml version="1.0" encoding="utf-8"?>
 <p:sld xmlns:a="http://schemas.openxmlformats.org/drawingml/2006/main" xmlns:p="http://schemas.openxmlformats.org/presentationml/2006/main" xmlns:r="http://schemas.openxmlformats.org/officeDocument/2006/relationships">
   <p:cSld>
+    <p:bg>
+      <p:bgPr>
+        <a:solidFill>
+          <a:srgbClr val="0F2346"/>
+        </a:solidFill>
+        <a:effectLst/>
+      </p:bgPr>
+    </p:bg>
     <p:spTree>
       <p:nvGrpSpPr>
         <p:cNvPr id="1" name=""/>
@@ -5903,50 +5917,6 @@
         </p:nvSpPr>
         <p:spPr>
           <a:xfrm>
-            <a:off x="0" y="0"/>
-            <a:ext cx="12192000" cy="6858000"/>
-          </a:xfrm>
-          <a:prstGeom prst="rect">
-            <a:avLst/>
-          </a:prstGeom>
-          <a:solidFill>
-            <a:srgbClr val="0F2346"/>
-          </a:solidFill>
-          <a:ln>
-            <a:noFill/>
-          </a:ln>
-          <a:effectLst/>
-        </p:spPr>
-        <p:style>
-          <a:lnRef idx="1">
-            <a:schemeClr val="accent1"/>
-          </a:lnRef>
-          <a:fillRef idx="3">
-            <a:schemeClr val="accent1"/>
-          </a:fillRef>
-          <a:effectRef idx="2">
-            <a:schemeClr val="accent1"/>
-          </a:effectRef>
-          <a:fontRef idx="minor">
-            <a:schemeClr val="lt1"/>
-          </a:fontRef>
-        </p:style>
-        <p:txBody>
-          <a:bodyPr rtlCol="0" anchor="ctr"/>
-          <a:lstStyle/>
-          <a:p>
-            <a:pPr algn="ctr"/>
-          </a:p>
-        </p:txBody>
-      </p:sp>
-      <p:sp>
-        <p:nvSpPr>
-          <p:cNvPr id="3" name="Rectangle 2"/>
-          <p:cNvSpPr/>
-          <p:nvPr/>
-        </p:nvSpPr>
-        <p:spPr>
-          <a:xfrm>
             <a:off x="355600" y="355600"/>
             <a:ext cx="11480800" cy="6146800"/>
           </a:xfrm>
@@ -5985,7 +5955,7 @@
       </p:sp>
       <p:sp>
         <p:nvSpPr>
-          <p:cNvPr id="4" name="Rectangle 3"/>
+          <p:cNvPr id="3" name="Rectangle 2"/>
           <p:cNvSpPr/>
           <p:nvPr/>
         </p:nvSpPr>
@@ -6029,7 +5999,7 @@
       </p:sp>
       <p:sp>
         <p:nvSpPr>
-          <p:cNvPr id="5" name="Rectangle 4"/>
+          <p:cNvPr id="4" name="Rectangle 3"/>
           <p:cNvSpPr/>
           <p:nvPr/>
         </p:nvSpPr>
@@ -6073,7 +6043,7 @@
       </p:sp>
       <p:sp>
         <p:nvSpPr>
-          <p:cNvPr id="6" name="Rectangle 5"/>
+          <p:cNvPr id="5" name="Rectangle 4"/>
           <p:cNvSpPr/>
           <p:nvPr/>
         </p:nvSpPr>
@@ -6117,7 +6087,7 @@
       </p:sp>
       <p:sp>
         <p:nvSpPr>
-          <p:cNvPr id="7" name="Rectangle 6"/>
+          <p:cNvPr id="6" name="Rectangle 5"/>
           <p:cNvSpPr/>
           <p:nvPr/>
         </p:nvSpPr>
@@ -6161,14 +6131,14 @@
       </p:sp>
       <p:sp>
         <p:nvSpPr>
-          <p:cNvPr id="8" name="TextBox 7"/>
+          <p:cNvPr id="7" name="TextBox 6"/>
           <p:cNvSpPr txBox="1"/>
           <p:nvPr/>
         </p:nvSpPr>
         <p:spPr>
           <a:xfrm>
             <a:off x="1320800" y="1473200"/>
-            <a:ext cx="9525000" cy="1270000"/>
+            <a:ext cx="9525000" cy="419100"/>
           </a:xfrm>
           <a:prstGeom prst="rect">
             <a:avLst/>
@@ -6211,6 +6181,14 @@
 <file path=ppt/slides/slide10.xml><?xml version="1.0" encoding="utf-8"?>
 <p:sld xmlns:a="http://schemas.openxmlformats.org/drawingml/2006/main" xmlns:p="http://schemas.openxmlformats.org/presentationml/2006/main" xmlns:r="http://schemas.openxmlformats.org/officeDocument/2006/relationships">
   <p:cSld>
+    <p:bg>
+      <p:bgPr>
+        <a:solidFill>
+          <a:srgbClr val="0F2346"/>
+        </a:solidFill>
+        <a:effectLst/>
+      </p:bgPr>
+    </p:bg>
     <p:spTree>
       <p:nvGrpSpPr>
         <p:cNvPr id="1" name=""/>
@@ -6226,50 +6204,6 @@
         </p:nvSpPr>
         <p:spPr>
           <a:xfrm>
-            <a:off x="0" y="0"/>
-            <a:ext cx="12192000" cy="6858000"/>
-          </a:xfrm>
-          <a:prstGeom prst="rect">
-            <a:avLst/>
-          </a:prstGeom>
-          <a:solidFill>
-            <a:srgbClr val="0F2346"/>
-          </a:solidFill>
-          <a:ln>
-            <a:noFill/>
-          </a:ln>
-          <a:effectLst/>
-        </p:spPr>
-        <p:style>
-          <a:lnRef idx="1">
-            <a:schemeClr val="accent1"/>
-          </a:lnRef>
-          <a:fillRef idx="3">
-            <a:schemeClr val="accent1"/>
-          </a:fillRef>
-          <a:effectRef idx="2">
-            <a:schemeClr val="accent1"/>
-          </a:effectRef>
-          <a:fontRef idx="minor">
-            <a:schemeClr val="lt1"/>
-          </a:fontRef>
-        </p:style>
-        <p:txBody>
-          <a:bodyPr rtlCol="0" anchor="ctr"/>
-          <a:lstStyle/>
-          <a:p>
-            <a:pPr algn="ctr"/>
-          </a:p>
-        </p:txBody>
-      </p:sp>
-      <p:sp>
-        <p:nvSpPr>
-          <p:cNvPr id="3" name="Rectangle 2"/>
-          <p:cNvSpPr/>
-          <p:nvPr/>
-        </p:nvSpPr>
-        <p:spPr>
-          <a:xfrm>
             <a:off x="355600" y="355600"/>
             <a:ext cx="11480800" cy="6146800"/>
           </a:xfrm>
@@ -6308,14 +6242,14 @@
       </p:sp>
       <p:sp>
         <p:nvSpPr>
-          <p:cNvPr id="4" name="TextBox 3"/>
+          <p:cNvPr id="3" name="TextBox 2"/>
           <p:cNvSpPr txBox="1"/>
           <p:nvPr/>
         </p:nvSpPr>
         <p:spPr>
           <a:xfrm>
             <a:off x="863600" y="952500"/>
-            <a:ext cx="1270000" cy="1270000"/>
+            <a:ext cx="1270000" cy="609600"/>
           </a:xfrm>
           <a:prstGeom prst="rect">
             <a:avLst/>
@@ -6349,7 +6283,7 @@
       </p:sp>
       <p:sp>
         <p:nvSpPr>
-          <p:cNvPr id="5" name="Rectangle 4"/>
+          <p:cNvPr id="4" name="Rectangle 3"/>
           <p:cNvSpPr/>
           <p:nvPr/>
         </p:nvSpPr>
@@ -6393,14 +6327,14 @@
       </p:sp>
       <p:sp>
         <p:nvSpPr>
-          <p:cNvPr id="6" name="TextBox 5"/>
+          <p:cNvPr id="5" name="TextBox 4"/>
           <p:cNvSpPr txBox="1"/>
           <p:nvPr/>
         </p:nvSpPr>
         <p:spPr>
           <a:xfrm>
             <a:off x="863600" y="2032000"/>
-            <a:ext cx="9906000" cy="1270000"/>
+            <a:ext cx="9906000" cy="508000"/>
           </a:xfrm>
           <a:prstGeom prst="rect">
             <a:avLst/>
@@ -6434,14 +6368,14 @@
       </p:sp>
       <p:sp>
         <p:nvSpPr>
-          <p:cNvPr id="7" name="TextBox 6"/>
+          <p:cNvPr id="6" name="TextBox 5"/>
           <p:cNvSpPr txBox="1"/>
           <p:nvPr/>
         </p:nvSpPr>
         <p:spPr>
           <a:xfrm>
             <a:off x="863600" y="3124200"/>
-            <a:ext cx="10541000" cy="1270000"/>
+            <a:ext cx="10541000" cy="368300"/>
           </a:xfrm>
           <a:prstGeom prst="rect">
             <a:avLst/>
@@ -6484,6 +6418,14 @@
 <file path=ppt/slides/slide11.xml><?xml version="1.0" encoding="utf-8"?>
 <p:sld xmlns:a="http://schemas.openxmlformats.org/drawingml/2006/main" xmlns:p="http://schemas.openxmlformats.org/presentationml/2006/main" xmlns:r="http://schemas.openxmlformats.org/officeDocument/2006/relationships">
   <p:cSld>
+    <p:bg>
+      <p:bgPr>
+        <a:solidFill>
+          <a:srgbClr val="0F2346"/>
+        </a:solidFill>
+        <a:effectLst/>
+      </p:bgPr>
+    </p:bg>
     <p:spTree>
       <p:nvGrpSpPr>
         <p:cNvPr id="1" name=""/>
@@ -6499,50 +6441,6 @@
         </p:nvSpPr>
         <p:spPr>
           <a:xfrm>
-            <a:off x="0" y="0"/>
-            <a:ext cx="12192000" cy="6858000"/>
-          </a:xfrm>
-          <a:prstGeom prst="rect">
-            <a:avLst/>
-          </a:prstGeom>
-          <a:solidFill>
-            <a:srgbClr val="0F2346"/>
-          </a:solidFill>
-          <a:ln>
-            <a:noFill/>
-          </a:ln>
-          <a:effectLst/>
-        </p:spPr>
-        <p:style>
-          <a:lnRef idx="1">
-            <a:schemeClr val="accent1"/>
-          </a:lnRef>
-          <a:fillRef idx="3">
-            <a:schemeClr val="accent1"/>
-          </a:fillRef>
-          <a:effectRef idx="2">
-            <a:schemeClr val="accent1"/>
-          </a:effectRef>
-          <a:fontRef idx="minor">
-            <a:schemeClr val="lt1"/>
-          </a:fontRef>
-        </p:style>
-        <p:txBody>
-          <a:bodyPr rtlCol="0" anchor="ctr"/>
-          <a:lstStyle/>
-          <a:p>
-            <a:pPr algn="ctr"/>
-          </a:p>
-        </p:txBody>
-      </p:sp>
-      <p:sp>
-        <p:nvSpPr>
-          <p:cNvPr id="3" name="Rectangle 2"/>
-          <p:cNvSpPr/>
-          <p:nvPr/>
-        </p:nvSpPr>
-        <p:spPr>
-          <a:xfrm>
             <a:off x="355600" y="355600"/>
             <a:ext cx="11480800" cy="6146800"/>
           </a:xfrm>
@@ -6581,14 +6479,14 @@
       </p:sp>
       <p:sp>
         <p:nvSpPr>
-          <p:cNvPr id="4" name="TextBox 3"/>
+          <p:cNvPr id="3" name="TextBox 2"/>
           <p:cNvSpPr txBox="1"/>
           <p:nvPr/>
         </p:nvSpPr>
         <p:spPr>
           <a:xfrm>
             <a:off x="863600" y="952500"/>
-            <a:ext cx="1270000" cy="1270000"/>
+            <a:ext cx="1270000" cy="609600"/>
           </a:xfrm>
           <a:prstGeom prst="rect">
             <a:avLst/>
@@ -6622,7 +6520,7 @@
       </p:sp>
       <p:sp>
         <p:nvSpPr>
-          <p:cNvPr id="5" name="Rectangle 4"/>
+          <p:cNvPr id="4" name="Rectangle 3"/>
           <p:cNvSpPr/>
           <p:nvPr/>
         </p:nvSpPr>
@@ -6666,14 +6564,14 @@
       </p:sp>
       <p:sp>
         <p:nvSpPr>
-          <p:cNvPr id="6" name="TextBox 5"/>
+          <p:cNvPr id="5" name="TextBox 4"/>
           <p:cNvSpPr txBox="1"/>
           <p:nvPr/>
         </p:nvSpPr>
         <p:spPr>
           <a:xfrm>
             <a:off x="863600" y="2032000"/>
-            <a:ext cx="9906000" cy="1270000"/>
+            <a:ext cx="9906000" cy="508000"/>
           </a:xfrm>
           <a:prstGeom prst="rect">
             <a:avLst/>
@@ -6707,14 +6605,14 @@
       </p:sp>
       <p:sp>
         <p:nvSpPr>
-          <p:cNvPr id="7" name="TextBox 6"/>
+          <p:cNvPr id="6" name="TextBox 5"/>
           <p:cNvSpPr txBox="1"/>
           <p:nvPr/>
         </p:nvSpPr>
         <p:spPr>
           <a:xfrm>
             <a:off x="863600" y="3124200"/>
-            <a:ext cx="10541000" cy="1270000"/>
+            <a:ext cx="10541000" cy="368300"/>
           </a:xfrm>
           <a:prstGeom prst="rect">
             <a:avLst/>
@@ -6757,6 +6655,14 @@
 <file path=ppt/slides/slide12.xml><?xml version="1.0" encoding="utf-8"?>
 <p:sld xmlns:a="http://schemas.openxmlformats.org/drawingml/2006/main" xmlns:p="http://schemas.openxmlformats.org/presentationml/2006/main" xmlns:r="http://schemas.openxmlformats.org/officeDocument/2006/relationships">
   <p:cSld>
+    <p:bg>
+      <p:bgPr>
+        <a:solidFill>
+          <a:srgbClr val="0F2346"/>
+        </a:solidFill>
+        <a:effectLst/>
+      </p:bgPr>
+    </p:bg>
     <p:spTree>
       <p:nvGrpSpPr>
         <p:cNvPr id="1" name=""/>
@@ -6772,50 +6678,6 @@
         </p:nvSpPr>
         <p:spPr>
           <a:xfrm>
-            <a:off x="0" y="0"/>
-            <a:ext cx="12192000" cy="6858000"/>
-          </a:xfrm>
-          <a:prstGeom prst="rect">
-            <a:avLst/>
-          </a:prstGeom>
-          <a:solidFill>
-            <a:srgbClr val="0F2346"/>
-          </a:solidFill>
-          <a:ln>
-            <a:noFill/>
-          </a:ln>
-          <a:effectLst/>
-        </p:spPr>
-        <p:style>
-          <a:lnRef idx="1">
-            <a:schemeClr val="accent1"/>
-          </a:lnRef>
-          <a:fillRef idx="3">
-            <a:schemeClr val="accent1"/>
-          </a:fillRef>
-          <a:effectRef idx="2">
-            <a:schemeClr val="accent1"/>
-          </a:effectRef>
-          <a:fontRef idx="minor">
-            <a:schemeClr val="lt1"/>
-          </a:fontRef>
-        </p:style>
-        <p:txBody>
-          <a:bodyPr rtlCol="0" anchor="ctr"/>
-          <a:lstStyle/>
-          <a:p>
-            <a:pPr algn="ctr"/>
-          </a:p>
-        </p:txBody>
-      </p:sp>
-      <p:sp>
-        <p:nvSpPr>
-          <p:cNvPr id="3" name="Rectangle 2"/>
-          <p:cNvSpPr/>
-          <p:nvPr/>
-        </p:nvSpPr>
-        <p:spPr>
-          <a:xfrm>
             <a:off x="355600" y="355600"/>
             <a:ext cx="11480800" cy="6146800"/>
           </a:xfrm>
@@ -6854,14 +6716,14 @@
       </p:sp>
       <p:sp>
         <p:nvSpPr>
-          <p:cNvPr id="4" name="TextBox 3"/>
+          <p:cNvPr id="3" name="TextBox 2"/>
           <p:cNvSpPr txBox="1"/>
           <p:nvPr/>
         </p:nvSpPr>
         <p:spPr>
           <a:xfrm>
             <a:off x="863600" y="952500"/>
-            <a:ext cx="1270000" cy="1270000"/>
+            <a:ext cx="1270000" cy="609600"/>
           </a:xfrm>
           <a:prstGeom prst="rect">
             <a:avLst/>
@@ -6895,7 +6757,7 @@
       </p:sp>
       <p:sp>
         <p:nvSpPr>
-          <p:cNvPr id="5" name="Rectangle 4"/>
+          <p:cNvPr id="4" name="Rectangle 3"/>
           <p:cNvSpPr/>
           <p:nvPr/>
         </p:nvSpPr>
@@ -6939,14 +6801,14 @@
       </p:sp>
       <p:sp>
         <p:nvSpPr>
-          <p:cNvPr id="6" name="TextBox 5"/>
+          <p:cNvPr id="5" name="TextBox 4"/>
           <p:cNvSpPr txBox="1"/>
           <p:nvPr/>
         </p:nvSpPr>
         <p:spPr>
           <a:xfrm>
             <a:off x="863600" y="2032000"/>
-            <a:ext cx="9906000" cy="1270000"/>
+            <a:ext cx="9906000" cy="508000"/>
           </a:xfrm>
           <a:prstGeom prst="rect">
             <a:avLst/>
@@ -6980,14 +6842,14 @@
       </p:sp>
       <p:sp>
         <p:nvSpPr>
-          <p:cNvPr id="7" name="TextBox 6"/>
+          <p:cNvPr id="6" name="TextBox 5"/>
           <p:cNvSpPr txBox="1"/>
           <p:nvPr/>
         </p:nvSpPr>
         <p:spPr>
           <a:xfrm>
             <a:off x="863600" y="3124200"/>
-            <a:ext cx="10541000" cy="1270000"/>
+            <a:ext cx="10541000" cy="368300"/>
           </a:xfrm>
           <a:prstGeom prst="rect">
             <a:avLst/>
@@ -7021,7 +6883,7 @@
       </p:sp>
       <p:sp>
         <p:nvSpPr>
-          <p:cNvPr id="8" name="Rectangle 7"/>
+          <p:cNvPr id="7" name="Rectangle 6"/>
           <p:cNvSpPr/>
           <p:nvPr/>
         </p:nvSpPr>
@@ -7065,14 +6927,14 @@
       </p:sp>
       <p:sp>
         <p:nvSpPr>
-          <p:cNvPr id="9" name="TextBox 8"/>
+          <p:cNvPr id="8" name="TextBox 7"/>
           <p:cNvSpPr txBox="1"/>
           <p:nvPr/>
         </p:nvSpPr>
         <p:spPr>
           <a:xfrm>
             <a:off x="863600" y="4521200"/>
-            <a:ext cx="10160000" cy="1270000"/>
+            <a:ext cx="10160000" cy="406400"/>
           </a:xfrm>
           <a:prstGeom prst="rect">
             <a:avLst/>
@@ -7115,6 +6977,14 @@
 <file path=ppt/slides/slide13.xml><?xml version="1.0" encoding="utf-8"?>
 <p:sld xmlns:a="http://schemas.openxmlformats.org/drawingml/2006/main" xmlns:p="http://schemas.openxmlformats.org/presentationml/2006/main" xmlns:r="http://schemas.openxmlformats.org/officeDocument/2006/relationships">
   <p:cSld>
+    <p:bg>
+      <p:bgPr>
+        <a:solidFill>
+          <a:srgbClr val="F5F1E8"/>
+        </a:solidFill>
+        <a:effectLst/>
+      </p:bgPr>
+    </p:bg>
     <p:spTree>
       <p:nvGrpSpPr>
         <p:cNvPr id="1" name=""/>
@@ -7124,58 +6994,14 @@
       <p:grpSpPr/>
       <p:sp>
         <p:nvSpPr>
-          <p:cNvPr id="2" name="Rectangle 1"/>
-          <p:cNvSpPr/>
-          <p:nvPr/>
-        </p:nvSpPr>
-        <p:spPr>
-          <a:xfrm>
-            <a:off x="0" y="0"/>
-            <a:ext cx="12192000" cy="6858000"/>
-          </a:xfrm>
-          <a:prstGeom prst="rect">
-            <a:avLst/>
-          </a:prstGeom>
-          <a:solidFill>
-            <a:srgbClr val="F5F1E8"/>
-          </a:solidFill>
-          <a:ln>
-            <a:noFill/>
-          </a:ln>
-          <a:effectLst/>
-        </p:spPr>
-        <p:style>
-          <a:lnRef idx="1">
-            <a:schemeClr val="accent1"/>
-          </a:lnRef>
-          <a:fillRef idx="3">
-            <a:schemeClr val="accent1"/>
-          </a:fillRef>
-          <a:effectRef idx="2">
-            <a:schemeClr val="accent1"/>
-          </a:effectRef>
-          <a:fontRef idx="minor">
-            <a:schemeClr val="lt1"/>
-          </a:fontRef>
-        </p:style>
-        <p:txBody>
-          <a:bodyPr rtlCol="0" anchor="ctr"/>
-          <a:lstStyle/>
-          <a:p>
-            <a:pPr algn="ctr"/>
-          </a:p>
-        </p:txBody>
-      </p:sp>
-      <p:sp>
-        <p:nvSpPr>
-          <p:cNvPr id="3" name="TextBox 2"/>
+          <p:cNvPr id="2" name="TextBox 1"/>
           <p:cNvSpPr txBox="1"/>
           <p:nvPr/>
         </p:nvSpPr>
         <p:spPr>
           <a:xfrm>
             <a:off x="1016000" y="1587500"/>
-            <a:ext cx="7620000" cy="1270000"/>
+            <a:ext cx="7620000" cy="368300"/>
           </a:xfrm>
           <a:prstGeom prst="rect">
             <a:avLst/>
@@ -7209,14 +7035,14 @@
       </p:sp>
       <p:sp>
         <p:nvSpPr>
-          <p:cNvPr id="4" name="TextBox 3"/>
+          <p:cNvPr id="3" name="TextBox 2"/>
           <p:cNvSpPr txBox="1"/>
           <p:nvPr/>
         </p:nvSpPr>
         <p:spPr>
           <a:xfrm>
             <a:off x="1016000" y="2247900"/>
-            <a:ext cx="7620000" cy="1270000"/>
+            <a:ext cx="7620000" cy="368300"/>
           </a:xfrm>
           <a:prstGeom prst="rect">
             <a:avLst/>
@@ -7250,14 +7076,14 @@
       </p:sp>
       <p:sp>
         <p:nvSpPr>
-          <p:cNvPr id="5" name="TextBox 4"/>
+          <p:cNvPr id="4" name="TextBox 3"/>
           <p:cNvSpPr txBox="1"/>
           <p:nvPr/>
         </p:nvSpPr>
         <p:spPr>
           <a:xfrm>
             <a:off x="1016000" y="2908300"/>
-            <a:ext cx="7620000" cy="1270000"/>
+            <a:ext cx="7620000" cy="368300"/>
           </a:xfrm>
           <a:prstGeom prst="rect">
             <a:avLst/>
@@ -7300,6 +7126,14 @@
 <file path=ppt/slides/slide14.xml><?xml version="1.0" encoding="utf-8"?>
 <p:sld xmlns:a="http://schemas.openxmlformats.org/drawingml/2006/main" xmlns:p="http://schemas.openxmlformats.org/presentationml/2006/main" xmlns:r="http://schemas.openxmlformats.org/officeDocument/2006/relationships">
   <p:cSld>
+    <p:bg>
+      <p:bgPr>
+        <a:solidFill>
+          <a:srgbClr val="F5F1E8"/>
+        </a:solidFill>
+        <a:effectLst/>
+      </p:bgPr>
+    </p:bg>
     <p:spTree>
       <p:nvGrpSpPr>
         <p:cNvPr id="1" name=""/>
@@ -7309,58 +7143,14 @@
       <p:grpSpPr/>
       <p:sp>
         <p:nvSpPr>
-          <p:cNvPr id="2" name="Rectangle 1"/>
-          <p:cNvSpPr/>
-          <p:nvPr/>
-        </p:nvSpPr>
-        <p:spPr>
-          <a:xfrm>
-            <a:off x="0" y="0"/>
-            <a:ext cx="12192000" cy="6858000"/>
-          </a:xfrm>
-          <a:prstGeom prst="rect">
-            <a:avLst/>
-          </a:prstGeom>
-          <a:solidFill>
-            <a:srgbClr val="F5F1E8"/>
-          </a:solidFill>
-          <a:ln>
-            <a:noFill/>
-          </a:ln>
-          <a:effectLst/>
-        </p:spPr>
-        <p:style>
-          <a:lnRef idx="1">
-            <a:schemeClr val="accent1"/>
-          </a:lnRef>
-          <a:fillRef idx="3">
-            <a:schemeClr val="accent1"/>
-          </a:fillRef>
-          <a:effectRef idx="2">
-            <a:schemeClr val="accent1"/>
-          </a:effectRef>
-          <a:fontRef idx="minor">
-            <a:schemeClr val="lt1"/>
-          </a:fontRef>
-        </p:style>
-        <p:txBody>
-          <a:bodyPr rtlCol="0" anchor="ctr"/>
-          <a:lstStyle/>
-          <a:p>
-            <a:pPr algn="ctr"/>
-          </a:p>
-        </p:txBody>
-      </p:sp>
-      <p:sp>
-        <p:nvSpPr>
-          <p:cNvPr id="3" name="TextBox 2"/>
+          <p:cNvPr id="2" name="TextBox 1"/>
           <p:cNvSpPr txBox="1"/>
           <p:nvPr/>
         </p:nvSpPr>
         <p:spPr>
           <a:xfrm>
             <a:off x="1016000" y="1587500"/>
-            <a:ext cx="7620000" cy="1270000"/>
+            <a:ext cx="7620000" cy="368300"/>
           </a:xfrm>
           <a:prstGeom prst="rect">
             <a:avLst/>
@@ -7394,14 +7184,14 @@
       </p:sp>
       <p:sp>
         <p:nvSpPr>
-          <p:cNvPr id="4" name="TextBox 3"/>
+          <p:cNvPr id="3" name="TextBox 2"/>
           <p:cNvSpPr txBox="1"/>
           <p:nvPr/>
         </p:nvSpPr>
         <p:spPr>
           <a:xfrm>
             <a:off x="1016000" y="2247900"/>
-            <a:ext cx="7620000" cy="1270000"/>
+            <a:ext cx="7620000" cy="368300"/>
           </a:xfrm>
           <a:prstGeom prst="rect">
             <a:avLst/>
@@ -7435,14 +7225,14 @@
       </p:sp>
       <p:sp>
         <p:nvSpPr>
-          <p:cNvPr id="5" name="TextBox 4"/>
+          <p:cNvPr id="4" name="TextBox 3"/>
           <p:cNvSpPr txBox="1"/>
           <p:nvPr/>
         </p:nvSpPr>
         <p:spPr>
           <a:xfrm>
             <a:off x="1016000" y="2908300"/>
-            <a:ext cx="7620000" cy="1270000"/>
+            <a:ext cx="7620000" cy="368300"/>
           </a:xfrm>
           <a:prstGeom prst="rect">
             <a:avLst/>
@@ -7476,7 +7266,7 @@
       </p:sp>
       <p:sp>
         <p:nvSpPr>
-          <p:cNvPr id="6" name="Rectangle 5"/>
+          <p:cNvPr id="5" name="Rectangle 4"/>
           <p:cNvSpPr/>
           <p:nvPr/>
         </p:nvSpPr>
@@ -7520,14 +7310,14 @@
       </p:sp>
       <p:sp>
         <p:nvSpPr>
-          <p:cNvPr id="7" name="TextBox 6"/>
+          <p:cNvPr id="6" name="TextBox 5"/>
           <p:cNvSpPr txBox="1"/>
           <p:nvPr/>
         </p:nvSpPr>
         <p:spPr>
           <a:xfrm>
             <a:off x="1016000" y="4191000"/>
-            <a:ext cx="10287000" cy="1270000"/>
+            <a:ext cx="10287000" cy="920750"/>
           </a:xfrm>
           <a:prstGeom prst="rect">
             <a:avLst/>
@@ -7582,6 +7372,14 @@
 <file path=ppt/slides/slide15.xml><?xml version="1.0" encoding="utf-8"?>
 <p:sld xmlns:a="http://schemas.openxmlformats.org/drawingml/2006/main" xmlns:p="http://schemas.openxmlformats.org/presentationml/2006/main" xmlns:r="http://schemas.openxmlformats.org/officeDocument/2006/relationships">
   <p:cSld>
+    <p:bg>
+      <p:bgPr>
+        <a:solidFill>
+          <a:srgbClr val="0F2346"/>
+        </a:solidFill>
+        <a:effectLst/>
+      </p:bgPr>
+    </p:bg>
     <p:spTree>
       <p:nvGrpSpPr>
         <p:cNvPr id="1" name=""/>
@@ -7597,50 +7395,6 @@
         </p:nvSpPr>
         <p:spPr>
           <a:xfrm>
-            <a:off x="0" y="0"/>
-            <a:ext cx="12192000" cy="6858000"/>
-          </a:xfrm>
-          <a:prstGeom prst="rect">
-            <a:avLst/>
-          </a:prstGeom>
-          <a:solidFill>
-            <a:srgbClr val="0F2346"/>
-          </a:solidFill>
-          <a:ln>
-            <a:noFill/>
-          </a:ln>
-          <a:effectLst/>
-        </p:spPr>
-        <p:style>
-          <a:lnRef idx="1">
-            <a:schemeClr val="accent1"/>
-          </a:lnRef>
-          <a:fillRef idx="3">
-            <a:schemeClr val="accent1"/>
-          </a:fillRef>
-          <a:effectRef idx="2">
-            <a:schemeClr val="accent1"/>
-          </a:effectRef>
-          <a:fontRef idx="minor">
-            <a:schemeClr val="lt1"/>
-          </a:fontRef>
-        </p:style>
-        <p:txBody>
-          <a:bodyPr rtlCol="0" anchor="ctr"/>
-          <a:lstStyle/>
-          <a:p>
-            <a:pPr algn="ctr"/>
-          </a:p>
-        </p:txBody>
-      </p:sp>
-      <p:sp>
-        <p:nvSpPr>
-          <p:cNvPr id="3" name="Rectangle 2"/>
-          <p:cNvSpPr/>
-          <p:nvPr/>
-        </p:nvSpPr>
-        <p:spPr>
-          <a:xfrm>
             <a:off x="355600" y="355600"/>
             <a:ext cx="11480800" cy="6146800"/>
           </a:xfrm>
@@ -7679,14 +7433,14 @@
       </p:sp>
       <p:sp>
         <p:nvSpPr>
-          <p:cNvPr id="4" name="TextBox 3"/>
+          <p:cNvPr id="3" name="TextBox 2"/>
           <p:cNvSpPr txBox="1"/>
           <p:nvPr/>
         </p:nvSpPr>
         <p:spPr>
           <a:xfrm>
             <a:off x="863600" y="952500"/>
-            <a:ext cx="1270000" cy="1270000"/>
+            <a:ext cx="1270000" cy="609600"/>
           </a:xfrm>
           <a:prstGeom prst="rect">
             <a:avLst/>
@@ -7720,7 +7474,7 @@
       </p:sp>
       <p:sp>
         <p:nvSpPr>
-          <p:cNvPr id="5" name="Rectangle 4"/>
+          <p:cNvPr id="4" name="Rectangle 3"/>
           <p:cNvSpPr/>
           <p:nvPr/>
         </p:nvSpPr>
@@ -7764,14 +7518,14 @@
       </p:sp>
       <p:sp>
         <p:nvSpPr>
-          <p:cNvPr id="6" name="TextBox 5"/>
+          <p:cNvPr id="5" name="TextBox 4"/>
           <p:cNvSpPr txBox="1"/>
           <p:nvPr/>
         </p:nvSpPr>
         <p:spPr>
           <a:xfrm>
             <a:off x="863600" y="2032000"/>
-            <a:ext cx="9906000" cy="1270000"/>
+            <a:ext cx="9906000" cy="508000"/>
           </a:xfrm>
           <a:prstGeom prst="rect">
             <a:avLst/>
@@ -7805,14 +7559,14 @@
       </p:sp>
       <p:sp>
         <p:nvSpPr>
-          <p:cNvPr id="7" name="TextBox 6"/>
+          <p:cNvPr id="6" name="TextBox 5"/>
           <p:cNvSpPr txBox="1"/>
           <p:nvPr/>
         </p:nvSpPr>
         <p:spPr>
           <a:xfrm>
             <a:off x="1320800" y="3251200"/>
-            <a:ext cx="8890000" cy="1270000"/>
+            <a:ext cx="8890000" cy="393700"/>
           </a:xfrm>
           <a:prstGeom prst="rect">
             <a:avLst/>
@@ -7855,6 +7609,14 @@
 <file path=ppt/slides/slide16.xml><?xml version="1.0" encoding="utf-8"?>
 <p:sld xmlns:a="http://schemas.openxmlformats.org/drawingml/2006/main" xmlns:p="http://schemas.openxmlformats.org/presentationml/2006/main" xmlns:r="http://schemas.openxmlformats.org/officeDocument/2006/relationships">
   <p:cSld>
+    <p:bg>
+      <p:bgPr>
+        <a:solidFill>
+          <a:srgbClr val="0F2346"/>
+        </a:solidFill>
+        <a:effectLst/>
+      </p:bgPr>
+    </p:bg>
     <p:spTree>
       <p:nvGrpSpPr>
         <p:cNvPr id="1" name=""/>
@@ -7870,50 +7632,6 @@
         </p:nvSpPr>
         <p:spPr>
           <a:xfrm>
-            <a:off x="0" y="0"/>
-            <a:ext cx="12192000" cy="6858000"/>
-          </a:xfrm>
-          <a:prstGeom prst="rect">
-            <a:avLst/>
-          </a:prstGeom>
-          <a:solidFill>
-            <a:srgbClr val="0F2346"/>
-          </a:solidFill>
-          <a:ln>
-            <a:noFill/>
-          </a:ln>
-          <a:effectLst/>
-        </p:spPr>
-        <p:style>
-          <a:lnRef idx="1">
-            <a:schemeClr val="accent1"/>
-          </a:lnRef>
-          <a:fillRef idx="3">
-            <a:schemeClr val="accent1"/>
-          </a:fillRef>
-          <a:effectRef idx="2">
-            <a:schemeClr val="accent1"/>
-          </a:effectRef>
-          <a:fontRef idx="minor">
-            <a:schemeClr val="lt1"/>
-          </a:fontRef>
-        </p:style>
-        <p:txBody>
-          <a:bodyPr rtlCol="0" anchor="ctr"/>
-          <a:lstStyle/>
-          <a:p>
-            <a:pPr algn="ctr"/>
-          </a:p>
-        </p:txBody>
-      </p:sp>
-      <p:sp>
-        <p:nvSpPr>
-          <p:cNvPr id="3" name="Rectangle 2"/>
-          <p:cNvSpPr/>
-          <p:nvPr/>
-        </p:nvSpPr>
-        <p:spPr>
-          <a:xfrm>
             <a:off x="355600" y="355600"/>
             <a:ext cx="11480800" cy="6146800"/>
           </a:xfrm>
@@ -7952,14 +7670,14 @@
       </p:sp>
       <p:sp>
         <p:nvSpPr>
-          <p:cNvPr id="4" name="TextBox 3"/>
+          <p:cNvPr id="3" name="TextBox 2"/>
           <p:cNvSpPr txBox="1"/>
           <p:nvPr/>
         </p:nvSpPr>
         <p:spPr>
           <a:xfrm>
             <a:off x="863600" y="952500"/>
-            <a:ext cx="1270000" cy="1270000"/>
+            <a:ext cx="1270000" cy="609600"/>
           </a:xfrm>
           <a:prstGeom prst="rect">
             <a:avLst/>
@@ -7993,7 +7711,7 @@
       </p:sp>
       <p:sp>
         <p:nvSpPr>
-          <p:cNvPr id="5" name="Rectangle 4"/>
+          <p:cNvPr id="4" name="Rectangle 3"/>
           <p:cNvSpPr/>
           <p:nvPr/>
         </p:nvSpPr>
@@ -8037,14 +7755,14 @@
       </p:sp>
       <p:sp>
         <p:nvSpPr>
-          <p:cNvPr id="6" name="TextBox 5"/>
+          <p:cNvPr id="5" name="TextBox 4"/>
           <p:cNvSpPr txBox="1"/>
           <p:nvPr/>
         </p:nvSpPr>
         <p:spPr>
           <a:xfrm>
             <a:off x="863600" y="2032000"/>
-            <a:ext cx="9906000" cy="1270000"/>
+            <a:ext cx="9906000" cy="508000"/>
           </a:xfrm>
           <a:prstGeom prst="rect">
             <a:avLst/>
@@ -8078,14 +7796,14 @@
       </p:sp>
       <p:sp>
         <p:nvSpPr>
-          <p:cNvPr id="7" name="TextBox 6"/>
+          <p:cNvPr id="6" name="TextBox 5"/>
           <p:cNvSpPr txBox="1"/>
           <p:nvPr/>
         </p:nvSpPr>
         <p:spPr>
           <a:xfrm>
             <a:off x="1320800" y="3251200"/>
-            <a:ext cx="8890000" cy="1270000"/>
+            <a:ext cx="8890000" cy="393700"/>
           </a:xfrm>
           <a:prstGeom prst="rect">
             <a:avLst/>
@@ -8119,7 +7837,7 @@
       </p:sp>
       <p:sp>
         <p:nvSpPr>
-          <p:cNvPr id="8" name="Rectangle 7"/>
+          <p:cNvPr id="7" name="Rectangle 6"/>
           <p:cNvSpPr/>
           <p:nvPr/>
         </p:nvSpPr>
@@ -8163,7 +7881,7 @@
       </p:sp>
       <p:sp>
         <p:nvSpPr>
-          <p:cNvPr id="9" name="Isosceles Triangle 8"/>
+          <p:cNvPr id="8" name="Isosceles Triangle 7"/>
           <p:cNvSpPr/>
           <p:nvPr/>
         </p:nvSpPr>
@@ -8207,14 +7925,14 @@
       </p:sp>
       <p:sp>
         <p:nvSpPr>
-          <p:cNvPr id="10" name="TextBox 9"/>
+          <p:cNvPr id="9" name="TextBox 8"/>
           <p:cNvSpPr txBox="1"/>
           <p:nvPr/>
         </p:nvSpPr>
         <p:spPr>
           <a:xfrm>
             <a:off x="1320800" y="4178300"/>
-            <a:ext cx="8890000" cy="1270000"/>
+            <a:ext cx="8890000" cy="393700"/>
           </a:xfrm>
           <a:prstGeom prst="rect">
             <a:avLst/>
@@ -8257,6 +7975,14 @@
 <file path=ppt/slides/slide17.xml><?xml version="1.0" encoding="utf-8"?>
 <p:sld xmlns:a="http://schemas.openxmlformats.org/drawingml/2006/main" xmlns:p="http://schemas.openxmlformats.org/presentationml/2006/main" xmlns:r="http://schemas.openxmlformats.org/officeDocument/2006/relationships">
   <p:cSld>
+    <p:bg>
+      <p:bgPr>
+        <a:solidFill>
+          <a:srgbClr val="0F2346"/>
+        </a:solidFill>
+        <a:effectLst/>
+      </p:bgPr>
+    </p:bg>
     <p:spTree>
       <p:nvGrpSpPr>
         <p:cNvPr id="1" name=""/>
@@ -8272,50 +7998,6 @@
         </p:nvSpPr>
         <p:spPr>
           <a:xfrm>
-            <a:off x="0" y="0"/>
-            <a:ext cx="12192000" cy="6858000"/>
-          </a:xfrm>
-          <a:prstGeom prst="rect">
-            <a:avLst/>
-          </a:prstGeom>
-          <a:solidFill>
-            <a:srgbClr val="0F2346"/>
-          </a:solidFill>
-          <a:ln>
-            <a:noFill/>
-          </a:ln>
-          <a:effectLst/>
-        </p:spPr>
-        <p:style>
-          <a:lnRef idx="1">
-            <a:schemeClr val="accent1"/>
-          </a:lnRef>
-          <a:fillRef idx="3">
-            <a:schemeClr val="accent1"/>
-          </a:fillRef>
-          <a:effectRef idx="2">
-            <a:schemeClr val="accent1"/>
-          </a:effectRef>
-          <a:fontRef idx="minor">
-            <a:schemeClr val="lt1"/>
-          </a:fontRef>
-        </p:style>
-        <p:txBody>
-          <a:bodyPr rtlCol="0" anchor="ctr"/>
-          <a:lstStyle/>
-          <a:p>
-            <a:pPr algn="ctr"/>
-          </a:p>
-        </p:txBody>
-      </p:sp>
-      <p:sp>
-        <p:nvSpPr>
-          <p:cNvPr id="3" name="Rectangle 2"/>
-          <p:cNvSpPr/>
-          <p:nvPr/>
-        </p:nvSpPr>
-        <p:spPr>
-          <a:xfrm>
             <a:off x="355600" y="355600"/>
             <a:ext cx="11480800" cy="6146800"/>
           </a:xfrm>
@@ -8354,14 +8036,14 @@
       </p:sp>
       <p:sp>
         <p:nvSpPr>
-          <p:cNvPr id="4" name="TextBox 3"/>
+          <p:cNvPr id="3" name="TextBox 2"/>
           <p:cNvSpPr txBox="1"/>
           <p:nvPr/>
         </p:nvSpPr>
         <p:spPr>
           <a:xfrm>
             <a:off x="863600" y="952500"/>
-            <a:ext cx="1270000" cy="1270000"/>
+            <a:ext cx="1270000" cy="609600"/>
           </a:xfrm>
           <a:prstGeom prst="rect">
             <a:avLst/>
@@ -8395,7 +8077,7 @@
       </p:sp>
       <p:sp>
         <p:nvSpPr>
-          <p:cNvPr id="5" name="Rectangle 4"/>
+          <p:cNvPr id="4" name="Rectangle 3"/>
           <p:cNvSpPr/>
           <p:nvPr/>
         </p:nvSpPr>
@@ -8439,14 +8121,14 @@
       </p:sp>
       <p:sp>
         <p:nvSpPr>
-          <p:cNvPr id="6" name="TextBox 5"/>
+          <p:cNvPr id="5" name="TextBox 4"/>
           <p:cNvSpPr txBox="1"/>
           <p:nvPr/>
         </p:nvSpPr>
         <p:spPr>
           <a:xfrm>
             <a:off x="863600" y="2032000"/>
-            <a:ext cx="9906000" cy="1270000"/>
+            <a:ext cx="9906000" cy="508000"/>
           </a:xfrm>
           <a:prstGeom prst="rect">
             <a:avLst/>
@@ -8480,14 +8162,14 @@
       </p:sp>
       <p:sp>
         <p:nvSpPr>
-          <p:cNvPr id="7" name="TextBox 6"/>
+          <p:cNvPr id="6" name="TextBox 5"/>
           <p:cNvSpPr txBox="1"/>
           <p:nvPr/>
         </p:nvSpPr>
         <p:spPr>
           <a:xfrm>
             <a:off x="1320800" y="3251200"/>
-            <a:ext cx="8890000" cy="1270000"/>
+            <a:ext cx="8890000" cy="393700"/>
           </a:xfrm>
           <a:prstGeom prst="rect">
             <a:avLst/>
@@ -8521,7 +8203,7 @@
       </p:sp>
       <p:sp>
         <p:nvSpPr>
-          <p:cNvPr id="8" name="Rectangle 7"/>
+          <p:cNvPr id="7" name="Rectangle 6"/>
           <p:cNvSpPr/>
           <p:nvPr/>
         </p:nvSpPr>
@@ -8565,7 +8247,7 @@
       </p:sp>
       <p:sp>
         <p:nvSpPr>
-          <p:cNvPr id="9" name="Isosceles Triangle 8"/>
+          <p:cNvPr id="8" name="Isosceles Triangle 7"/>
           <p:cNvSpPr/>
           <p:nvPr/>
         </p:nvSpPr>
@@ -8609,14 +8291,14 @@
       </p:sp>
       <p:sp>
         <p:nvSpPr>
-          <p:cNvPr id="10" name="TextBox 9"/>
+          <p:cNvPr id="9" name="TextBox 8"/>
           <p:cNvSpPr txBox="1"/>
           <p:nvPr/>
         </p:nvSpPr>
         <p:spPr>
           <a:xfrm>
             <a:off x="1320800" y="4178300"/>
-            <a:ext cx="8890000" cy="1270000"/>
+            <a:ext cx="8890000" cy="393700"/>
           </a:xfrm>
           <a:prstGeom prst="rect">
             <a:avLst/>
@@ -8650,7 +8332,7 @@
       </p:sp>
       <p:sp>
         <p:nvSpPr>
-          <p:cNvPr id="11" name="Rectangle 10"/>
+          <p:cNvPr id="10" name="Rectangle 9"/>
           <p:cNvSpPr/>
           <p:nvPr/>
         </p:nvSpPr>
@@ -8694,7 +8376,7 @@
       </p:sp>
       <p:sp>
         <p:nvSpPr>
-          <p:cNvPr id="12" name="Isosceles Triangle 11"/>
+          <p:cNvPr id="11" name="Isosceles Triangle 10"/>
           <p:cNvSpPr/>
           <p:nvPr/>
         </p:nvSpPr>
@@ -8738,14 +8420,14 @@
       </p:sp>
       <p:sp>
         <p:nvSpPr>
-          <p:cNvPr id="13" name="TextBox 12"/>
+          <p:cNvPr id="12" name="TextBox 11"/>
           <p:cNvSpPr txBox="1"/>
           <p:nvPr/>
         </p:nvSpPr>
         <p:spPr>
           <a:xfrm>
             <a:off x="1320800" y="5105400"/>
-            <a:ext cx="8890000" cy="1270000"/>
+            <a:ext cx="8890000" cy="393700"/>
           </a:xfrm>
           <a:prstGeom prst="rect">
             <a:avLst/>
@@ -8788,6 +8470,14 @@
 <file path=ppt/slides/slide18.xml><?xml version="1.0" encoding="utf-8"?>
 <p:sld xmlns:a="http://schemas.openxmlformats.org/drawingml/2006/main" xmlns:p="http://schemas.openxmlformats.org/presentationml/2006/main" xmlns:r="http://schemas.openxmlformats.org/officeDocument/2006/relationships">
   <p:cSld>
+    <p:bg>
+      <p:bgPr>
+        <a:solidFill>
+          <a:srgbClr val="F5F1E8"/>
+        </a:solidFill>
+        <a:effectLst/>
+      </p:bgPr>
+    </p:bg>
     <p:spTree>
       <p:nvGrpSpPr>
         <p:cNvPr id="1" name=""/>
@@ -8803,50 +8493,6 @@
         </p:nvSpPr>
         <p:spPr>
           <a:xfrm>
-            <a:off x="0" y="0"/>
-            <a:ext cx="12192000" cy="6858000"/>
-          </a:xfrm>
-          <a:prstGeom prst="rect">
-            <a:avLst/>
-          </a:prstGeom>
-          <a:solidFill>
-            <a:srgbClr val="F5F1E8"/>
-          </a:solidFill>
-          <a:ln>
-            <a:noFill/>
-          </a:ln>
-          <a:effectLst/>
-        </p:spPr>
-        <p:style>
-          <a:lnRef idx="1">
-            <a:schemeClr val="accent1"/>
-          </a:lnRef>
-          <a:fillRef idx="3">
-            <a:schemeClr val="accent1"/>
-          </a:fillRef>
-          <a:effectRef idx="2">
-            <a:schemeClr val="accent1"/>
-          </a:effectRef>
-          <a:fontRef idx="minor">
-            <a:schemeClr val="lt1"/>
-          </a:fontRef>
-        </p:style>
-        <p:txBody>
-          <a:bodyPr rtlCol="0" anchor="ctr"/>
-          <a:lstStyle/>
-          <a:p>
-            <a:pPr algn="ctr"/>
-          </a:p>
-        </p:txBody>
-      </p:sp>
-      <p:sp>
-        <p:nvSpPr>
-          <p:cNvPr id="3" name="Rectangle 2"/>
-          <p:cNvSpPr/>
-          <p:nvPr/>
-        </p:nvSpPr>
-        <p:spPr>
-          <a:xfrm>
             <a:off x="1016000" y="1930400"/>
             <a:ext cx="381000" cy="25400"/>
           </a:xfrm>
@@ -8885,14 +8531,14 @@
       </p:sp>
       <p:sp>
         <p:nvSpPr>
-          <p:cNvPr id="4" name="TextBox 3"/>
+          <p:cNvPr id="3" name="TextBox 2"/>
           <p:cNvSpPr txBox="1"/>
           <p:nvPr/>
         </p:nvSpPr>
         <p:spPr>
           <a:xfrm>
             <a:off x="1651000" y="1790700"/>
-            <a:ext cx="9652000" cy="1270000"/>
+            <a:ext cx="9652000" cy="419100"/>
           </a:xfrm>
           <a:prstGeom prst="rect">
             <a:avLst/>
@@ -8935,6 +8581,14 @@
 <file path=ppt/slides/slide19.xml><?xml version="1.0" encoding="utf-8"?>
 <p:sld xmlns:a="http://schemas.openxmlformats.org/drawingml/2006/main" xmlns:p="http://schemas.openxmlformats.org/presentationml/2006/main" xmlns:r="http://schemas.openxmlformats.org/officeDocument/2006/relationships">
   <p:cSld>
+    <p:bg>
+      <p:bgPr>
+        <a:solidFill>
+          <a:srgbClr val="F5F1E8"/>
+        </a:solidFill>
+        <a:effectLst/>
+      </p:bgPr>
+    </p:bg>
     <p:spTree>
       <p:nvGrpSpPr>
         <p:cNvPr id="1" name=""/>
@@ -8950,50 +8604,6 @@
         </p:nvSpPr>
         <p:spPr>
           <a:xfrm>
-            <a:off x="0" y="0"/>
-            <a:ext cx="12192000" cy="6858000"/>
-          </a:xfrm>
-          <a:prstGeom prst="rect">
-            <a:avLst/>
-          </a:prstGeom>
-          <a:solidFill>
-            <a:srgbClr val="F5F1E8"/>
-          </a:solidFill>
-          <a:ln>
-            <a:noFill/>
-          </a:ln>
-          <a:effectLst/>
-        </p:spPr>
-        <p:style>
-          <a:lnRef idx="1">
-            <a:schemeClr val="accent1"/>
-          </a:lnRef>
-          <a:fillRef idx="3">
-            <a:schemeClr val="accent1"/>
-          </a:fillRef>
-          <a:effectRef idx="2">
-            <a:schemeClr val="accent1"/>
-          </a:effectRef>
-          <a:fontRef idx="minor">
-            <a:schemeClr val="lt1"/>
-          </a:fontRef>
-        </p:style>
-        <p:txBody>
-          <a:bodyPr rtlCol="0" anchor="ctr"/>
-          <a:lstStyle/>
-          <a:p>
-            <a:pPr algn="ctr"/>
-          </a:p>
-        </p:txBody>
-      </p:sp>
-      <p:sp>
-        <p:nvSpPr>
-          <p:cNvPr id="3" name="Rectangle 2"/>
-          <p:cNvSpPr/>
-          <p:nvPr/>
-        </p:nvSpPr>
-        <p:spPr>
-          <a:xfrm>
             <a:off x="1016000" y="1930400"/>
             <a:ext cx="381000" cy="25400"/>
           </a:xfrm>
@@ -9032,14 +8642,14 @@
       </p:sp>
       <p:sp>
         <p:nvSpPr>
-          <p:cNvPr id="4" name="TextBox 3"/>
+          <p:cNvPr id="3" name="TextBox 2"/>
           <p:cNvSpPr txBox="1"/>
           <p:nvPr/>
         </p:nvSpPr>
         <p:spPr>
           <a:xfrm>
             <a:off x="1651000" y="1790700"/>
-            <a:ext cx="9652000" cy="1270000"/>
+            <a:ext cx="9652000" cy="419100"/>
           </a:xfrm>
           <a:prstGeom prst="rect">
             <a:avLst/>
@@ -9073,7 +8683,7 @@
       </p:sp>
       <p:sp>
         <p:nvSpPr>
-          <p:cNvPr id="5" name="Rectangle 4"/>
+          <p:cNvPr id="4" name="Rectangle 3"/>
           <p:cNvSpPr/>
           <p:nvPr/>
         </p:nvSpPr>
@@ -9117,14 +8727,14 @@
       </p:sp>
       <p:sp>
         <p:nvSpPr>
-          <p:cNvPr id="6" name="TextBox 5"/>
+          <p:cNvPr id="5" name="TextBox 4"/>
           <p:cNvSpPr txBox="1"/>
           <p:nvPr/>
         </p:nvSpPr>
         <p:spPr>
           <a:xfrm>
             <a:off x="1651000" y="2882900"/>
-            <a:ext cx="9652000" cy="1270000"/>
+            <a:ext cx="9652000" cy="419100"/>
           </a:xfrm>
           <a:prstGeom prst="rect">
             <a:avLst/>
@@ -9167,6 +8777,14 @@
 <file path=ppt/slides/slide2.xml><?xml version="1.0" encoding="utf-8"?>
 <p:sld xmlns:a="http://schemas.openxmlformats.org/drawingml/2006/main" xmlns:p="http://schemas.openxmlformats.org/presentationml/2006/main" xmlns:r="http://schemas.openxmlformats.org/officeDocument/2006/relationships">
   <p:cSld>
+    <p:bg>
+      <p:bgPr>
+        <a:solidFill>
+          <a:srgbClr val="0F2346"/>
+        </a:solidFill>
+        <a:effectLst/>
+      </p:bgPr>
+    </p:bg>
     <p:spTree>
       <p:nvGrpSpPr>
         <p:cNvPr id="1" name=""/>
@@ -9182,50 +8800,6 @@
         </p:nvSpPr>
         <p:spPr>
           <a:xfrm>
-            <a:off x="0" y="0"/>
-            <a:ext cx="12192000" cy="6858000"/>
-          </a:xfrm>
-          <a:prstGeom prst="rect">
-            <a:avLst/>
-          </a:prstGeom>
-          <a:solidFill>
-            <a:srgbClr val="0F2346"/>
-          </a:solidFill>
-          <a:ln>
-            <a:noFill/>
-          </a:ln>
-          <a:effectLst/>
-        </p:spPr>
-        <p:style>
-          <a:lnRef idx="1">
-            <a:schemeClr val="accent1"/>
-          </a:lnRef>
-          <a:fillRef idx="3">
-            <a:schemeClr val="accent1"/>
-          </a:fillRef>
-          <a:effectRef idx="2">
-            <a:schemeClr val="accent1"/>
-          </a:effectRef>
-          <a:fontRef idx="minor">
-            <a:schemeClr val="lt1"/>
-          </a:fontRef>
-        </p:style>
-        <p:txBody>
-          <a:bodyPr rtlCol="0" anchor="ctr"/>
-          <a:lstStyle/>
-          <a:p>
-            <a:pPr algn="ctr"/>
-          </a:p>
-        </p:txBody>
-      </p:sp>
-      <p:sp>
-        <p:nvSpPr>
-          <p:cNvPr id="3" name="Rectangle 2"/>
-          <p:cNvSpPr/>
-          <p:nvPr/>
-        </p:nvSpPr>
-        <p:spPr>
-          <a:xfrm>
             <a:off x="355600" y="355600"/>
             <a:ext cx="11480800" cy="6146800"/>
           </a:xfrm>
@@ -9264,7 +8838,7 @@
       </p:sp>
       <p:sp>
         <p:nvSpPr>
-          <p:cNvPr id="4" name="Rectangle 3"/>
+          <p:cNvPr id="3" name="Rectangle 2"/>
           <p:cNvSpPr/>
           <p:nvPr/>
         </p:nvSpPr>
@@ -9308,7 +8882,7 @@
       </p:sp>
       <p:sp>
         <p:nvSpPr>
-          <p:cNvPr id="5" name="Rectangle 4"/>
+          <p:cNvPr id="4" name="Rectangle 3"/>
           <p:cNvSpPr/>
           <p:nvPr/>
         </p:nvSpPr>
@@ -9352,7 +8926,7 @@
       </p:sp>
       <p:sp>
         <p:nvSpPr>
-          <p:cNvPr id="6" name="Rectangle 5"/>
+          <p:cNvPr id="5" name="Rectangle 4"/>
           <p:cNvSpPr/>
           <p:nvPr/>
         </p:nvSpPr>
@@ -9396,7 +8970,7 @@
       </p:sp>
       <p:sp>
         <p:nvSpPr>
-          <p:cNvPr id="7" name="Rectangle 6"/>
+          <p:cNvPr id="6" name="Rectangle 5"/>
           <p:cNvSpPr/>
           <p:nvPr/>
         </p:nvSpPr>
@@ -9440,14 +9014,14 @@
       </p:sp>
       <p:sp>
         <p:nvSpPr>
-          <p:cNvPr id="8" name="TextBox 7"/>
+          <p:cNvPr id="7" name="TextBox 6"/>
           <p:cNvSpPr txBox="1"/>
           <p:nvPr/>
         </p:nvSpPr>
         <p:spPr>
           <a:xfrm>
             <a:off x="1320800" y="1473200"/>
-            <a:ext cx="9525000" cy="1270000"/>
+            <a:ext cx="9525000" cy="419100"/>
           </a:xfrm>
           <a:prstGeom prst="rect">
             <a:avLst/>
@@ -9481,7 +9055,7 @@
       </p:sp>
       <p:sp>
         <p:nvSpPr>
-          <p:cNvPr id="9" name="Rectangle 8"/>
+          <p:cNvPr id="8" name="Rectangle 7"/>
           <p:cNvSpPr/>
           <p:nvPr/>
         </p:nvSpPr>
@@ -9525,7 +9099,7 @@
       </p:sp>
       <p:sp>
         <p:nvSpPr>
-          <p:cNvPr id="10" name="Isosceles Triangle 9"/>
+          <p:cNvPr id="9" name="Isosceles Triangle 8"/>
           <p:cNvSpPr/>
           <p:nvPr/>
         </p:nvSpPr>
@@ -9569,14 +9143,14 @@
       </p:sp>
       <p:sp>
         <p:nvSpPr>
-          <p:cNvPr id="11" name="TextBox 10"/>
+          <p:cNvPr id="10" name="TextBox 9"/>
           <p:cNvSpPr txBox="1"/>
           <p:nvPr/>
         </p:nvSpPr>
         <p:spPr>
           <a:xfrm>
             <a:off x="1320800" y="2463800"/>
-            <a:ext cx="9525000" cy="1270000"/>
+            <a:ext cx="9525000" cy="419100"/>
           </a:xfrm>
           <a:prstGeom prst="rect">
             <a:avLst/>
@@ -9619,6 +9193,14 @@
 <file path=ppt/slides/slide20.xml><?xml version="1.0" encoding="utf-8"?>
 <p:sld xmlns:a="http://schemas.openxmlformats.org/drawingml/2006/main" xmlns:p="http://schemas.openxmlformats.org/presentationml/2006/main" xmlns:r="http://schemas.openxmlformats.org/officeDocument/2006/relationships">
   <p:cSld>
+    <p:bg>
+      <p:bgPr>
+        <a:solidFill>
+          <a:srgbClr val="F5F1E8"/>
+        </a:solidFill>
+        <a:effectLst/>
+      </p:bgPr>
+    </p:bg>
     <p:spTree>
       <p:nvGrpSpPr>
         <p:cNvPr id="1" name=""/>
@@ -9634,50 +9216,6 @@
         </p:nvSpPr>
         <p:spPr>
           <a:xfrm>
-            <a:off x="0" y="0"/>
-            <a:ext cx="12192000" cy="6858000"/>
-          </a:xfrm>
-          <a:prstGeom prst="rect">
-            <a:avLst/>
-          </a:prstGeom>
-          <a:solidFill>
-            <a:srgbClr val="F5F1E8"/>
-          </a:solidFill>
-          <a:ln>
-            <a:noFill/>
-          </a:ln>
-          <a:effectLst/>
-        </p:spPr>
-        <p:style>
-          <a:lnRef idx="1">
-            <a:schemeClr val="accent1"/>
-          </a:lnRef>
-          <a:fillRef idx="3">
-            <a:schemeClr val="accent1"/>
-          </a:fillRef>
-          <a:effectRef idx="2">
-            <a:schemeClr val="accent1"/>
-          </a:effectRef>
-          <a:fontRef idx="minor">
-            <a:schemeClr val="lt1"/>
-          </a:fontRef>
-        </p:style>
-        <p:txBody>
-          <a:bodyPr rtlCol="0" anchor="ctr"/>
-          <a:lstStyle/>
-          <a:p>
-            <a:pPr algn="ctr"/>
-          </a:p>
-        </p:txBody>
-      </p:sp>
-      <p:sp>
-        <p:nvSpPr>
-          <p:cNvPr id="3" name="Rectangle 2"/>
-          <p:cNvSpPr/>
-          <p:nvPr/>
-        </p:nvSpPr>
-        <p:spPr>
-          <a:xfrm>
             <a:off x="1016000" y="1930400"/>
             <a:ext cx="381000" cy="25400"/>
           </a:xfrm>
@@ -9716,14 +9254,14 @@
       </p:sp>
       <p:sp>
         <p:nvSpPr>
-          <p:cNvPr id="4" name="TextBox 3"/>
+          <p:cNvPr id="3" name="TextBox 2"/>
           <p:cNvSpPr txBox="1"/>
           <p:nvPr/>
         </p:nvSpPr>
         <p:spPr>
           <a:xfrm>
             <a:off x="1651000" y="1790700"/>
-            <a:ext cx="9652000" cy="1270000"/>
+            <a:ext cx="9652000" cy="419100"/>
           </a:xfrm>
           <a:prstGeom prst="rect">
             <a:avLst/>
@@ -9757,7 +9295,7 @@
       </p:sp>
       <p:sp>
         <p:nvSpPr>
-          <p:cNvPr id="5" name="Rectangle 4"/>
+          <p:cNvPr id="4" name="Rectangle 3"/>
           <p:cNvSpPr/>
           <p:nvPr/>
         </p:nvSpPr>
@@ -9801,14 +9339,14 @@
       </p:sp>
       <p:sp>
         <p:nvSpPr>
-          <p:cNvPr id="6" name="TextBox 5"/>
+          <p:cNvPr id="5" name="TextBox 4"/>
           <p:cNvSpPr txBox="1"/>
           <p:nvPr/>
         </p:nvSpPr>
         <p:spPr>
           <a:xfrm>
             <a:off x="1651000" y="2882900"/>
-            <a:ext cx="9652000" cy="1270000"/>
+            <a:ext cx="9652000" cy="419100"/>
           </a:xfrm>
           <a:prstGeom prst="rect">
             <a:avLst/>
@@ -9842,7 +9380,7 @@
       </p:sp>
       <p:sp>
         <p:nvSpPr>
-          <p:cNvPr id="7" name="Rectangle 6"/>
+          <p:cNvPr id="6" name="Rectangle 5"/>
           <p:cNvSpPr/>
           <p:nvPr/>
         </p:nvSpPr>
@@ -9886,14 +9424,14 @@
       </p:sp>
       <p:sp>
         <p:nvSpPr>
-          <p:cNvPr id="8" name="TextBox 7"/>
+          <p:cNvPr id="7" name="TextBox 6"/>
           <p:cNvSpPr txBox="1"/>
           <p:nvPr/>
         </p:nvSpPr>
         <p:spPr>
           <a:xfrm>
             <a:off x="1651000" y="3975100"/>
-            <a:ext cx="9652000" cy="1270000"/>
+            <a:ext cx="9652000" cy="419100"/>
           </a:xfrm>
           <a:prstGeom prst="rect">
             <a:avLst/>
@@ -9936,6 +9474,14 @@
 <file path=ppt/slides/slide21.xml><?xml version="1.0" encoding="utf-8"?>
 <p:sld xmlns:a="http://schemas.openxmlformats.org/drawingml/2006/main" xmlns:p="http://schemas.openxmlformats.org/presentationml/2006/main" xmlns:r="http://schemas.openxmlformats.org/officeDocument/2006/relationships">
   <p:cSld>
+    <p:bg>
+      <p:bgPr>
+        <a:solidFill>
+          <a:srgbClr val="0F2346"/>
+        </a:solidFill>
+        <a:effectLst/>
+      </p:bgPr>
+    </p:bg>
     <p:spTree>
       <p:nvGrpSpPr>
         <p:cNvPr id="1" name=""/>
@@ -9951,50 +9497,6 @@
         </p:nvSpPr>
         <p:spPr>
           <a:xfrm>
-            <a:off x="0" y="0"/>
-            <a:ext cx="12192000" cy="6858000"/>
-          </a:xfrm>
-          <a:prstGeom prst="rect">
-            <a:avLst/>
-          </a:prstGeom>
-          <a:solidFill>
-            <a:srgbClr val="0F2346"/>
-          </a:solidFill>
-          <a:ln>
-            <a:noFill/>
-          </a:ln>
-          <a:effectLst/>
-        </p:spPr>
-        <p:style>
-          <a:lnRef idx="1">
-            <a:schemeClr val="accent1"/>
-          </a:lnRef>
-          <a:fillRef idx="3">
-            <a:schemeClr val="accent1"/>
-          </a:fillRef>
-          <a:effectRef idx="2">
-            <a:schemeClr val="accent1"/>
-          </a:effectRef>
-          <a:fontRef idx="minor">
-            <a:schemeClr val="lt1"/>
-          </a:fontRef>
-        </p:style>
-        <p:txBody>
-          <a:bodyPr rtlCol="0" anchor="ctr"/>
-          <a:lstStyle/>
-          <a:p>
-            <a:pPr algn="ctr"/>
-          </a:p>
-        </p:txBody>
-      </p:sp>
-      <p:sp>
-        <p:nvSpPr>
-          <p:cNvPr id="3" name="Rectangle 2"/>
-          <p:cNvSpPr/>
-          <p:nvPr/>
-        </p:nvSpPr>
-        <p:spPr>
-          <a:xfrm>
             <a:off x="355600" y="355600"/>
             <a:ext cx="11480800" cy="6146800"/>
           </a:xfrm>
@@ -10033,14 +9535,14 @@
       </p:sp>
       <p:sp>
         <p:nvSpPr>
-          <p:cNvPr id="4" name="TextBox 3"/>
+          <p:cNvPr id="3" name="TextBox 2"/>
           <p:cNvSpPr txBox="1"/>
           <p:nvPr/>
         </p:nvSpPr>
         <p:spPr>
           <a:xfrm>
             <a:off x="1016000" y="2032000"/>
-            <a:ext cx="10160000" cy="1270000"/>
+            <a:ext cx="10160000" cy="1250950"/>
           </a:xfrm>
           <a:prstGeom prst="rect">
             <a:avLst/>
@@ -10086,7 +9588,7 @@
       </p:sp>
       <p:sp>
         <p:nvSpPr>
-          <p:cNvPr id="5" name="Rectangle 4"/>
+          <p:cNvPr id="4" name="Rectangle 3"/>
           <p:cNvSpPr/>
           <p:nvPr/>
         </p:nvSpPr>
@@ -10130,14 +9632,14 @@
       </p:sp>
       <p:sp>
         <p:nvSpPr>
-          <p:cNvPr id="6" name="TextBox 5"/>
+          <p:cNvPr id="5" name="TextBox 4"/>
           <p:cNvSpPr txBox="1"/>
           <p:nvPr/>
         </p:nvSpPr>
         <p:spPr>
           <a:xfrm>
             <a:off x="1016000" y="4191000"/>
-            <a:ext cx="10160000" cy="1270000"/>
+            <a:ext cx="10160000" cy="933450"/>
           </a:xfrm>
           <a:prstGeom prst="rect">
             <a:avLst/>
@@ -10156,9 +9658,9 @@
               </a:lnSpc>
             </a:pPr>
             <a:r>
-              <a:rPr sz="2000" b="0" i="0">
+              <a:rPr sz="2300" b="0" i="0">
                 <a:solidFill>
-                  <a:srgbClr val="B9C3D2"/>
+                  <a:srgbClr val="F5F1E8"/>
                 </a:solidFill>
                 <a:latin typeface="DM Sans"/>
                 <a:ea typeface="DM Sans"/>
@@ -10177,9 +9679,9 @@
               </a:spcBef>
             </a:pPr>
             <a:r>
-              <a:rPr sz="2000" b="0" i="0">
+              <a:rPr sz="2300" b="0" i="0">
                 <a:solidFill>
-                  <a:srgbClr val="B9C3D2"/>
+                  <a:srgbClr val="F5F1E8"/>
                 </a:solidFill>
                 <a:latin typeface="DM Sans"/>
                 <a:ea typeface="DM Sans"/>
@@ -10201,6 +9703,14 @@
 <file path=ppt/slides/slide22.xml><?xml version="1.0" encoding="utf-8"?>
 <p:sld xmlns:a="http://schemas.openxmlformats.org/drawingml/2006/main" xmlns:p="http://schemas.openxmlformats.org/presentationml/2006/main" xmlns:r="http://schemas.openxmlformats.org/officeDocument/2006/relationships">
   <p:cSld>
+    <p:bg>
+      <p:bgPr>
+        <a:solidFill>
+          <a:srgbClr val="F5F1E8"/>
+        </a:solidFill>
+        <a:effectLst/>
+      </p:bgPr>
+    </p:bg>
     <p:spTree>
       <p:nvGrpSpPr>
         <p:cNvPr id="1" name=""/>
@@ -10210,58 +9720,14 @@
       <p:grpSpPr/>
       <p:sp>
         <p:nvSpPr>
-          <p:cNvPr id="2" name="Rectangle 1"/>
-          <p:cNvSpPr/>
-          <p:nvPr/>
-        </p:nvSpPr>
-        <p:spPr>
-          <a:xfrm>
-            <a:off x="0" y="0"/>
-            <a:ext cx="12192000" cy="6858000"/>
-          </a:xfrm>
-          <a:prstGeom prst="rect">
-            <a:avLst/>
-          </a:prstGeom>
-          <a:solidFill>
-            <a:srgbClr val="F5F1E8"/>
-          </a:solidFill>
-          <a:ln>
-            <a:noFill/>
-          </a:ln>
-          <a:effectLst/>
-        </p:spPr>
-        <p:style>
-          <a:lnRef idx="1">
-            <a:schemeClr val="accent1"/>
-          </a:lnRef>
-          <a:fillRef idx="3">
-            <a:schemeClr val="accent1"/>
-          </a:fillRef>
-          <a:effectRef idx="2">
-            <a:schemeClr val="accent1"/>
-          </a:effectRef>
-          <a:fontRef idx="minor">
-            <a:schemeClr val="lt1"/>
-          </a:fontRef>
-        </p:style>
-        <p:txBody>
-          <a:bodyPr rtlCol="0" anchor="ctr"/>
-          <a:lstStyle/>
-          <a:p>
-            <a:pPr algn="ctr"/>
-          </a:p>
-        </p:txBody>
-      </p:sp>
-      <p:sp>
-        <p:nvSpPr>
-          <p:cNvPr id="3" name="TextBox 2"/>
+          <p:cNvPr id="2" name="TextBox 1"/>
           <p:cNvSpPr txBox="1"/>
           <p:nvPr/>
         </p:nvSpPr>
         <p:spPr>
           <a:xfrm>
             <a:off x="1016000" y="1854200"/>
-            <a:ext cx="635000" cy="1270000"/>
+            <a:ext cx="635000" cy="241300"/>
           </a:xfrm>
           <a:prstGeom prst="rect">
             <a:avLst/>
@@ -10295,14 +9761,14 @@
       </p:sp>
       <p:sp>
         <p:nvSpPr>
-          <p:cNvPr id="4" name="TextBox 3"/>
+          <p:cNvPr id="3" name="TextBox 2"/>
           <p:cNvSpPr txBox="1"/>
           <p:nvPr/>
         </p:nvSpPr>
         <p:spPr>
           <a:xfrm>
             <a:off x="1778000" y="1778000"/>
-            <a:ext cx="9525000" cy="1270000"/>
+            <a:ext cx="9525000" cy="431800"/>
           </a:xfrm>
           <a:prstGeom prst="rect">
             <a:avLst/>
@@ -10336,7 +9802,7 @@
       </p:sp>
       <p:sp>
         <p:nvSpPr>
-          <p:cNvPr id="5" name="Rectangle 4"/>
+          <p:cNvPr id="4" name="Rectangle 3"/>
           <p:cNvSpPr/>
           <p:nvPr/>
         </p:nvSpPr>
@@ -10389,6 +9855,14 @@
 <file path=ppt/slides/slide23.xml><?xml version="1.0" encoding="utf-8"?>
 <p:sld xmlns:a="http://schemas.openxmlformats.org/drawingml/2006/main" xmlns:p="http://schemas.openxmlformats.org/presentationml/2006/main" xmlns:r="http://schemas.openxmlformats.org/officeDocument/2006/relationships">
   <p:cSld>
+    <p:bg>
+      <p:bgPr>
+        <a:solidFill>
+          <a:srgbClr val="F5F1E8"/>
+        </a:solidFill>
+        <a:effectLst/>
+      </p:bgPr>
+    </p:bg>
     <p:spTree>
       <p:nvGrpSpPr>
         <p:cNvPr id="1" name=""/>
@@ -10398,58 +9872,14 @@
       <p:grpSpPr/>
       <p:sp>
         <p:nvSpPr>
-          <p:cNvPr id="2" name="Rectangle 1"/>
-          <p:cNvSpPr/>
-          <p:nvPr/>
-        </p:nvSpPr>
-        <p:spPr>
-          <a:xfrm>
-            <a:off x="0" y="0"/>
-            <a:ext cx="12192000" cy="6858000"/>
-          </a:xfrm>
-          <a:prstGeom prst="rect">
-            <a:avLst/>
-          </a:prstGeom>
-          <a:solidFill>
-            <a:srgbClr val="F5F1E8"/>
-          </a:solidFill>
-          <a:ln>
-            <a:noFill/>
-          </a:ln>
-          <a:effectLst/>
-        </p:spPr>
-        <p:style>
-          <a:lnRef idx="1">
-            <a:schemeClr val="accent1"/>
-          </a:lnRef>
-          <a:fillRef idx="3">
-            <a:schemeClr val="accent1"/>
-          </a:fillRef>
-          <a:effectRef idx="2">
-            <a:schemeClr val="accent1"/>
-          </a:effectRef>
-          <a:fontRef idx="minor">
-            <a:schemeClr val="lt1"/>
-          </a:fontRef>
-        </p:style>
-        <p:txBody>
-          <a:bodyPr rtlCol="0" anchor="ctr"/>
-          <a:lstStyle/>
-          <a:p>
-            <a:pPr algn="ctr"/>
-          </a:p>
-        </p:txBody>
-      </p:sp>
-      <p:sp>
-        <p:nvSpPr>
-          <p:cNvPr id="3" name="TextBox 2"/>
+          <p:cNvPr id="2" name="TextBox 1"/>
           <p:cNvSpPr txBox="1"/>
           <p:nvPr/>
         </p:nvSpPr>
         <p:spPr>
           <a:xfrm>
             <a:off x="1016000" y="1854200"/>
-            <a:ext cx="635000" cy="1270000"/>
+            <a:ext cx="635000" cy="241300"/>
           </a:xfrm>
           <a:prstGeom prst="rect">
             <a:avLst/>
@@ -10483,14 +9913,14 @@
       </p:sp>
       <p:sp>
         <p:nvSpPr>
-          <p:cNvPr id="4" name="TextBox 3"/>
+          <p:cNvPr id="3" name="TextBox 2"/>
           <p:cNvSpPr txBox="1"/>
           <p:nvPr/>
         </p:nvSpPr>
         <p:spPr>
           <a:xfrm>
             <a:off x="1778000" y="1778000"/>
-            <a:ext cx="9525000" cy="1270000"/>
+            <a:ext cx="9525000" cy="431800"/>
           </a:xfrm>
           <a:prstGeom prst="rect">
             <a:avLst/>
@@ -10524,7 +9954,7 @@
       </p:sp>
       <p:sp>
         <p:nvSpPr>
-          <p:cNvPr id="5" name="Rectangle 4"/>
+          <p:cNvPr id="4" name="Rectangle 3"/>
           <p:cNvSpPr/>
           <p:nvPr/>
         </p:nvSpPr>
@@ -10568,14 +9998,14 @@
       </p:sp>
       <p:sp>
         <p:nvSpPr>
-          <p:cNvPr id="6" name="TextBox 5"/>
+          <p:cNvPr id="5" name="TextBox 4"/>
           <p:cNvSpPr txBox="1"/>
           <p:nvPr/>
         </p:nvSpPr>
         <p:spPr>
           <a:xfrm>
             <a:off x="1016000" y="2984500"/>
-            <a:ext cx="635000" cy="1270000"/>
+            <a:ext cx="635000" cy="241300"/>
           </a:xfrm>
           <a:prstGeom prst="rect">
             <a:avLst/>
@@ -10609,14 +10039,14 @@
       </p:sp>
       <p:sp>
         <p:nvSpPr>
-          <p:cNvPr id="7" name="TextBox 6"/>
+          <p:cNvPr id="6" name="TextBox 5"/>
           <p:cNvSpPr txBox="1"/>
           <p:nvPr/>
         </p:nvSpPr>
         <p:spPr>
           <a:xfrm>
             <a:off x="1778000" y="2908300"/>
-            <a:ext cx="9525000" cy="1270000"/>
+            <a:ext cx="9525000" cy="431800"/>
           </a:xfrm>
           <a:prstGeom prst="rect">
             <a:avLst/>
@@ -10650,7 +10080,7 @@
       </p:sp>
       <p:sp>
         <p:nvSpPr>
-          <p:cNvPr id="8" name="Rectangle 7"/>
+          <p:cNvPr id="7" name="Rectangle 6"/>
           <p:cNvSpPr/>
           <p:nvPr/>
         </p:nvSpPr>
@@ -10703,6 +10133,14 @@
 <file path=ppt/slides/slide24.xml><?xml version="1.0" encoding="utf-8"?>
 <p:sld xmlns:a="http://schemas.openxmlformats.org/drawingml/2006/main" xmlns:p="http://schemas.openxmlformats.org/presentationml/2006/main" xmlns:r="http://schemas.openxmlformats.org/officeDocument/2006/relationships">
   <p:cSld>
+    <p:bg>
+      <p:bgPr>
+        <a:solidFill>
+          <a:srgbClr val="F5F1E8"/>
+        </a:solidFill>
+        <a:effectLst/>
+      </p:bgPr>
+    </p:bg>
     <p:spTree>
       <p:nvGrpSpPr>
         <p:cNvPr id="1" name=""/>
@@ -10712,58 +10150,14 @@
       <p:grpSpPr/>
       <p:sp>
         <p:nvSpPr>
-          <p:cNvPr id="2" name="Rectangle 1"/>
-          <p:cNvSpPr/>
-          <p:nvPr/>
-        </p:nvSpPr>
-        <p:spPr>
-          <a:xfrm>
-            <a:off x="0" y="0"/>
-            <a:ext cx="12192000" cy="6858000"/>
-          </a:xfrm>
-          <a:prstGeom prst="rect">
-            <a:avLst/>
-          </a:prstGeom>
-          <a:solidFill>
-            <a:srgbClr val="F5F1E8"/>
-          </a:solidFill>
-          <a:ln>
-            <a:noFill/>
-          </a:ln>
-          <a:effectLst/>
-        </p:spPr>
-        <p:style>
-          <a:lnRef idx="1">
-            <a:schemeClr val="accent1"/>
-          </a:lnRef>
-          <a:fillRef idx="3">
-            <a:schemeClr val="accent1"/>
-          </a:fillRef>
-          <a:effectRef idx="2">
-            <a:schemeClr val="accent1"/>
-          </a:effectRef>
-          <a:fontRef idx="minor">
-            <a:schemeClr val="lt1"/>
-          </a:fontRef>
-        </p:style>
-        <p:txBody>
-          <a:bodyPr rtlCol="0" anchor="ctr"/>
-          <a:lstStyle/>
-          <a:p>
-            <a:pPr algn="ctr"/>
-          </a:p>
-        </p:txBody>
-      </p:sp>
-      <p:sp>
-        <p:nvSpPr>
-          <p:cNvPr id="3" name="TextBox 2"/>
+          <p:cNvPr id="2" name="TextBox 1"/>
           <p:cNvSpPr txBox="1"/>
           <p:nvPr/>
         </p:nvSpPr>
         <p:spPr>
           <a:xfrm>
             <a:off x="1016000" y="1854200"/>
-            <a:ext cx="635000" cy="1270000"/>
+            <a:ext cx="635000" cy="241300"/>
           </a:xfrm>
           <a:prstGeom prst="rect">
             <a:avLst/>
@@ -10797,14 +10191,14 @@
       </p:sp>
       <p:sp>
         <p:nvSpPr>
-          <p:cNvPr id="4" name="TextBox 3"/>
+          <p:cNvPr id="3" name="TextBox 2"/>
           <p:cNvSpPr txBox="1"/>
           <p:nvPr/>
         </p:nvSpPr>
         <p:spPr>
           <a:xfrm>
             <a:off x="1778000" y="1778000"/>
-            <a:ext cx="9525000" cy="1270000"/>
+            <a:ext cx="9525000" cy="431800"/>
           </a:xfrm>
           <a:prstGeom prst="rect">
             <a:avLst/>
@@ -10838,7 +10232,7 @@
       </p:sp>
       <p:sp>
         <p:nvSpPr>
-          <p:cNvPr id="5" name="Rectangle 4"/>
+          <p:cNvPr id="4" name="Rectangle 3"/>
           <p:cNvSpPr/>
           <p:nvPr/>
         </p:nvSpPr>
@@ -10882,14 +10276,14 @@
       </p:sp>
       <p:sp>
         <p:nvSpPr>
-          <p:cNvPr id="6" name="TextBox 5"/>
+          <p:cNvPr id="5" name="TextBox 4"/>
           <p:cNvSpPr txBox="1"/>
           <p:nvPr/>
         </p:nvSpPr>
         <p:spPr>
           <a:xfrm>
             <a:off x="1016000" y="2984500"/>
-            <a:ext cx="635000" cy="1270000"/>
+            <a:ext cx="635000" cy="241300"/>
           </a:xfrm>
           <a:prstGeom prst="rect">
             <a:avLst/>
@@ -10923,14 +10317,14 @@
       </p:sp>
       <p:sp>
         <p:nvSpPr>
-          <p:cNvPr id="7" name="TextBox 6"/>
+          <p:cNvPr id="6" name="TextBox 5"/>
           <p:cNvSpPr txBox="1"/>
           <p:nvPr/>
         </p:nvSpPr>
         <p:spPr>
           <a:xfrm>
             <a:off x="1778000" y="2908300"/>
-            <a:ext cx="9525000" cy="1270000"/>
+            <a:ext cx="9525000" cy="431800"/>
           </a:xfrm>
           <a:prstGeom prst="rect">
             <a:avLst/>
@@ -10964,7 +10358,7 @@
       </p:sp>
       <p:sp>
         <p:nvSpPr>
-          <p:cNvPr id="8" name="Rectangle 7"/>
+          <p:cNvPr id="7" name="Rectangle 6"/>
           <p:cNvSpPr/>
           <p:nvPr/>
         </p:nvSpPr>
@@ -11008,14 +10402,14 @@
       </p:sp>
       <p:sp>
         <p:nvSpPr>
-          <p:cNvPr id="9" name="TextBox 8"/>
+          <p:cNvPr id="8" name="TextBox 7"/>
           <p:cNvSpPr txBox="1"/>
           <p:nvPr/>
         </p:nvSpPr>
         <p:spPr>
           <a:xfrm>
             <a:off x="1016000" y="4114800"/>
-            <a:ext cx="635000" cy="1270000"/>
+            <a:ext cx="635000" cy="241300"/>
           </a:xfrm>
           <a:prstGeom prst="rect">
             <a:avLst/>
@@ -11049,14 +10443,14 @@
       </p:sp>
       <p:sp>
         <p:nvSpPr>
-          <p:cNvPr id="10" name="TextBox 9"/>
+          <p:cNvPr id="9" name="TextBox 8"/>
           <p:cNvSpPr txBox="1"/>
           <p:nvPr/>
         </p:nvSpPr>
         <p:spPr>
           <a:xfrm>
             <a:off x="1778000" y="4038600"/>
-            <a:ext cx="9525000" cy="1270000"/>
+            <a:ext cx="9525000" cy="431800"/>
           </a:xfrm>
           <a:prstGeom prst="rect">
             <a:avLst/>
@@ -11099,6 +10493,14 @@
 <file path=ppt/slides/slide25.xml><?xml version="1.0" encoding="utf-8"?>
 <p:sld xmlns:a="http://schemas.openxmlformats.org/drawingml/2006/main" xmlns:p="http://schemas.openxmlformats.org/presentationml/2006/main" xmlns:r="http://schemas.openxmlformats.org/officeDocument/2006/relationships">
   <p:cSld>
+    <p:bg>
+      <p:bgPr>
+        <a:solidFill>
+          <a:srgbClr val="0F2346"/>
+        </a:solidFill>
+        <a:effectLst/>
+      </p:bgPr>
+    </p:bg>
     <p:spTree>
       <p:nvGrpSpPr>
         <p:cNvPr id="1" name=""/>
@@ -11114,50 +10516,6 @@
         </p:nvSpPr>
         <p:spPr>
           <a:xfrm>
-            <a:off x="0" y="0"/>
-            <a:ext cx="12192000" cy="6858000"/>
-          </a:xfrm>
-          <a:prstGeom prst="rect">
-            <a:avLst/>
-          </a:prstGeom>
-          <a:solidFill>
-            <a:srgbClr val="0F2346"/>
-          </a:solidFill>
-          <a:ln>
-            <a:noFill/>
-          </a:ln>
-          <a:effectLst/>
-        </p:spPr>
-        <p:style>
-          <a:lnRef idx="1">
-            <a:schemeClr val="accent1"/>
-          </a:lnRef>
-          <a:fillRef idx="3">
-            <a:schemeClr val="accent1"/>
-          </a:fillRef>
-          <a:effectRef idx="2">
-            <a:schemeClr val="accent1"/>
-          </a:effectRef>
-          <a:fontRef idx="minor">
-            <a:schemeClr val="lt1"/>
-          </a:fontRef>
-        </p:style>
-        <p:txBody>
-          <a:bodyPr rtlCol="0" anchor="ctr"/>
-          <a:lstStyle/>
-          <a:p>
-            <a:pPr algn="ctr"/>
-          </a:p>
-        </p:txBody>
-      </p:sp>
-      <p:sp>
-        <p:nvSpPr>
-          <p:cNvPr id="3" name="Rectangle 2"/>
-          <p:cNvSpPr/>
-          <p:nvPr/>
-        </p:nvSpPr>
-        <p:spPr>
-          <a:xfrm>
             <a:off x="355600" y="355600"/>
             <a:ext cx="11480800" cy="6146800"/>
           </a:xfrm>
@@ -11196,7 +10554,7 @@
       </p:sp>
       <p:sp>
         <p:nvSpPr>
-          <p:cNvPr id="4" name="Rectangle 3"/>
+          <p:cNvPr id="3" name="Rectangle 2"/>
           <p:cNvSpPr/>
           <p:nvPr/>
         </p:nvSpPr>
@@ -11240,7 +10598,7 @@
       </p:sp>
       <p:sp>
         <p:nvSpPr>
-          <p:cNvPr id="5" name="Rectangle 4"/>
+          <p:cNvPr id="4" name="Rectangle 3"/>
           <p:cNvSpPr/>
           <p:nvPr/>
         </p:nvSpPr>
@@ -11284,7 +10642,7 @@
       </p:sp>
       <p:sp>
         <p:nvSpPr>
-          <p:cNvPr id="6" name="Rectangle 5"/>
+          <p:cNvPr id="5" name="Rectangle 4"/>
           <p:cNvSpPr/>
           <p:nvPr/>
         </p:nvSpPr>
@@ -11328,7 +10686,7 @@
       </p:sp>
       <p:sp>
         <p:nvSpPr>
-          <p:cNvPr id="7" name="Rectangle 6"/>
+          <p:cNvPr id="6" name="Rectangle 5"/>
           <p:cNvSpPr/>
           <p:nvPr/>
         </p:nvSpPr>
@@ -11372,14 +10730,14 @@
       </p:sp>
       <p:sp>
         <p:nvSpPr>
-          <p:cNvPr id="8" name="TextBox 7"/>
+          <p:cNvPr id="7" name="TextBox 6"/>
           <p:cNvSpPr txBox="1"/>
           <p:nvPr/>
         </p:nvSpPr>
         <p:spPr>
           <a:xfrm>
             <a:off x="1016000" y="2362200"/>
-            <a:ext cx="9525000" cy="1270000"/>
+            <a:ext cx="9525000" cy="666750"/>
           </a:xfrm>
           <a:prstGeom prst="rect">
             <a:avLst/>
@@ -11413,7 +10771,7 @@
       </p:sp>
       <p:sp>
         <p:nvSpPr>
-          <p:cNvPr id="9" name="Rectangle 8"/>
+          <p:cNvPr id="8" name="Rectangle 7"/>
           <p:cNvSpPr/>
           <p:nvPr/>
         </p:nvSpPr>
@@ -11457,14 +10815,14 @@
       </p:sp>
       <p:sp>
         <p:nvSpPr>
-          <p:cNvPr id="10" name="TextBox 9"/>
+          <p:cNvPr id="9" name="TextBox 8"/>
           <p:cNvSpPr txBox="1"/>
           <p:nvPr/>
         </p:nvSpPr>
         <p:spPr>
           <a:xfrm>
             <a:off x="1016000" y="3530600"/>
-            <a:ext cx="9525000" cy="1270000"/>
+            <a:ext cx="9525000" cy="463550"/>
           </a:xfrm>
           <a:prstGeom prst="rect">
             <a:avLst/>
@@ -11483,9 +10841,9 @@
               </a:lnSpc>
             </a:pPr>
             <a:r>
-              <a:rPr sz="2200" b="0" i="0">
+              <a:rPr sz="2500" b="0" i="0">
                 <a:solidFill>
-                  <a:srgbClr val="B9C3D2"/>
+                  <a:srgbClr val="F5F1E8"/>
                 </a:solidFill>
                 <a:latin typeface="DM Sans"/>
                 <a:ea typeface="DM Sans"/>
@@ -11498,14 +10856,14 @@
       </p:sp>
       <p:sp>
         <p:nvSpPr>
-          <p:cNvPr id="11" name="TextBox 10"/>
+          <p:cNvPr id="10" name="TextBox 9"/>
           <p:cNvSpPr txBox="1"/>
           <p:nvPr/>
         </p:nvSpPr>
         <p:spPr>
           <a:xfrm>
-            <a:off x="1016000" y="4191000"/>
-            <a:ext cx="9525000" cy="1270000"/>
+            <a:off x="1016000" y="4381500"/>
+            <a:ext cx="9906000" cy="533400"/>
           </a:xfrm>
           <a:prstGeom prst="rect">
             <a:avLst/>
@@ -11520,11 +10878,11 @@
           <a:p>
             <a:pPr algn="l">
               <a:lnSpc>
-                <a:spcPct val="120000"/>
+                <a:spcPct val="115000"/>
               </a:lnSpc>
             </a:pPr>
             <a:r>
-              <a:rPr sz="1900" b="1" i="0">
+              <a:rPr sz="3100" b="1" i="0">
                 <a:solidFill>
                   <a:srgbClr val="C9A84C"/>
                 </a:solidFill>
@@ -11534,6 +10892,50 @@
               </a:rPr>
               <a:t>temidayoafonja.com/keep-the-proof</a:t>
             </a:r>
+          </a:p>
+        </p:txBody>
+      </p:sp>
+      <p:sp>
+        <p:nvSpPr>
+          <p:cNvPr id="11" name="Rectangle 10"/>
+          <p:cNvSpPr/>
+          <p:nvPr/>
+        </p:nvSpPr>
+        <p:spPr>
+          <a:xfrm>
+            <a:off x="1016000" y="5080000"/>
+            <a:ext cx="6413500" cy="31750"/>
+          </a:xfrm>
+          <a:prstGeom prst="rect">
+            <a:avLst/>
+          </a:prstGeom>
+          <a:solidFill>
+            <a:srgbClr val="C9A84C"/>
+          </a:solidFill>
+          <a:ln>
+            <a:noFill/>
+          </a:ln>
+          <a:effectLst/>
+        </p:spPr>
+        <p:style>
+          <a:lnRef idx="1">
+            <a:schemeClr val="accent1"/>
+          </a:lnRef>
+          <a:fillRef idx="3">
+            <a:schemeClr val="accent1"/>
+          </a:fillRef>
+          <a:effectRef idx="2">
+            <a:schemeClr val="accent1"/>
+          </a:effectRef>
+          <a:fontRef idx="minor">
+            <a:schemeClr val="lt1"/>
+          </a:fontRef>
+        </p:style>
+        <p:txBody>
+          <a:bodyPr rtlCol="0" anchor="ctr"/>
+          <a:lstStyle/>
+          <a:p>
+            <a:pPr algn="ctr"/>
           </a:p>
         </p:txBody>
       </p:sp>
@@ -11548,6 +10950,14 @@
 <file path=ppt/slides/slide26.xml><?xml version="1.0" encoding="utf-8"?>
 <p:sld xmlns:a="http://schemas.openxmlformats.org/drawingml/2006/main" xmlns:p="http://schemas.openxmlformats.org/presentationml/2006/main" xmlns:r="http://schemas.openxmlformats.org/officeDocument/2006/relationships">
   <p:cSld>
+    <p:bg>
+      <p:bgPr>
+        <a:solidFill>
+          <a:srgbClr val="F5F1E8"/>
+        </a:solidFill>
+        <a:effectLst/>
+      </p:bgPr>
+    </p:bg>
     <p:spTree>
       <p:nvGrpSpPr>
         <p:cNvPr id="1" name=""/>
@@ -11557,58 +10967,14 @@
       <p:grpSpPr/>
       <p:sp>
         <p:nvSpPr>
-          <p:cNvPr id="2" name="Rectangle 1"/>
-          <p:cNvSpPr/>
-          <p:nvPr/>
-        </p:nvSpPr>
-        <p:spPr>
-          <a:xfrm>
-            <a:off x="0" y="0"/>
-            <a:ext cx="12192000" cy="6858000"/>
-          </a:xfrm>
-          <a:prstGeom prst="rect">
-            <a:avLst/>
-          </a:prstGeom>
-          <a:solidFill>
-            <a:srgbClr val="F5F1E8"/>
-          </a:solidFill>
-          <a:ln>
-            <a:noFill/>
-          </a:ln>
-          <a:effectLst/>
-        </p:spPr>
-        <p:style>
-          <a:lnRef idx="1">
-            <a:schemeClr val="accent1"/>
-          </a:lnRef>
-          <a:fillRef idx="3">
-            <a:schemeClr val="accent1"/>
-          </a:fillRef>
-          <a:effectRef idx="2">
-            <a:schemeClr val="accent1"/>
-          </a:effectRef>
-          <a:fontRef idx="minor">
-            <a:schemeClr val="lt1"/>
-          </a:fontRef>
-        </p:style>
-        <p:txBody>
-          <a:bodyPr rtlCol="0" anchor="ctr"/>
-          <a:lstStyle/>
-          <a:p>
-            <a:pPr algn="ctr"/>
-          </a:p>
-        </p:txBody>
-      </p:sp>
-      <p:sp>
-        <p:nvSpPr>
-          <p:cNvPr id="3" name="TextBox 2"/>
+          <p:cNvPr id="2" name="TextBox 1"/>
           <p:cNvSpPr txBox="1"/>
           <p:nvPr/>
         </p:nvSpPr>
         <p:spPr>
           <a:xfrm>
             <a:off x="1016000" y="1587500"/>
-            <a:ext cx="5715000" cy="1270000"/>
+            <a:ext cx="5715000" cy="215900"/>
           </a:xfrm>
           <a:prstGeom prst="rect">
             <a:avLst/>
@@ -11642,14 +11008,14 @@
       </p:sp>
       <p:sp>
         <p:nvSpPr>
-          <p:cNvPr id="4" name="TextBox 3"/>
+          <p:cNvPr id="3" name="TextBox 2"/>
           <p:cNvSpPr txBox="1"/>
           <p:nvPr/>
         </p:nvSpPr>
         <p:spPr>
           <a:xfrm>
             <a:off x="1016000" y="2006600"/>
-            <a:ext cx="5715000" cy="1270000"/>
+            <a:ext cx="5969000" cy="1422400"/>
           </a:xfrm>
           <a:prstGeom prst="rect">
             <a:avLst/>
@@ -11676,7 +11042,7 @@
                 <a:ea typeface="Montserrat"/>
                 <a:cs typeface="Montserrat"/>
               </a:rPr>
-              <a:t>HOW TO KNOW IF</a:t>
+              <a:t>Should I Make</a:t>
             </a:r>
             <a:br/>
             <a:r>
@@ -11688,7 +11054,7 @@
                 <a:ea typeface="Montserrat"/>
                 <a:cs typeface="Montserrat"/>
               </a:rPr>
-              <a:t>AN INTERNAL MOVE IS</a:t>
+              <a:t>an Internal Move?</a:t>
             </a:r>
             <a:br/>
             <a:r>
@@ -11700,14 +11066,14 @@
                 <a:ea typeface="Montserrat"/>
                 <a:cs typeface="Montserrat"/>
               </a:rPr>
-              <a:t>THE RIGHT NEXT STEP</a:t>
-            </a:r>
-          </a:p>
-        </p:txBody>
-      </p:sp>
-      <p:sp>
-        <p:nvSpPr>
-          <p:cNvPr id="5" name="Rectangle 4"/>
+              <a:t>3 Questions to Decide</a:t>
+            </a:r>
+          </a:p>
+        </p:txBody>
+      </p:sp>
+      <p:sp>
+        <p:nvSpPr>
+          <p:cNvPr id="4" name="Rectangle 3"/>
           <p:cNvSpPr/>
           <p:nvPr/>
         </p:nvSpPr>
@@ -11751,14 +11117,14 @@
       </p:sp>
       <p:sp>
         <p:nvSpPr>
-          <p:cNvPr id="6" name="TextBox 5"/>
+          <p:cNvPr id="5" name="TextBox 4"/>
           <p:cNvSpPr txBox="1"/>
           <p:nvPr/>
         </p:nvSpPr>
         <p:spPr>
           <a:xfrm>
             <a:off x="1016000" y="4356100"/>
-            <a:ext cx="5715000" cy="1270000"/>
+            <a:ext cx="5969000" cy="685800"/>
           </a:xfrm>
           <a:prstGeom prst="rect">
             <a:avLst/>
@@ -11773,29 +11139,29 @@
           <a:p>
             <a:pPr algn="l">
               <a:lnSpc>
-                <a:spcPct val="134000"/>
+                <a:spcPct val="132000"/>
               </a:lnSpc>
             </a:pPr>
             <a:r>
-              <a:rPr sz="1650" b="0" i="0">
+              <a:rPr sz="1900" b="1" i="0">
                 <a:solidFill>
-                  <a:srgbClr val="5A6B82"/>
+                  <a:srgbClr val="3E506B"/>
                 </a:solidFill>
-                <a:latin typeface="DM Sans"/>
-                <a:ea typeface="DM Sans"/>
-                <a:cs typeface="DM Sans"/>
+                <a:latin typeface="Montserrat"/>
+                <a:ea typeface="Montserrat"/>
+                <a:cs typeface="Montserrat"/>
               </a:rPr>
               <a:t>Playlist: Career Portability: Career Pivots,</a:t>
             </a:r>
             <a:br/>
             <a:r>
-              <a:rPr sz="1650" b="0" i="0">
+              <a:rPr sz="1900" b="1" i="0">
                 <a:solidFill>
-                  <a:srgbClr val="5A6B82"/>
+                  <a:srgbClr val="3E506B"/>
                 </a:solidFill>
-                <a:latin typeface="DM Sans"/>
-                <a:ea typeface="DM Sans"/>
-                <a:cs typeface="DM Sans"/>
+                <a:latin typeface="Montserrat"/>
+                <a:ea typeface="Montserrat"/>
+                <a:cs typeface="Montserrat"/>
               </a:rPr>
               <a:t>Internal Moves &amp; Growth</a:t>
             </a:r>
@@ -11813,6 +11179,14 @@
 <file path=ppt/slides/slide3.xml><?xml version="1.0" encoding="utf-8"?>
 <p:sld xmlns:a="http://schemas.openxmlformats.org/drawingml/2006/main" xmlns:p="http://schemas.openxmlformats.org/presentationml/2006/main" xmlns:r="http://schemas.openxmlformats.org/officeDocument/2006/relationships">
   <p:cSld>
+    <p:bg>
+      <p:bgPr>
+        <a:solidFill>
+          <a:srgbClr val="0F2346"/>
+        </a:solidFill>
+        <a:effectLst/>
+      </p:bgPr>
+    </p:bg>
     <p:spTree>
       <p:nvGrpSpPr>
         <p:cNvPr id="1" name=""/>
@@ -11828,50 +11202,6 @@
         </p:nvSpPr>
         <p:spPr>
           <a:xfrm>
-            <a:off x="0" y="0"/>
-            <a:ext cx="12192000" cy="6858000"/>
-          </a:xfrm>
-          <a:prstGeom prst="rect">
-            <a:avLst/>
-          </a:prstGeom>
-          <a:solidFill>
-            <a:srgbClr val="0F2346"/>
-          </a:solidFill>
-          <a:ln>
-            <a:noFill/>
-          </a:ln>
-          <a:effectLst/>
-        </p:spPr>
-        <p:style>
-          <a:lnRef idx="1">
-            <a:schemeClr val="accent1"/>
-          </a:lnRef>
-          <a:fillRef idx="3">
-            <a:schemeClr val="accent1"/>
-          </a:fillRef>
-          <a:effectRef idx="2">
-            <a:schemeClr val="accent1"/>
-          </a:effectRef>
-          <a:fontRef idx="minor">
-            <a:schemeClr val="lt1"/>
-          </a:fontRef>
-        </p:style>
-        <p:txBody>
-          <a:bodyPr rtlCol="0" anchor="ctr"/>
-          <a:lstStyle/>
-          <a:p>
-            <a:pPr algn="ctr"/>
-          </a:p>
-        </p:txBody>
-      </p:sp>
-      <p:sp>
-        <p:nvSpPr>
-          <p:cNvPr id="3" name="Rectangle 2"/>
-          <p:cNvSpPr/>
-          <p:nvPr/>
-        </p:nvSpPr>
-        <p:spPr>
-          <a:xfrm>
             <a:off x="355600" y="355600"/>
             <a:ext cx="11480800" cy="6146800"/>
           </a:xfrm>
@@ -11910,7 +11240,7 @@
       </p:sp>
       <p:sp>
         <p:nvSpPr>
-          <p:cNvPr id="4" name="Rectangle 3"/>
+          <p:cNvPr id="3" name="Rectangle 2"/>
           <p:cNvSpPr/>
           <p:nvPr/>
         </p:nvSpPr>
@@ -11954,7 +11284,7 @@
       </p:sp>
       <p:sp>
         <p:nvSpPr>
-          <p:cNvPr id="5" name="Rectangle 4"/>
+          <p:cNvPr id="4" name="Rectangle 3"/>
           <p:cNvSpPr/>
           <p:nvPr/>
         </p:nvSpPr>
@@ -11998,7 +11328,7 @@
       </p:sp>
       <p:sp>
         <p:nvSpPr>
-          <p:cNvPr id="6" name="Rectangle 5"/>
+          <p:cNvPr id="5" name="Rectangle 4"/>
           <p:cNvSpPr/>
           <p:nvPr/>
         </p:nvSpPr>
@@ -12042,7 +11372,7 @@
       </p:sp>
       <p:sp>
         <p:nvSpPr>
-          <p:cNvPr id="7" name="Rectangle 6"/>
+          <p:cNvPr id="6" name="Rectangle 5"/>
           <p:cNvSpPr/>
           <p:nvPr/>
         </p:nvSpPr>
@@ -12086,14 +11416,14 @@
       </p:sp>
       <p:sp>
         <p:nvSpPr>
-          <p:cNvPr id="8" name="TextBox 7"/>
+          <p:cNvPr id="7" name="TextBox 6"/>
           <p:cNvSpPr txBox="1"/>
           <p:nvPr/>
         </p:nvSpPr>
         <p:spPr>
           <a:xfrm>
             <a:off x="1320800" y="1473200"/>
-            <a:ext cx="9525000" cy="1270000"/>
+            <a:ext cx="9525000" cy="419100"/>
           </a:xfrm>
           <a:prstGeom prst="rect">
             <a:avLst/>
@@ -12127,7 +11457,7 @@
       </p:sp>
       <p:sp>
         <p:nvSpPr>
-          <p:cNvPr id="9" name="Rectangle 8"/>
+          <p:cNvPr id="8" name="Rectangle 7"/>
           <p:cNvSpPr/>
           <p:nvPr/>
         </p:nvSpPr>
@@ -12171,7 +11501,7 @@
       </p:sp>
       <p:sp>
         <p:nvSpPr>
-          <p:cNvPr id="10" name="Isosceles Triangle 9"/>
+          <p:cNvPr id="9" name="Isosceles Triangle 8"/>
           <p:cNvSpPr/>
           <p:nvPr/>
         </p:nvSpPr>
@@ -12215,14 +11545,14 @@
       </p:sp>
       <p:sp>
         <p:nvSpPr>
-          <p:cNvPr id="11" name="TextBox 10"/>
+          <p:cNvPr id="10" name="TextBox 9"/>
           <p:cNvSpPr txBox="1"/>
           <p:nvPr/>
         </p:nvSpPr>
         <p:spPr>
           <a:xfrm>
             <a:off x="1320800" y="2463800"/>
-            <a:ext cx="9525000" cy="1270000"/>
+            <a:ext cx="9525000" cy="419100"/>
           </a:xfrm>
           <a:prstGeom prst="rect">
             <a:avLst/>
@@ -12256,7 +11586,7 @@
       </p:sp>
       <p:sp>
         <p:nvSpPr>
-          <p:cNvPr id="12" name="Rectangle 11"/>
+          <p:cNvPr id="11" name="Rectangle 10"/>
           <p:cNvSpPr/>
           <p:nvPr/>
         </p:nvSpPr>
@@ -12300,7 +11630,7 @@
       </p:sp>
       <p:sp>
         <p:nvSpPr>
-          <p:cNvPr id="13" name="Isosceles Triangle 12"/>
+          <p:cNvPr id="12" name="Isosceles Triangle 11"/>
           <p:cNvSpPr/>
           <p:nvPr/>
         </p:nvSpPr>
@@ -12344,14 +11674,14 @@
       </p:sp>
       <p:sp>
         <p:nvSpPr>
-          <p:cNvPr id="14" name="TextBox 13"/>
+          <p:cNvPr id="13" name="TextBox 12"/>
           <p:cNvSpPr txBox="1"/>
           <p:nvPr/>
         </p:nvSpPr>
         <p:spPr>
           <a:xfrm>
             <a:off x="1320800" y="3454400"/>
-            <a:ext cx="9525000" cy="1270000"/>
+            <a:ext cx="9525000" cy="419100"/>
           </a:xfrm>
           <a:prstGeom prst="rect">
             <a:avLst/>
@@ -12394,6 +11724,14 @@
 <file path=ppt/slides/slide4.xml><?xml version="1.0" encoding="utf-8"?>
 <p:sld xmlns:a="http://schemas.openxmlformats.org/drawingml/2006/main" xmlns:p="http://schemas.openxmlformats.org/presentationml/2006/main" xmlns:r="http://schemas.openxmlformats.org/officeDocument/2006/relationships">
   <p:cSld>
+    <p:bg>
+      <p:bgPr>
+        <a:solidFill>
+          <a:srgbClr val="0F2346"/>
+        </a:solidFill>
+        <a:effectLst/>
+      </p:bgPr>
+    </p:bg>
     <p:spTree>
       <p:nvGrpSpPr>
         <p:cNvPr id="1" name=""/>
@@ -12409,50 +11747,6 @@
         </p:nvSpPr>
         <p:spPr>
           <a:xfrm>
-            <a:off x="0" y="0"/>
-            <a:ext cx="12192000" cy="6858000"/>
-          </a:xfrm>
-          <a:prstGeom prst="rect">
-            <a:avLst/>
-          </a:prstGeom>
-          <a:solidFill>
-            <a:srgbClr val="0F2346"/>
-          </a:solidFill>
-          <a:ln>
-            <a:noFill/>
-          </a:ln>
-          <a:effectLst/>
-        </p:spPr>
-        <p:style>
-          <a:lnRef idx="1">
-            <a:schemeClr val="accent1"/>
-          </a:lnRef>
-          <a:fillRef idx="3">
-            <a:schemeClr val="accent1"/>
-          </a:fillRef>
-          <a:effectRef idx="2">
-            <a:schemeClr val="accent1"/>
-          </a:effectRef>
-          <a:fontRef idx="minor">
-            <a:schemeClr val="lt1"/>
-          </a:fontRef>
-        </p:style>
-        <p:txBody>
-          <a:bodyPr rtlCol="0" anchor="ctr"/>
-          <a:lstStyle/>
-          <a:p>
-            <a:pPr algn="ctr"/>
-          </a:p>
-        </p:txBody>
-      </p:sp>
-      <p:sp>
-        <p:nvSpPr>
-          <p:cNvPr id="3" name="Rectangle 2"/>
-          <p:cNvSpPr/>
-          <p:nvPr/>
-        </p:nvSpPr>
-        <p:spPr>
-          <a:xfrm>
             <a:off x="355600" y="355600"/>
             <a:ext cx="11480800" cy="6146800"/>
           </a:xfrm>
@@ -12491,7 +11785,7 @@
       </p:sp>
       <p:sp>
         <p:nvSpPr>
-          <p:cNvPr id="4" name="Rectangle 3"/>
+          <p:cNvPr id="3" name="Rectangle 2"/>
           <p:cNvSpPr/>
           <p:nvPr/>
         </p:nvSpPr>
@@ -12535,7 +11829,7 @@
       </p:sp>
       <p:sp>
         <p:nvSpPr>
-          <p:cNvPr id="5" name="Rectangle 4"/>
+          <p:cNvPr id="4" name="Rectangle 3"/>
           <p:cNvSpPr/>
           <p:nvPr/>
         </p:nvSpPr>
@@ -12579,7 +11873,7 @@
       </p:sp>
       <p:sp>
         <p:nvSpPr>
-          <p:cNvPr id="6" name="Rectangle 5"/>
+          <p:cNvPr id="5" name="Rectangle 4"/>
           <p:cNvSpPr/>
           <p:nvPr/>
         </p:nvSpPr>
@@ -12623,7 +11917,7 @@
       </p:sp>
       <p:sp>
         <p:nvSpPr>
-          <p:cNvPr id="7" name="Rectangle 6"/>
+          <p:cNvPr id="6" name="Rectangle 5"/>
           <p:cNvSpPr/>
           <p:nvPr/>
         </p:nvSpPr>
@@ -12667,14 +11961,14 @@
       </p:sp>
       <p:sp>
         <p:nvSpPr>
-          <p:cNvPr id="8" name="TextBox 7"/>
+          <p:cNvPr id="7" name="TextBox 6"/>
           <p:cNvSpPr txBox="1"/>
           <p:nvPr/>
         </p:nvSpPr>
         <p:spPr>
           <a:xfrm>
             <a:off x="1320800" y="1473200"/>
-            <a:ext cx="9525000" cy="1270000"/>
+            <a:ext cx="9525000" cy="419100"/>
           </a:xfrm>
           <a:prstGeom prst="rect">
             <a:avLst/>
@@ -12708,7 +12002,7 @@
       </p:sp>
       <p:sp>
         <p:nvSpPr>
-          <p:cNvPr id="9" name="Rectangle 8"/>
+          <p:cNvPr id="8" name="Rectangle 7"/>
           <p:cNvSpPr/>
           <p:nvPr/>
         </p:nvSpPr>
@@ -12752,7 +12046,7 @@
       </p:sp>
       <p:sp>
         <p:nvSpPr>
-          <p:cNvPr id="10" name="Isosceles Triangle 9"/>
+          <p:cNvPr id="9" name="Isosceles Triangle 8"/>
           <p:cNvSpPr/>
           <p:nvPr/>
         </p:nvSpPr>
@@ -12796,14 +12090,14 @@
       </p:sp>
       <p:sp>
         <p:nvSpPr>
-          <p:cNvPr id="11" name="TextBox 10"/>
+          <p:cNvPr id="10" name="TextBox 9"/>
           <p:cNvSpPr txBox="1"/>
           <p:nvPr/>
         </p:nvSpPr>
         <p:spPr>
           <a:xfrm>
             <a:off x="1320800" y="2463800"/>
-            <a:ext cx="9525000" cy="1270000"/>
+            <a:ext cx="9525000" cy="419100"/>
           </a:xfrm>
           <a:prstGeom prst="rect">
             <a:avLst/>
@@ -12837,7 +12131,7 @@
       </p:sp>
       <p:sp>
         <p:nvSpPr>
-          <p:cNvPr id="12" name="Rectangle 11"/>
+          <p:cNvPr id="11" name="Rectangle 10"/>
           <p:cNvSpPr/>
           <p:nvPr/>
         </p:nvSpPr>
@@ -12881,7 +12175,7 @@
       </p:sp>
       <p:sp>
         <p:nvSpPr>
-          <p:cNvPr id="13" name="Isosceles Triangle 12"/>
+          <p:cNvPr id="12" name="Isosceles Triangle 11"/>
           <p:cNvSpPr/>
           <p:nvPr/>
         </p:nvSpPr>
@@ -12925,14 +12219,14 @@
       </p:sp>
       <p:sp>
         <p:nvSpPr>
-          <p:cNvPr id="14" name="TextBox 13"/>
+          <p:cNvPr id="13" name="TextBox 12"/>
           <p:cNvSpPr txBox="1"/>
           <p:nvPr/>
         </p:nvSpPr>
         <p:spPr>
           <a:xfrm>
             <a:off x="1320800" y="3454400"/>
-            <a:ext cx="9525000" cy="1270000"/>
+            <a:ext cx="9525000" cy="419100"/>
           </a:xfrm>
           <a:prstGeom prst="rect">
             <a:avLst/>
@@ -12966,7 +12260,7 @@
       </p:sp>
       <p:sp>
         <p:nvSpPr>
-          <p:cNvPr id="15" name="Rectangle 14"/>
+          <p:cNvPr id="14" name="Rectangle 13"/>
           <p:cNvSpPr/>
           <p:nvPr/>
         </p:nvSpPr>
@@ -13010,7 +12304,7 @@
       </p:sp>
       <p:sp>
         <p:nvSpPr>
-          <p:cNvPr id="16" name="Isosceles Triangle 15"/>
+          <p:cNvPr id="15" name="Isosceles Triangle 14"/>
           <p:cNvSpPr/>
           <p:nvPr/>
         </p:nvSpPr>
@@ -13054,14 +12348,14 @@
       </p:sp>
       <p:sp>
         <p:nvSpPr>
-          <p:cNvPr id="17" name="TextBox 16"/>
+          <p:cNvPr id="16" name="TextBox 15"/>
           <p:cNvSpPr txBox="1"/>
           <p:nvPr/>
         </p:nvSpPr>
         <p:spPr>
           <a:xfrm>
             <a:off x="1320800" y="4445000"/>
-            <a:ext cx="9525000" cy="1270000"/>
+            <a:ext cx="9525000" cy="419100"/>
           </a:xfrm>
           <a:prstGeom prst="rect">
             <a:avLst/>
@@ -13095,14 +12389,14 @@
       </p:sp>
       <p:sp>
         <p:nvSpPr>
-          <p:cNvPr id="18" name="Rectangle 17"/>
+          <p:cNvPr id="17" name="Rectangle 16"/>
           <p:cNvSpPr/>
           <p:nvPr/>
         </p:nvSpPr>
         <p:spPr>
           <a:xfrm>
-            <a:off x="1270000" y="5473700"/>
-            <a:ext cx="1905000" cy="19050"/>
+            <a:off x="1320800" y="5435600"/>
+            <a:ext cx="1905000" cy="25400"/>
           </a:xfrm>
           <a:prstGeom prst="rect">
             <a:avLst/>
@@ -13139,14 +12433,14 @@
       </p:sp>
       <p:sp>
         <p:nvSpPr>
-          <p:cNvPr id="19" name="TextBox 18"/>
+          <p:cNvPr id="18" name="TextBox 17"/>
           <p:cNvSpPr txBox="1"/>
           <p:nvPr/>
         </p:nvSpPr>
         <p:spPr>
           <a:xfrm>
-            <a:off x="1270000" y="5715000"/>
-            <a:ext cx="9652000" cy="1270000"/>
+            <a:off x="1320800" y="5715000"/>
+            <a:ext cx="9906000" cy="355600"/>
           </a:xfrm>
           <a:prstGeom prst="rect">
             <a:avLst/>
@@ -13165,9 +12459,9 @@
               </a:lnSpc>
             </a:pPr>
             <a:r>
-              <a:rPr sz="1300" b="1" i="0" spc="170">
+              <a:rPr sz="1600" b="1" i="0" spc="150">
                 <a:solidFill>
-                  <a:srgbClr val="B9C3D2"/>
+                  <a:srgbClr val="F5F1E8"/>
                 </a:solidFill>
                 <a:latin typeface="Montserrat"/>
                 <a:ea typeface="Montserrat"/>
@@ -13189,6 +12483,14 @@
 <file path=ppt/slides/slide5.xml><?xml version="1.0" encoding="utf-8"?>
 <p:sld xmlns:a="http://schemas.openxmlformats.org/drawingml/2006/main" xmlns:p="http://schemas.openxmlformats.org/presentationml/2006/main" xmlns:r="http://schemas.openxmlformats.org/officeDocument/2006/relationships">
   <p:cSld>
+    <p:bg>
+      <p:bgPr>
+        <a:solidFill>
+          <a:srgbClr val="F5F1E8"/>
+        </a:solidFill>
+        <a:effectLst/>
+      </p:bgPr>
+    </p:bg>
     <p:spTree>
       <p:nvGrpSpPr>
         <p:cNvPr id="1" name=""/>
@@ -13198,58 +12500,14 @@
       <p:grpSpPr/>
       <p:sp>
         <p:nvSpPr>
-          <p:cNvPr id="2" name="Rectangle 1"/>
-          <p:cNvSpPr/>
-          <p:nvPr/>
-        </p:nvSpPr>
-        <p:spPr>
-          <a:xfrm>
-            <a:off x="0" y="0"/>
-            <a:ext cx="12192000" cy="6858000"/>
-          </a:xfrm>
-          <a:prstGeom prst="rect">
-            <a:avLst/>
-          </a:prstGeom>
-          <a:solidFill>
-            <a:srgbClr val="F5F1E8"/>
-          </a:solidFill>
-          <a:ln>
-            <a:noFill/>
-          </a:ln>
-          <a:effectLst/>
-        </p:spPr>
-        <p:style>
-          <a:lnRef idx="1">
-            <a:schemeClr val="accent1"/>
-          </a:lnRef>
-          <a:fillRef idx="3">
-            <a:schemeClr val="accent1"/>
-          </a:fillRef>
-          <a:effectRef idx="2">
-            <a:schemeClr val="accent1"/>
-          </a:effectRef>
-          <a:fontRef idx="minor">
-            <a:schemeClr val="lt1"/>
-          </a:fontRef>
-        </p:style>
-        <p:txBody>
-          <a:bodyPr rtlCol="0" anchor="ctr"/>
-          <a:lstStyle/>
-          <a:p>
-            <a:pPr algn="ctr"/>
-          </a:p>
-        </p:txBody>
-      </p:sp>
-      <p:sp>
-        <p:nvSpPr>
-          <p:cNvPr id="3" name="TextBox 2"/>
+          <p:cNvPr id="2" name="TextBox 1"/>
           <p:cNvSpPr txBox="1"/>
           <p:nvPr/>
         </p:nvSpPr>
         <p:spPr>
           <a:xfrm>
             <a:off x="1206500" y="2730500"/>
-            <a:ext cx="4191000" cy="1270000"/>
+            <a:ext cx="4191000" cy="425450"/>
           </a:xfrm>
           <a:prstGeom prst="rect">
             <a:avLst/>
@@ -13283,7 +12541,7 @@
       </p:sp>
       <p:sp>
         <p:nvSpPr>
-          <p:cNvPr id="4" name="Rectangle 3"/>
+          <p:cNvPr id="3" name="Rectangle 2"/>
           <p:cNvSpPr/>
           <p:nvPr/>
         </p:nvSpPr>
@@ -13327,14 +12585,14 @@
       </p:sp>
       <p:sp>
         <p:nvSpPr>
-          <p:cNvPr id="5" name="TextBox 4"/>
+          <p:cNvPr id="4" name="TextBox 3"/>
           <p:cNvSpPr txBox="1"/>
           <p:nvPr/>
         </p:nvSpPr>
         <p:spPr>
           <a:xfrm>
             <a:off x="1206500" y="3644900"/>
-            <a:ext cx="4191000" cy="1270000"/>
+            <a:ext cx="4191000" cy="349250"/>
           </a:xfrm>
           <a:prstGeom prst="rect">
             <a:avLst/>
@@ -13377,6 +12635,14 @@
 <file path=ppt/slides/slide6.xml><?xml version="1.0" encoding="utf-8"?>
 <p:sld xmlns:a="http://schemas.openxmlformats.org/drawingml/2006/main" xmlns:p="http://schemas.openxmlformats.org/presentationml/2006/main" xmlns:r="http://schemas.openxmlformats.org/officeDocument/2006/relationships">
   <p:cSld>
+    <p:bg>
+      <p:bgPr>
+        <a:solidFill>
+          <a:srgbClr val="F5F1E8"/>
+        </a:solidFill>
+        <a:effectLst/>
+      </p:bgPr>
+    </p:bg>
     <p:spTree>
       <p:nvGrpSpPr>
         <p:cNvPr id="1" name=""/>
@@ -13386,58 +12652,14 @@
       <p:grpSpPr/>
       <p:sp>
         <p:nvSpPr>
-          <p:cNvPr id="2" name="Rectangle 1"/>
-          <p:cNvSpPr/>
-          <p:nvPr/>
-        </p:nvSpPr>
-        <p:spPr>
-          <a:xfrm>
-            <a:off x="0" y="0"/>
-            <a:ext cx="12192000" cy="6858000"/>
-          </a:xfrm>
-          <a:prstGeom prst="rect">
-            <a:avLst/>
-          </a:prstGeom>
-          <a:solidFill>
-            <a:srgbClr val="F5F1E8"/>
-          </a:solidFill>
-          <a:ln>
-            <a:noFill/>
-          </a:ln>
-          <a:effectLst/>
-        </p:spPr>
-        <p:style>
-          <a:lnRef idx="1">
-            <a:schemeClr val="accent1"/>
-          </a:lnRef>
-          <a:fillRef idx="3">
-            <a:schemeClr val="accent1"/>
-          </a:fillRef>
-          <a:effectRef idx="2">
-            <a:schemeClr val="accent1"/>
-          </a:effectRef>
-          <a:fontRef idx="minor">
-            <a:schemeClr val="lt1"/>
-          </a:fontRef>
-        </p:style>
-        <p:txBody>
-          <a:bodyPr rtlCol="0" anchor="ctr"/>
-          <a:lstStyle/>
-          <a:p>
-            <a:pPr algn="ctr"/>
-          </a:p>
-        </p:txBody>
-      </p:sp>
-      <p:sp>
-        <p:nvSpPr>
-          <p:cNvPr id="3" name="TextBox 2"/>
+          <p:cNvPr id="2" name="TextBox 1"/>
           <p:cNvSpPr txBox="1"/>
           <p:nvPr/>
         </p:nvSpPr>
         <p:spPr>
           <a:xfrm>
             <a:off x="1206500" y="2730500"/>
-            <a:ext cx="4191000" cy="1270000"/>
+            <a:ext cx="4191000" cy="425450"/>
           </a:xfrm>
           <a:prstGeom prst="rect">
             <a:avLst/>
@@ -13471,7 +12693,7 @@
       </p:sp>
       <p:sp>
         <p:nvSpPr>
-          <p:cNvPr id="4" name="Rectangle 3"/>
+          <p:cNvPr id="3" name="Rectangle 2"/>
           <p:cNvSpPr/>
           <p:nvPr/>
         </p:nvSpPr>
@@ -13515,14 +12737,14 @@
       </p:sp>
       <p:sp>
         <p:nvSpPr>
-          <p:cNvPr id="5" name="TextBox 4"/>
+          <p:cNvPr id="4" name="TextBox 3"/>
           <p:cNvSpPr txBox="1"/>
           <p:nvPr/>
         </p:nvSpPr>
         <p:spPr>
           <a:xfrm>
             <a:off x="1206500" y="3644900"/>
-            <a:ext cx="4191000" cy="1270000"/>
+            <a:ext cx="4191000" cy="349250"/>
           </a:xfrm>
           <a:prstGeom prst="rect">
             <a:avLst/>
@@ -13556,7 +12778,7 @@
       </p:sp>
       <p:sp>
         <p:nvSpPr>
-          <p:cNvPr id="6" name="Rectangle 5"/>
+          <p:cNvPr id="5" name="Rectangle 4"/>
           <p:cNvSpPr/>
           <p:nvPr/>
         </p:nvSpPr>
@@ -13600,14 +12822,14 @@
       </p:sp>
       <p:sp>
         <p:nvSpPr>
-          <p:cNvPr id="7" name="TextBox 6"/>
+          <p:cNvPr id="6" name="TextBox 5"/>
           <p:cNvSpPr txBox="1"/>
           <p:nvPr/>
         </p:nvSpPr>
         <p:spPr>
           <a:xfrm>
             <a:off x="6826250" y="2730500"/>
-            <a:ext cx="4191000" cy="1270000"/>
+            <a:ext cx="4191000" cy="425450"/>
           </a:xfrm>
           <a:prstGeom prst="rect">
             <a:avLst/>
@@ -13641,7 +12863,7 @@
       </p:sp>
       <p:sp>
         <p:nvSpPr>
-          <p:cNvPr id="8" name="Rectangle 7"/>
+          <p:cNvPr id="7" name="Rectangle 6"/>
           <p:cNvSpPr/>
           <p:nvPr/>
         </p:nvSpPr>
@@ -13685,14 +12907,14 @@
       </p:sp>
       <p:sp>
         <p:nvSpPr>
-          <p:cNvPr id="9" name="TextBox 8"/>
+          <p:cNvPr id="8" name="TextBox 7"/>
           <p:cNvSpPr txBox="1"/>
           <p:nvPr/>
         </p:nvSpPr>
         <p:spPr>
           <a:xfrm>
             <a:off x="6826250" y="3644900"/>
-            <a:ext cx="4191000" cy="1270000"/>
+            <a:ext cx="4191000" cy="349250"/>
           </a:xfrm>
           <a:prstGeom prst="rect">
             <a:avLst/>
@@ -13735,6 +12957,14 @@
 <file path=ppt/slides/slide7.xml><?xml version="1.0" encoding="utf-8"?>
 <p:sld xmlns:a="http://schemas.openxmlformats.org/drawingml/2006/main" xmlns:p="http://schemas.openxmlformats.org/presentationml/2006/main" xmlns:r="http://schemas.openxmlformats.org/officeDocument/2006/relationships">
   <p:cSld>
+    <p:bg>
+      <p:bgPr>
+        <a:solidFill>
+          <a:srgbClr val="0F2346"/>
+        </a:solidFill>
+        <a:effectLst/>
+      </p:bgPr>
+    </p:bg>
     <p:spTree>
       <p:nvGrpSpPr>
         <p:cNvPr id="1" name=""/>
@@ -13750,50 +12980,6 @@
         </p:nvSpPr>
         <p:spPr>
           <a:xfrm>
-            <a:off x="0" y="0"/>
-            <a:ext cx="12192000" cy="6858000"/>
-          </a:xfrm>
-          <a:prstGeom prst="rect">
-            <a:avLst/>
-          </a:prstGeom>
-          <a:solidFill>
-            <a:srgbClr val="0F2346"/>
-          </a:solidFill>
-          <a:ln>
-            <a:noFill/>
-          </a:ln>
-          <a:effectLst/>
-        </p:spPr>
-        <p:style>
-          <a:lnRef idx="1">
-            <a:schemeClr val="accent1"/>
-          </a:lnRef>
-          <a:fillRef idx="3">
-            <a:schemeClr val="accent1"/>
-          </a:fillRef>
-          <a:effectRef idx="2">
-            <a:schemeClr val="accent1"/>
-          </a:effectRef>
-          <a:fontRef idx="minor">
-            <a:schemeClr val="lt1"/>
-          </a:fontRef>
-        </p:style>
-        <p:txBody>
-          <a:bodyPr rtlCol="0" anchor="ctr"/>
-          <a:lstStyle/>
-          <a:p>
-            <a:pPr algn="ctr"/>
-          </a:p>
-        </p:txBody>
-      </p:sp>
-      <p:sp>
-        <p:nvSpPr>
-          <p:cNvPr id="3" name="Rectangle 2"/>
-          <p:cNvSpPr/>
-          <p:nvPr/>
-        </p:nvSpPr>
-        <p:spPr>
-          <a:xfrm>
             <a:off x="355600" y="355600"/>
             <a:ext cx="11480800" cy="6146800"/>
           </a:xfrm>
@@ -13832,14 +13018,14 @@
       </p:sp>
       <p:sp>
         <p:nvSpPr>
-          <p:cNvPr id="4" name="TextBox 3"/>
+          <p:cNvPr id="3" name="TextBox 2"/>
           <p:cNvSpPr txBox="1"/>
           <p:nvPr/>
         </p:nvSpPr>
         <p:spPr>
           <a:xfrm>
             <a:off x="863600" y="952500"/>
-            <a:ext cx="1270000" cy="1270000"/>
+            <a:ext cx="1270000" cy="609600"/>
           </a:xfrm>
           <a:prstGeom prst="rect">
             <a:avLst/>
@@ -13873,7 +13059,7 @@
       </p:sp>
       <p:sp>
         <p:nvSpPr>
-          <p:cNvPr id="5" name="Rectangle 4"/>
+          <p:cNvPr id="4" name="Rectangle 3"/>
           <p:cNvSpPr/>
           <p:nvPr/>
         </p:nvSpPr>
@@ -13917,14 +13103,14 @@
       </p:sp>
       <p:sp>
         <p:nvSpPr>
-          <p:cNvPr id="6" name="TextBox 5"/>
+          <p:cNvPr id="5" name="TextBox 4"/>
           <p:cNvSpPr txBox="1"/>
           <p:nvPr/>
         </p:nvSpPr>
         <p:spPr>
           <a:xfrm>
             <a:off x="863600" y="2032000"/>
-            <a:ext cx="9906000" cy="1270000"/>
+            <a:ext cx="9906000" cy="508000"/>
           </a:xfrm>
           <a:prstGeom prst="rect">
             <a:avLst/>
@@ -13958,14 +13144,14 @@
       </p:sp>
       <p:sp>
         <p:nvSpPr>
-          <p:cNvPr id="7" name="TextBox 6"/>
+          <p:cNvPr id="6" name="TextBox 5"/>
           <p:cNvSpPr txBox="1"/>
           <p:nvPr/>
         </p:nvSpPr>
         <p:spPr>
           <a:xfrm>
             <a:off x="863600" y="2984500"/>
-            <a:ext cx="9906000" cy="1270000"/>
+            <a:ext cx="9906000" cy="431800"/>
           </a:xfrm>
           <a:prstGeom prst="rect">
             <a:avLst/>
@@ -13984,9 +13170,9 @@
               </a:lnSpc>
             </a:pPr>
             <a:r>
-              <a:rPr sz="2000" b="0" i="0">
+              <a:rPr sz="2300" b="0" i="0">
                 <a:solidFill>
-                  <a:srgbClr val="B9C3D2"/>
+                  <a:srgbClr val="F5F1E8"/>
                 </a:solidFill>
                 <a:latin typeface="DM Sans"/>
                 <a:ea typeface="DM Sans"/>
@@ -13999,7 +13185,7 @@
       </p:sp>
       <p:sp>
         <p:nvSpPr>
-          <p:cNvPr id="8" name="Rectangle 7"/>
+          <p:cNvPr id="7" name="Rectangle 6"/>
           <p:cNvSpPr/>
           <p:nvPr/>
         </p:nvSpPr>
@@ -14043,14 +13229,14 @@
       </p:sp>
       <p:sp>
         <p:nvSpPr>
-          <p:cNvPr id="9" name="TextBox 8"/>
+          <p:cNvPr id="8" name="TextBox 7"/>
           <p:cNvSpPr txBox="1"/>
           <p:nvPr/>
         </p:nvSpPr>
         <p:spPr>
           <a:xfrm>
             <a:off x="863600" y="3898900"/>
-            <a:ext cx="9906000" cy="1270000"/>
+            <a:ext cx="9906000" cy="412750"/>
           </a:xfrm>
           <a:prstGeom prst="rect">
             <a:avLst/>
@@ -14069,13 +13255,13 @@
               </a:lnSpc>
             </a:pPr>
             <a:r>
-              <a:rPr sz="1900" b="0" i="0">
+              <a:rPr sz="2200" b="1" i="0">
                 <a:solidFill>
                   <a:srgbClr val="C9A84C"/>
                 </a:solidFill>
-                <a:latin typeface="DM Sans"/>
-                <a:ea typeface="DM Sans"/>
-                <a:cs typeface="DM Sans"/>
+                <a:latin typeface="Montserrat"/>
+                <a:ea typeface="Montserrat"/>
+                <a:cs typeface="Montserrat"/>
               </a:rPr>
               <a:t>One sentence, not a defense.</a:t>
             </a:r>
@@ -14093,6 +13279,14 @@
 <file path=ppt/slides/slide8.xml><?xml version="1.0" encoding="utf-8"?>
 <p:sld xmlns:a="http://schemas.openxmlformats.org/drawingml/2006/main" xmlns:p="http://schemas.openxmlformats.org/presentationml/2006/main" xmlns:r="http://schemas.openxmlformats.org/officeDocument/2006/relationships">
   <p:cSld>
+    <p:bg>
+      <p:bgPr>
+        <a:solidFill>
+          <a:srgbClr val="0F2346"/>
+        </a:solidFill>
+        <a:effectLst/>
+      </p:bgPr>
+    </p:bg>
     <p:spTree>
       <p:nvGrpSpPr>
         <p:cNvPr id="1" name=""/>
@@ -14108,50 +13302,6 @@
         </p:nvSpPr>
         <p:spPr>
           <a:xfrm>
-            <a:off x="0" y="0"/>
-            <a:ext cx="12192000" cy="6858000"/>
-          </a:xfrm>
-          <a:prstGeom prst="rect">
-            <a:avLst/>
-          </a:prstGeom>
-          <a:solidFill>
-            <a:srgbClr val="0F2346"/>
-          </a:solidFill>
-          <a:ln>
-            <a:noFill/>
-          </a:ln>
-          <a:effectLst/>
-        </p:spPr>
-        <p:style>
-          <a:lnRef idx="1">
-            <a:schemeClr val="accent1"/>
-          </a:lnRef>
-          <a:fillRef idx="3">
-            <a:schemeClr val="accent1"/>
-          </a:fillRef>
-          <a:effectRef idx="2">
-            <a:schemeClr val="accent1"/>
-          </a:effectRef>
-          <a:fontRef idx="minor">
-            <a:schemeClr val="lt1"/>
-          </a:fontRef>
-        </p:style>
-        <p:txBody>
-          <a:bodyPr rtlCol="0" anchor="ctr"/>
-          <a:lstStyle/>
-          <a:p>
-            <a:pPr algn="ctr"/>
-          </a:p>
-        </p:txBody>
-      </p:sp>
-      <p:sp>
-        <p:nvSpPr>
-          <p:cNvPr id="3" name="Rectangle 2"/>
-          <p:cNvSpPr/>
-          <p:nvPr/>
-        </p:nvSpPr>
-        <p:spPr>
-          <a:xfrm>
             <a:off x="355600" y="355600"/>
             <a:ext cx="11480800" cy="6146800"/>
           </a:xfrm>
@@ -14190,14 +13340,14 @@
       </p:sp>
       <p:sp>
         <p:nvSpPr>
-          <p:cNvPr id="4" name="TextBox 3"/>
+          <p:cNvPr id="3" name="TextBox 2"/>
           <p:cNvSpPr txBox="1"/>
           <p:nvPr/>
         </p:nvSpPr>
         <p:spPr>
           <a:xfrm>
             <a:off x="863600" y="952500"/>
-            <a:ext cx="1270000" cy="1270000"/>
+            <a:ext cx="1270000" cy="609600"/>
           </a:xfrm>
           <a:prstGeom prst="rect">
             <a:avLst/>
@@ -14231,7 +13381,7 @@
       </p:sp>
       <p:sp>
         <p:nvSpPr>
-          <p:cNvPr id="5" name="Rectangle 4"/>
+          <p:cNvPr id="4" name="Rectangle 3"/>
           <p:cNvSpPr/>
           <p:nvPr/>
         </p:nvSpPr>
@@ -14275,14 +13425,14 @@
       </p:sp>
       <p:sp>
         <p:nvSpPr>
-          <p:cNvPr id="6" name="TextBox 5"/>
+          <p:cNvPr id="5" name="TextBox 4"/>
           <p:cNvSpPr txBox="1"/>
           <p:nvPr/>
         </p:nvSpPr>
         <p:spPr>
           <a:xfrm>
             <a:off x="863600" y="2032000"/>
-            <a:ext cx="9906000" cy="1270000"/>
+            <a:ext cx="9906000" cy="508000"/>
           </a:xfrm>
           <a:prstGeom prst="rect">
             <a:avLst/>
@@ -14316,14 +13466,14 @@
       </p:sp>
       <p:sp>
         <p:nvSpPr>
-          <p:cNvPr id="7" name="TextBox 6"/>
+          <p:cNvPr id="6" name="TextBox 5"/>
           <p:cNvSpPr txBox="1"/>
           <p:nvPr/>
         </p:nvSpPr>
         <p:spPr>
           <a:xfrm>
             <a:off x="863600" y="3124200"/>
-            <a:ext cx="10541000" cy="1270000"/>
+            <a:ext cx="10541000" cy="368300"/>
           </a:xfrm>
           <a:prstGeom prst="rect">
             <a:avLst/>
@@ -14366,6 +13516,14 @@
 <file path=ppt/slides/slide9.xml><?xml version="1.0" encoding="utf-8"?>
 <p:sld xmlns:a="http://schemas.openxmlformats.org/drawingml/2006/main" xmlns:p="http://schemas.openxmlformats.org/presentationml/2006/main" xmlns:r="http://schemas.openxmlformats.org/officeDocument/2006/relationships">
   <p:cSld>
+    <p:bg>
+      <p:bgPr>
+        <a:solidFill>
+          <a:srgbClr val="0F2346"/>
+        </a:solidFill>
+        <a:effectLst/>
+      </p:bgPr>
+    </p:bg>
     <p:spTree>
       <p:nvGrpSpPr>
         <p:cNvPr id="1" name=""/>
@@ -14381,50 +13539,6 @@
         </p:nvSpPr>
         <p:spPr>
           <a:xfrm>
-            <a:off x="0" y="0"/>
-            <a:ext cx="12192000" cy="6858000"/>
-          </a:xfrm>
-          <a:prstGeom prst="rect">
-            <a:avLst/>
-          </a:prstGeom>
-          <a:solidFill>
-            <a:srgbClr val="0F2346"/>
-          </a:solidFill>
-          <a:ln>
-            <a:noFill/>
-          </a:ln>
-          <a:effectLst/>
-        </p:spPr>
-        <p:style>
-          <a:lnRef idx="1">
-            <a:schemeClr val="accent1"/>
-          </a:lnRef>
-          <a:fillRef idx="3">
-            <a:schemeClr val="accent1"/>
-          </a:fillRef>
-          <a:effectRef idx="2">
-            <a:schemeClr val="accent1"/>
-          </a:effectRef>
-          <a:fontRef idx="minor">
-            <a:schemeClr val="lt1"/>
-          </a:fontRef>
-        </p:style>
-        <p:txBody>
-          <a:bodyPr rtlCol="0" anchor="ctr"/>
-          <a:lstStyle/>
-          <a:p>
-            <a:pPr algn="ctr"/>
-          </a:p>
-        </p:txBody>
-      </p:sp>
-      <p:sp>
-        <p:nvSpPr>
-          <p:cNvPr id="3" name="Rectangle 2"/>
-          <p:cNvSpPr/>
-          <p:nvPr/>
-        </p:nvSpPr>
-        <p:spPr>
-          <a:xfrm>
             <a:off x="355600" y="355600"/>
             <a:ext cx="11480800" cy="6146800"/>
           </a:xfrm>
@@ -14463,14 +13577,14 @@
       </p:sp>
       <p:sp>
         <p:nvSpPr>
-          <p:cNvPr id="4" name="TextBox 3"/>
+          <p:cNvPr id="3" name="TextBox 2"/>
           <p:cNvSpPr txBox="1"/>
           <p:nvPr/>
         </p:nvSpPr>
         <p:spPr>
           <a:xfrm>
             <a:off x="863600" y="952500"/>
-            <a:ext cx="1270000" cy="1270000"/>
+            <a:ext cx="1270000" cy="609600"/>
           </a:xfrm>
           <a:prstGeom prst="rect">
             <a:avLst/>
@@ -14504,7 +13618,7 @@
       </p:sp>
       <p:sp>
         <p:nvSpPr>
-          <p:cNvPr id="5" name="Rectangle 4"/>
+          <p:cNvPr id="4" name="Rectangle 3"/>
           <p:cNvSpPr/>
           <p:nvPr/>
         </p:nvSpPr>
@@ -14548,14 +13662,14 @@
       </p:sp>
       <p:sp>
         <p:nvSpPr>
-          <p:cNvPr id="6" name="TextBox 5"/>
+          <p:cNvPr id="5" name="TextBox 4"/>
           <p:cNvSpPr txBox="1"/>
           <p:nvPr/>
         </p:nvSpPr>
         <p:spPr>
           <a:xfrm>
             <a:off x="863600" y="2032000"/>
-            <a:ext cx="9906000" cy="1270000"/>
+            <a:ext cx="9906000" cy="508000"/>
           </a:xfrm>
           <a:prstGeom prst="rect">
             <a:avLst/>
@@ -14589,14 +13703,14 @@
       </p:sp>
       <p:sp>
         <p:nvSpPr>
-          <p:cNvPr id="7" name="TextBox 6"/>
+          <p:cNvPr id="6" name="TextBox 5"/>
           <p:cNvSpPr txBox="1"/>
           <p:nvPr/>
         </p:nvSpPr>
         <p:spPr>
           <a:xfrm>
             <a:off x="863600" y="3124200"/>
-            <a:ext cx="10541000" cy="1270000"/>
+            <a:ext cx="10541000" cy="368300"/>
           </a:xfrm>
           <a:prstGeom prst="rect">
             <a:avLst/>

--- a/deliverables/video-4-slides/out/Video_4_Reveal_Builds.pptx
+++ b/deliverables/video-4-slides/out/Video_4_Reveal_Builds.pptx
@@ -10756,7 +10756,7 @@
               </a:lnSpc>
             </a:pPr>
             <a:r>
-              <a:rPr sz="4600" b="1" i="0">
+              <a:rPr sz="4100" b="1" i="0">
                 <a:solidFill>
                   <a:srgbClr val="F5F1E8"/>
                 </a:solidFill>
@@ -10764,7 +10764,7 @@
                 <a:ea typeface="Montserrat"/>
                 <a:cs typeface="Montserrat"/>
               </a:rPr>
-              <a:t>KEEP THE PROOF</a:t>
+              <a:t>FREE CAREER EVIDENCE STARTER</a:t>
             </a:r>
           </a:p>
         </p:txBody>
@@ -10849,7 +10849,7 @@
                 <a:ea typeface="DM Sans"/>
                 <a:cs typeface="DM Sans"/>
               </a:rPr>
-              <a:t>A 60-Minute Career Evidence System</a:t>
+              <a:t>ONE ACCOMPLISHMENT → ONE PORTABLE PROOF LINE</a:t>
             </a:r>
           </a:p>
         </p:txBody>
@@ -10890,7 +10890,7 @@
                 <a:ea typeface="Montserrat"/>
                 <a:cs typeface="Montserrat"/>
               </a:rPr>
-              <a:t>temidayoafonja.com/keep-the-proof</a:t>
+              <a:t>temidayoafonja.com/career-evidence-starter</a:t>
             </a:r>
           </a:p>
         </p:txBody>

--- a/deliverables/video-4-slides/out/Video_4_Reveal_Builds.pptx
+++ b/deliverables/video-4-slides/out/Video_4_Reveal_Builds.pptx
@@ -527,35 +527,32 @@
           <a:lstStyle/>
           <a:p>
             <a:r>
-              <a:t>Timing: approximately 0:35 to 2:35.</a:t>
-            </a:r>
-          </a:p>
-          <a:p/>
-          <a:p>
-            <a:r>
-              <a:t>Begin full screen on Temidayo. This is the first teaching visual and it</a:t>
-            </a:r>
-          </a:p>
-          <a:p>
-            <a:r>
-              <a:t>appears only after the viewer payoff and the early proof beat.</a:t>
-            </a:r>
-          </a:p>
-          <a:p/>
-          <a:p>
-            <a:r>
-              <a:t>Reveal one chapter at a time as the path is narrated, then hold the full path</a:t>
-            </a:r>
-          </a:p>
-          <a:p>
-            <a:r>
-              <a:t>while the recurring work underneath is described.</a:t>
-            </a:r>
-          </a:p>
-          <a:p/>
-          <a:p>
-            <a:r>
-              <a:t>The footer lands last, on the complete path.</a:t>
+              <a:t>Reveal frame 1 of 4 — main slide 1.</a:t>
+            </a:r>
+          </a:p>
+          <a:p>
+            <a:r>
+              <a:t>Timing: approximately 0:32 to 1:21.</a:t>
+            </a:r>
+          </a:p>
+          <a:p>
+            <a:r>
+              <a:t>Do NOT open on this slide. Begin full-screen on Temidayo and let the whole opening land first: the cat-with-nine-lives line, the disconnected-list problem, "The career wasn't the problem. The explanation was.", and the turn to the viewer — "So if your career looks disconnected on paper, let me show you how I learned to explain mine."</a:t>
+            </a:r>
+          </a:p>
+          <a:p>
+            <a:r>
+              <a:t>FACTUAL BOUNDARY: the joke is the entire approved fact. Do not name the employer publicly, do not invent the original conversation, do not script the colleague's words beyond "a cat with nine lives", and use NO CAT IMAGERY anywhere — not in the edit, not in the thumbnail.</a:t>
+            </a:r>
+          </a:p>
+          <a:p>
+            <a:r>
+              <a:t>Bring the chapters up as the chronology. Temidayo deliberately does not read them back: "The slide gives you the chronology, so I am not going to read every chapter back to you." Let the visual do that work.</a:t>
+            </a:r>
+          </a:p>
+          <a:p>
+            <a:r>
+              <a:t>She then names the limits out loud — the work did not stay identical, some knowledge belonged to the context she was leaving, every move required real learning. Do not trim those.</a:t>
             </a:r>
           </a:p>
         </p:txBody>
@@ -625,35 +622,27 @@
           <a:lstStyle/>
           <a:p>
             <a:r>
-              <a:t>Timing: approximately 3:35 to 5:10.</a:t>
-            </a:r>
-          </a:p>
-          <a:p/>
-          <a:p>
-            <a:r>
-              <a:t>Reveal the verbs one at a time as they are named. Verbs reveal portability</a:t>
-            </a:r>
-          </a:p>
-          <a:p>
-            <a:r>
-              <a:t>where titles, industries and internal terminology create separation.</a:t>
-            </a:r>
-          </a:p>
-          <a:p/>
-          <a:p>
-            <a:r>
-              <a:t>The question lands last, after all four verbs are on screen.</a:t>
-            </a:r>
-          </a:p>
-          <a:p/>
-          <a:p>
-            <a:r>
-              <a:t>Each verb needs evidence. A portable capability is not a word you like; it is</a:t>
-            </a:r>
-          </a:p>
-          <a:p>
-            <a:r>
-              <a:t>something your work repeatedly required you to demonstrate.</a:t>
+              <a:t>Reveal frame 3 of 5 — main slide 4.</a:t>
+            </a:r>
+          </a:p>
+          <a:p>
+            <a:r>
+              <a:t>Timing: approximately 3:11, holding to about 3:40.</a:t>
+            </a:r>
+          </a:p>
+          <a:p>
+            <a:r>
+              <a:t>Reveal NOTICE • TRANSLATE • BUILD • DECIDE as the questions are asked.</a:t>
+            </a:r>
+          </a:p>
+          <a:p>
+            <a:r>
+              <a:t>"In the second sentence, I want you to look underneath the titles" is the coaching bridge into this section. Keep it.</a:t>
+            </a:r>
+          </a:p>
+          <a:p>
+            <a:r>
+              <a:t>The four questions are handed to the viewer one at a time. Let each land; do not stack them into a single graphic.</a:t>
             </a:r>
           </a:p>
         </p:txBody>
@@ -723,35 +712,27 @@
           <a:lstStyle/>
           <a:p>
             <a:r>
-              <a:t>Timing: approximately 3:35 to 5:10.</a:t>
-            </a:r>
-          </a:p>
-          <a:p/>
-          <a:p>
-            <a:r>
-              <a:t>Reveal the verbs one at a time as they are named. Verbs reveal portability</a:t>
-            </a:r>
-          </a:p>
-          <a:p>
-            <a:r>
-              <a:t>where titles, industries and internal terminology create separation.</a:t>
-            </a:r>
-          </a:p>
-          <a:p/>
-          <a:p>
-            <a:r>
-              <a:t>The question lands last, after all four verbs are on screen.</a:t>
-            </a:r>
-          </a:p>
-          <a:p/>
-          <a:p>
-            <a:r>
-              <a:t>Each verb needs evidence. A portable capability is not a word you like; it is</a:t>
-            </a:r>
-          </a:p>
-          <a:p>
-            <a:r>
-              <a:t>something your work repeatedly required you to demonstrate.</a:t>
+              <a:t>Reveal frame 4 of 5 — main slide 4.</a:t>
+            </a:r>
+          </a:p>
+          <a:p>
+            <a:r>
+              <a:t>Timing: approximately 3:11, holding to about 3:40.</a:t>
+            </a:r>
+          </a:p>
+          <a:p>
+            <a:r>
+              <a:t>Reveal NOTICE • TRANSLATE • BUILD • DECIDE as the questions are asked.</a:t>
+            </a:r>
+          </a:p>
+          <a:p>
+            <a:r>
+              <a:t>"In the second sentence, I want you to look underneath the titles" is the coaching bridge into this section. Keep it.</a:t>
+            </a:r>
+          </a:p>
+          <a:p>
+            <a:r>
+              <a:t>The four questions are handed to the viewer one at a time. Let each land; do not stack them into a single graphic.</a:t>
             </a:r>
           </a:p>
         </p:txBody>
@@ -821,35 +802,27 @@
           <a:lstStyle/>
           <a:p>
             <a:r>
-              <a:t>Timing: approximately 3:35 to 5:10.</a:t>
-            </a:r>
-          </a:p>
-          <a:p/>
-          <a:p>
-            <a:r>
-              <a:t>Reveal the verbs one at a time as they are named. Verbs reveal portability</a:t>
-            </a:r>
-          </a:p>
-          <a:p>
-            <a:r>
-              <a:t>where titles, industries and internal terminology create separation.</a:t>
-            </a:r>
-          </a:p>
-          <a:p/>
-          <a:p>
-            <a:r>
-              <a:t>The question lands last, after all four verbs are on screen.</a:t>
-            </a:r>
-          </a:p>
-          <a:p/>
-          <a:p>
-            <a:r>
-              <a:t>Each verb needs evidence. A portable capability is not a word you like; it is</a:t>
-            </a:r>
-          </a:p>
-          <a:p>
-            <a:r>
-              <a:t>something your work repeatedly required you to demonstrate.</a:t>
+              <a:t>Reveal frame 5 of 5 — main slide 4.</a:t>
+            </a:r>
+          </a:p>
+          <a:p>
+            <a:r>
+              <a:t>Timing: approximately 3:11, holding to about 3:40.</a:t>
+            </a:r>
+          </a:p>
+          <a:p>
+            <a:r>
+              <a:t>Reveal NOTICE • TRANSLATE • BUILD • DECIDE as the questions are asked.</a:t>
+            </a:r>
+          </a:p>
+          <a:p>
+            <a:r>
+              <a:t>"In the second sentence, I want you to look underneath the titles" is the coaching bridge into this section. Keep it.</a:t>
+            </a:r>
+          </a:p>
+          <a:p>
+            <a:r>
+              <a:t>The four questions are handed to the viewer one at a time. Let each land; do not stack them into a single graphic.</a:t>
             </a:r>
           </a:p>
         </p:txBody>
@@ -919,29 +892,27 @@
           <a:lstStyle/>
           <a:p>
             <a:r>
-              <a:t>Timing: approximately 4:00.</a:t>
-            </a:r>
-          </a:p>
-          <a:p/>
-          <a:p>
-            <a:r>
-              <a:t>State one: the three nouns as they normally arrive, at full weight.</a:t>
-            </a:r>
-          </a:p>
-          <a:p/>
-          <a:p>
-            <a:r>
-              <a:t>State two: mute the noun list and bring the question forward. The nouns stay</a:t>
-            </a:r>
-          </a:p>
-          <a:p>
-            <a:r>
-              <a:t>on screen, dimmed, so the viewer sees what is being set aside rather than</a:t>
-            </a:r>
-          </a:p>
-          <a:p>
-            <a:r>
-              <a:t>watching it disappear.</a:t>
+              <a:t>Reveal frame 1 of 2 — main slide 5.</a:t>
+            </a:r>
+          </a:p>
+          <a:p>
+            <a:r>
+              <a:t>Timing: approximately 3:40.</a:t>
+            </a:r>
+          </a:p>
+          <a:p>
+            <a:r>
+              <a:t>Show the three nouns first, then the verb question.</a:t>
+            </a:r>
+          </a:p>
+          <a:p>
+            <a:r>
+              <a:t>Temidayo's own recurring verbs — examine, translate, connect, build — are her evidence, not a template. The script is explicit that accounting, cybersecurity and people strategy are NOT the same profession, and that she would not force a connection the evidence does not support. In v3.0 that is turned to the viewer: "so do not force yours either." Do not cut either half.</a:t>
+            </a:r>
+          </a:p>
+          <a:p>
+            <a:r>
+              <a:t>Close on the rule: a portable capability is not a word you like, it is something your work repeatedly required you to demonstrate.</a:t>
             </a:r>
           </a:p>
         </p:txBody>
@@ -1011,29 +982,27 @@
           <a:lstStyle/>
           <a:p>
             <a:r>
-              <a:t>Timing: approximately 4:00.</a:t>
-            </a:r>
-          </a:p>
-          <a:p/>
-          <a:p>
-            <a:r>
-              <a:t>State one: the three nouns as they normally arrive, at full weight.</a:t>
-            </a:r>
-          </a:p>
-          <a:p/>
-          <a:p>
-            <a:r>
-              <a:t>State two: mute the noun list and bring the question forward. The nouns stay</a:t>
-            </a:r>
-          </a:p>
-          <a:p>
-            <a:r>
-              <a:t>on screen, dimmed, so the viewer sees what is being set aside rather than</a:t>
-            </a:r>
-          </a:p>
-          <a:p>
-            <a:r>
-              <a:t>watching it disappear.</a:t>
+              <a:t>Reveal frame 2 of 2 — main slide 5.</a:t>
+            </a:r>
+          </a:p>
+          <a:p>
+            <a:r>
+              <a:t>Timing: approximately 3:40.</a:t>
+            </a:r>
+          </a:p>
+          <a:p>
+            <a:r>
+              <a:t>Show the three nouns first, then the verb question.</a:t>
+            </a:r>
+          </a:p>
+          <a:p>
+            <a:r>
+              <a:t>Temidayo's own recurring verbs — examine, translate, connect, build — are her evidence, not a template. The script is explicit that accounting, cybersecurity and people strategy are NOT the same profession, and that she would not force a connection the evidence does not support. In v3.0 that is turned to the viewer: "so do not force yours either." Do not cut either half.</a:t>
+            </a:r>
+          </a:p>
+          <a:p>
+            <a:r>
+              <a:t>Close on the rule: a portable capability is not a word you like, it is something your work repeatedly required you to demonstrate.</a:t>
             </a:r>
           </a:p>
         </p:txBody>
@@ -1103,24 +1072,22 @@
           <a:lstStyle/>
           <a:p>
             <a:r>
-              <a:t>Timing: approximately 5:10 to 6:45.</a:t>
-            </a:r>
-          </a:p>
-          <a:p/>
-          <a:p>
-            <a:r>
-              <a:t>Simple directional build, one stage at a time.</a:t>
-            </a:r>
-          </a:p>
-          <a:p/>
-          <a:p>
-            <a:r>
-              <a:t>The third part is to explain why the work you want next follows from what you</a:t>
-            </a:r>
-          </a:p>
-          <a:p>
-            <a:r>
-              <a:t>have already built. This is the shape of that argument, nothing more.</a:t>
+              <a:t>Reveal frame 1 of 3 — main slide 6.</a:t>
+            </a:r>
+          </a:p>
+          <a:p>
+            <a:r>
+              <a:t>Timing: approximately 4:52, holding to about 5:11.</a:t>
+            </a:r>
+          </a:p>
+          <a:p>
+            <a:r>
+              <a:t>Reveal PAST CHAPTERS → REPEATED CAPABILITY → NEXT VALUE.</a:t>
+            </a:r>
+          </a:p>
+          <a:p>
+            <a:r>
+              <a:t>The goal is not to prove the next move was inevitable. It is to make the connection understandable. That distinction is the whole section.</a:t>
             </a:r>
           </a:p>
         </p:txBody>
@@ -1190,24 +1157,22 @@
           <a:lstStyle/>
           <a:p>
             <a:r>
-              <a:t>Timing: approximately 5:10 to 6:45.</a:t>
-            </a:r>
-          </a:p>
-          <a:p/>
-          <a:p>
-            <a:r>
-              <a:t>Simple directional build, one stage at a time.</a:t>
-            </a:r>
-          </a:p>
-          <a:p/>
-          <a:p>
-            <a:r>
-              <a:t>The third part is to explain why the work you want next follows from what you</a:t>
-            </a:r>
-          </a:p>
-          <a:p>
-            <a:r>
-              <a:t>have already built. This is the shape of that argument, nothing more.</a:t>
+              <a:t>Reveal frame 2 of 3 — main slide 6.</a:t>
+            </a:r>
+          </a:p>
+          <a:p>
+            <a:r>
+              <a:t>Timing: approximately 4:52, holding to about 5:11.</a:t>
+            </a:r>
+          </a:p>
+          <a:p>
+            <a:r>
+              <a:t>Reveal PAST CHAPTERS → REPEATED CAPABILITY → NEXT VALUE.</a:t>
+            </a:r>
+          </a:p>
+          <a:p>
+            <a:r>
+              <a:t>The goal is not to prove the next move was inevitable. It is to make the connection understandable. That distinction is the whole section.</a:t>
             </a:r>
           </a:p>
         </p:txBody>
@@ -1277,24 +1242,22 @@
           <a:lstStyle/>
           <a:p>
             <a:r>
-              <a:t>Timing: approximately 5:10 to 6:45.</a:t>
-            </a:r>
-          </a:p>
-          <a:p/>
-          <a:p>
-            <a:r>
-              <a:t>Simple directional build, one stage at a time.</a:t>
-            </a:r>
-          </a:p>
-          <a:p/>
-          <a:p>
-            <a:r>
-              <a:t>The third part is to explain why the work you want next follows from what you</a:t>
-            </a:r>
-          </a:p>
-          <a:p>
-            <a:r>
-              <a:t>have already built. This is the shape of that argument, nothing more.</a:t>
+              <a:t>Reveal frame 3 of 3 — main slide 6.</a:t>
+            </a:r>
+          </a:p>
+          <a:p>
+            <a:r>
+              <a:t>Timing: approximately 4:52, holding to about 5:11.</a:t>
+            </a:r>
+          </a:p>
+          <a:p>
+            <a:r>
+              <a:t>Reveal PAST CHAPTERS → REPEATED CAPABILITY → NEXT VALUE.</a:t>
+            </a:r>
+          </a:p>
+          <a:p>
+            <a:r>
+              <a:t>The goal is not to prove the next move was inevitable. It is to make the connection understandable. That distinction is the whole section.</a:t>
             </a:r>
           </a:p>
         </p:txBody>
@@ -1364,24 +1327,37 @@
           <a:lstStyle/>
           <a:p>
             <a:r>
-              <a:t>Timing: approximately 5:30.</a:t>
-            </a:r>
-          </a:p>
-          <a:p/>
-          <a:p>
-            <a:r>
-              <a:t>Reveal one sentence stem at a time.</a:t>
-            </a:r>
-          </a:p>
-          <a:p/>
-          <a:p>
-            <a:r>
-              <a:t>This is an editing frame, not a script to memorise. It keeps the speaker from</a:t>
-            </a:r>
-          </a:p>
-          <a:p>
-            <a:r>
-              <a:t>spending three minutes on chronology and ten seconds on meaning.</a:t>
+              <a:t>Reveal frame 1 of 3 — main slide 7.</a:t>
+            </a:r>
+          </a:p>
+          <a:p>
+            <a:r>
+              <a:t>Timing: approximately 5:11.</a:t>
+            </a:r>
+          </a:p>
+          <a:p>
+            <a:r>
+              <a:t>Reveal the three stems one at a time.</a:t>
+            </a:r>
+          </a:p>
+          <a:p>
+            <a:r>
+              <a:t>"The third sentence explains why the next direction makes sense" is spoken as part of the coaching; it is not a caption.</a:t>
+            </a:r>
+          </a:p>
+          <a:p>
+            <a:r>
+              <a:t>Her worked example is hers — "Here is mine:". Then note what it does NOT say: not every chapter was the same, not every move was planned, not everything transferred automatically. Those three denials are load-bearing and must not be trimmed for pace.</a:t>
+            </a:r>
+          </a:p>
+          <a:p>
+            <a:r>
+              <a:t>Close on the hand-off: "Now try the same three sentences on your own career." Stay on Temidayo for it.</a:t>
+            </a:r>
+          </a:p>
+          <a:p>
+            <a:r>
+              <a:t>This is the only memory device in the video. Do not add CAR, the Career Evidence 3 Cs, or any second framework.</a:t>
             </a:r>
           </a:p>
         </p:txBody>
@@ -1451,24 +1427,37 @@
           <a:lstStyle/>
           <a:p>
             <a:r>
-              <a:t>Timing: approximately 5:30.</a:t>
-            </a:r>
-          </a:p>
-          <a:p/>
-          <a:p>
-            <a:r>
-              <a:t>Reveal one sentence stem at a time.</a:t>
-            </a:r>
-          </a:p>
-          <a:p/>
-          <a:p>
-            <a:r>
-              <a:t>This is an editing frame, not a script to memorise. It keeps the speaker from</a:t>
-            </a:r>
-          </a:p>
-          <a:p>
-            <a:r>
-              <a:t>spending three minutes on chronology and ten seconds on meaning.</a:t>
+              <a:t>Reveal frame 2 of 3 — main slide 7.</a:t>
+            </a:r>
+          </a:p>
+          <a:p>
+            <a:r>
+              <a:t>Timing: approximately 5:11.</a:t>
+            </a:r>
+          </a:p>
+          <a:p>
+            <a:r>
+              <a:t>Reveal the three stems one at a time.</a:t>
+            </a:r>
+          </a:p>
+          <a:p>
+            <a:r>
+              <a:t>"The third sentence explains why the next direction makes sense" is spoken as part of the coaching; it is not a caption.</a:t>
+            </a:r>
+          </a:p>
+          <a:p>
+            <a:r>
+              <a:t>Her worked example is hers — "Here is mine:". Then note what it does NOT say: not every chapter was the same, not every move was planned, not everything transferred automatically. Those three denials are load-bearing and must not be trimmed for pace.</a:t>
+            </a:r>
+          </a:p>
+          <a:p>
+            <a:r>
+              <a:t>Close on the hand-off: "Now try the same three sentences on your own career." Stay on Temidayo for it.</a:t>
+            </a:r>
+          </a:p>
+          <a:p>
+            <a:r>
+              <a:t>This is the only memory device in the video. Do not add CAR, the Career Evidence 3 Cs, or any second framework.</a:t>
             </a:r>
           </a:p>
         </p:txBody>
@@ -1538,35 +1527,32 @@
           <a:lstStyle/>
           <a:p>
             <a:r>
-              <a:t>Timing: approximately 0:35 to 2:35.</a:t>
-            </a:r>
-          </a:p>
-          <a:p/>
-          <a:p>
-            <a:r>
-              <a:t>Begin full screen on Temidayo. This is the first teaching visual and it</a:t>
-            </a:r>
-          </a:p>
-          <a:p>
-            <a:r>
-              <a:t>appears only after the viewer payoff and the early proof beat.</a:t>
-            </a:r>
-          </a:p>
-          <a:p/>
-          <a:p>
-            <a:r>
-              <a:t>Reveal one chapter at a time as the path is narrated, then hold the full path</a:t>
-            </a:r>
-          </a:p>
-          <a:p>
-            <a:r>
-              <a:t>while the recurring work underneath is described.</a:t>
-            </a:r>
-          </a:p>
-          <a:p/>
-          <a:p>
-            <a:r>
-              <a:t>The footer lands last, on the complete path.</a:t>
+              <a:t>Reveal frame 2 of 4 — main slide 1.</a:t>
+            </a:r>
+          </a:p>
+          <a:p>
+            <a:r>
+              <a:t>Timing: approximately 0:32 to 1:21.</a:t>
+            </a:r>
+          </a:p>
+          <a:p>
+            <a:r>
+              <a:t>Do NOT open on this slide. Begin full-screen on Temidayo and let the whole opening land first: the cat-with-nine-lives line, the disconnected-list problem, "The career wasn't the problem. The explanation was.", and the turn to the viewer — "So if your career looks disconnected on paper, let me show you how I learned to explain mine."</a:t>
+            </a:r>
+          </a:p>
+          <a:p>
+            <a:r>
+              <a:t>FACTUAL BOUNDARY: the joke is the entire approved fact. Do not name the employer publicly, do not invent the original conversation, do not script the colleague's words beyond "a cat with nine lives", and use NO CAT IMAGERY anywhere — not in the edit, not in the thumbnail.</a:t>
+            </a:r>
+          </a:p>
+          <a:p>
+            <a:r>
+              <a:t>Bring the chapters up as the chronology. Temidayo deliberately does not read them back: "The slide gives you the chronology, so I am not going to read every chapter back to you." Let the visual do that work.</a:t>
+            </a:r>
+          </a:p>
+          <a:p>
+            <a:r>
+              <a:t>She then names the limits out loud — the work did not stay identical, some knowledge belonged to the context she was leaving, every move required real learning. Do not trim those.</a:t>
             </a:r>
           </a:p>
         </p:txBody>
@@ -1636,24 +1622,37 @@
           <a:lstStyle/>
           <a:p>
             <a:r>
-              <a:t>Timing: approximately 5:30.</a:t>
-            </a:r>
-          </a:p>
-          <a:p/>
-          <a:p>
-            <a:r>
-              <a:t>Reveal one sentence stem at a time.</a:t>
-            </a:r>
-          </a:p>
-          <a:p/>
-          <a:p>
-            <a:r>
-              <a:t>This is an editing frame, not a script to memorise. It keeps the speaker from</a:t>
-            </a:r>
-          </a:p>
-          <a:p>
-            <a:r>
-              <a:t>spending three minutes on chronology and ten seconds on meaning.</a:t>
+              <a:t>Reveal frame 3 of 3 — main slide 7.</a:t>
+            </a:r>
+          </a:p>
+          <a:p>
+            <a:r>
+              <a:t>Timing: approximately 5:11.</a:t>
+            </a:r>
+          </a:p>
+          <a:p>
+            <a:r>
+              <a:t>Reveal the three stems one at a time.</a:t>
+            </a:r>
+          </a:p>
+          <a:p>
+            <a:r>
+              <a:t>"The third sentence explains why the next direction makes sense" is spoken as part of the coaching; it is not a caption.</a:t>
+            </a:r>
+          </a:p>
+          <a:p>
+            <a:r>
+              <a:t>Her worked example is hers — "Here is mine:". Then note what it does NOT say: not every chapter was the same, not every move was planned, not everything transferred automatically. Those three denials are load-bearing and must not be trimmed for pace.</a:t>
+            </a:r>
+          </a:p>
+          <a:p>
+            <a:r>
+              <a:t>Close on the hand-off: "Now try the same three sentences on your own career." Stay on Temidayo for it.</a:t>
+            </a:r>
+          </a:p>
+          <a:p>
+            <a:r>
+              <a:t>This is the only memory device in the video. Do not add CAR, the Career Evidence 3 Cs, or any second framework.</a:t>
             </a:r>
           </a:p>
         </p:txBody>
@@ -1723,29 +1722,32 @@
           <a:lstStyle/>
           <a:p>
             <a:r>
-              <a:t>Timing: approximately 6:45 to 7:35.</a:t>
-            </a:r>
-          </a:p>
-          <a:p/>
-          <a:p>
-            <a:r>
-              <a:t>Use this slide full screen briefly, then return to Temidayo.</a:t>
-            </a:r>
-          </a:p>
-          <a:p/>
-          <a:p>
-            <a:r>
-              <a:t>Coherence is not the same as claiming every move was strategic. A truthful</a:t>
-            </a:r>
-          </a:p>
-          <a:p>
-            <a:r>
-              <a:t>explanation can include interruption and redirection. The goal is not to make</a:t>
-            </a:r>
-          </a:p>
-          <a:p>
-            <a:r>
-              <a:t>the career look linear. The goal is to make the formation legible.</a:t>
+              <a:t>Single-state frame — main slide 8.</a:t>
+            </a:r>
+          </a:p>
+          <a:p>
+            <a:r>
+              <a:t>Timing: approximately 6:17.</a:t>
+            </a:r>
+          </a:p>
+          <a:p>
+            <a:r>
+              <a:t>The honesty test, and the reason the video is credible. Give it room.</a:t>
+            </a:r>
+          </a:p>
+          <a:p>
+            <a:r>
+              <a:t>"There is an honesty test here, and here is what I would not do." That framing is Temidayo taking the risk first, then handing the viewer the standard. Keep it.</a:t>
+            </a:r>
+          </a:p>
+          <a:p>
+            <a:r>
+              <a:t>Markets, caregiving, health, compensation, restructuring and unpredicted opportunity are all named as legitimate. Interruption, redirection and relearning are all allowed in a truthful explanation.</a:t>
+            </a:r>
+          </a:p>
+          <a:p>
+            <a:r>
+              <a:t>Close on: you are not trying to make your career look linear, you are trying to make your formation legible.</a:t>
             </a:r>
           </a:p>
         </p:txBody>
@@ -1815,34 +1817,32 @@
           <a:lstStyle/>
           <a:p>
             <a:r>
-              <a:t>Timing: approximately 8:05.</a:t>
-            </a:r>
-          </a:p>
-          <a:p/>
-          <a:p>
-            <a:r>
-              <a:t>Progressive reveal with a brief pause between questions so each one can be</a:t>
-            </a:r>
-          </a:p>
-          <a:p>
-            <a:r>
-              <a:t>answered before the next arrives.</a:t>
-            </a:r>
-          </a:p>
-          <a:p/>
-          <a:p>
-            <a:r>
-              <a:t>If the answer to any of them is no, the career may not be the problem. The</a:t>
-            </a:r>
-          </a:p>
-          <a:p>
-            <a:r>
-              <a:t>explanation may still be carrying too much chronology and not enough</a:t>
-            </a:r>
-          </a:p>
-          <a:p>
-            <a:r>
-              <a:t>portability.</a:t>
+              <a:t>Reveal frame 1 of 3 — main slide 9.</a:t>
+            </a:r>
+          </a:p>
+          <a:p>
+            <a:r>
+              <a:t>Timing: approximately 7:08.</a:t>
+            </a:r>
+          </a:p>
+          <a:p>
+            <a:r>
+              <a:t>Reveal the three test questions one at a time, then the evidence challenges.</a:t>
+            </a:r>
+          </a:p>
+          <a:p>
+            <a:r>
+              <a:t>The three "if you say…" lines are the sharpest moment in the video and they are addressed straight at the viewer. Do not soften them and do not bury them under a graphic.</a:t>
+            </a:r>
+          </a:p>
+          <a:p>
+            <a:r>
+              <a:t>Then the written exercise: three or four chapters, the problem, the judgment, one piece of PERMITTED evidence, then circle the repeating verbs. The permitted qualifier is not optional.</a:t>
+            </a:r>
+          </a:p>
+          <a:p>
+            <a:r>
+              <a:t>Close on the reassurance: if it still sounds disconnected, the problem may not be your path — you may just need better evidence behind the connection.</a:t>
             </a:r>
           </a:p>
         </p:txBody>
@@ -1912,34 +1912,32 @@
           <a:lstStyle/>
           <a:p>
             <a:r>
-              <a:t>Timing: approximately 8:05.</a:t>
-            </a:r>
-          </a:p>
-          <a:p/>
-          <a:p>
-            <a:r>
-              <a:t>Progressive reveal with a brief pause between questions so each one can be</a:t>
-            </a:r>
-          </a:p>
-          <a:p>
-            <a:r>
-              <a:t>answered before the next arrives.</a:t>
-            </a:r>
-          </a:p>
-          <a:p/>
-          <a:p>
-            <a:r>
-              <a:t>If the answer to any of them is no, the career may not be the problem. The</a:t>
-            </a:r>
-          </a:p>
-          <a:p>
-            <a:r>
-              <a:t>explanation may still be carrying too much chronology and not enough</a:t>
-            </a:r>
-          </a:p>
-          <a:p>
-            <a:r>
-              <a:t>portability.</a:t>
+              <a:t>Reveal frame 2 of 3 — main slide 9.</a:t>
+            </a:r>
+          </a:p>
+          <a:p>
+            <a:r>
+              <a:t>Timing: approximately 7:08.</a:t>
+            </a:r>
+          </a:p>
+          <a:p>
+            <a:r>
+              <a:t>Reveal the three test questions one at a time, then the evidence challenges.</a:t>
+            </a:r>
+          </a:p>
+          <a:p>
+            <a:r>
+              <a:t>The three "if you say…" lines are the sharpest moment in the video and they are addressed straight at the viewer. Do not soften them and do not bury them under a graphic.</a:t>
+            </a:r>
+          </a:p>
+          <a:p>
+            <a:r>
+              <a:t>Then the written exercise: three or four chapters, the problem, the judgment, one piece of PERMITTED evidence, then circle the repeating verbs. The permitted qualifier is not optional.</a:t>
+            </a:r>
+          </a:p>
+          <a:p>
+            <a:r>
+              <a:t>Close on the reassurance: if it still sounds disconnected, the problem may not be your path — you may just need better evidence behind the connection.</a:t>
             </a:r>
           </a:p>
         </p:txBody>
@@ -2009,34 +2007,32 @@
           <a:lstStyle/>
           <a:p>
             <a:r>
-              <a:t>Timing: approximately 8:05.</a:t>
-            </a:r>
-          </a:p>
-          <a:p/>
-          <a:p>
-            <a:r>
-              <a:t>Progressive reveal with a brief pause between questions so each one can be</a:t>
-            </a:r>
-          </a:p>
-          <a:p>
-            <a:r>
-              <a:t>answered before the next arrives.</a:t>
-            </a:r>
-          </a:p>
-          <a:p/>
-          <a:p>
-            <a:r>
-              <a:t>If the answer to any of them is no, the career may not be the problem. The</a:t>
-            </a:r>
-          </a:p>
-          <a:p>
-            <a:r>
-              <a:t>explanation may still be carrying too much chronology and not enough</a:t>
-            </a:r>
-          </a:p>
-          <a:p>
-            <a:r>
-              <a:t>portability.</a:t>
+              <a:t>Reveal frame 3 of 3 — main slide 9.</a:t>
+            </a:r>
+          </a:p>
+          <a:p>
+            <a:r>
+              <a:t>Timing: approximately 7:08.</a:t>
+            </a:r>
+          </a:p>
+          <a:p>
+            <a:r>
+              <a:t>Reveal the three test questions one at a time, then the evidence challenges.</a:t>
+            </a:r>
+          </a:p>
+          <a:p>
+            <a:r>
+              <a:t>The three "if you say…" lines are the sharpest moment in the video and they are addressed straight at the viewer. Do not soften them and do not bury them under a graphic.</a:t>
+            </a:r>
+          </a:p>
+          <a:p>
+            <a:r>
+              <a:t>Then the written exercise: three or four chapters, the problem, the judgment, one piece of PERMITTED evidence, then circle the repeating verbs. The permitted qualifier is not optional.</a:t>
+            </a:r>
+          </a:p>
+          <a:p>
+            <a:r>
+              <a:t>Close on the reassurance: if it still sounds disconnected, the problem may not be your path — you may just need better evidence behind the connection.</a:t>
             </a:r>
           </a:p>
         </p:txBody>
@@ -2106,30 +2102,32 @@
           <a:lstStyle/>
           <a:p>
             <a:r>
-              <a:t>Timing: approximately 8:38.</a:t>
-            </a:r>
-          </a:p>
-          <a:p/>
-          <a:p>
-            <a:r>
-              <a:t>Simple CTA card. No competing offer on screen.</a:t>
-            </a:r>
-          </a:p>
-          <a:p/>
-          <a:p>
-            <a:r>
-              <a:t>Keep the Proof does not decide the next move. It preserves what will be needed</a:t>
-            </a:r>
-          </a:p>
-          <a:p>
-            <a:r>
-              <a:t>to explain the value once the context changes.</a:t>
-            </a:r>
-          </a:p>
-          <a:p/>
-          <a:p>
-            <a:r>
-              <a:t>ROUTE CHECK: temidayoafonja.com/keep-the-proof must resolve before publication.</a:t>
+              <a:t>Single-state frame — main slide 10.</a:t>
+            </a:r>
+          </a:p>
+          <a:p>
+            <a:r>
+              <a:t>Timing: approximately 8:31.</a:t>
+            </a:r>
+          </a:p>
+          <a:p>
+            <a:r>
+              <a:t>Calm and brief. This is the only invitation in the video, and it is the FREE Career Evidence Starter — not Keep the Proof, not the Capability Formation Field Kit.</a:t>
+            </a:r>
+          </a:p>
+          <a:p>
+            <a:r>
+              <a:t>Exact invitation, verbatim from the v3.0 script:</a:t>
+            </a:r>
+          </a:p>
+          <a:p>
+            <a:r>
+              <a:t>"If you want to try this on one real accomplishment of yours, I made a free Career Evidence Starter. Set aside about 10 to 15 focused minutes and you will leave with one portable Proof Line. I've linked it below."</a:t>
+            </a:r>
+          </a:p>
+          <a:p>
+            <a:r>
+              <a:t>Show the real Starter artwork. Use the direct public landing-page URL only — temidayoafonja.com/career-evidence-starter. Do not expose a PDF link.</a:t>
             </a:r>
           </a:p>
         </p:txBody>
@@ -2199,35 +2197,32 @@
           <a:lstStyle/>
           <a:p>
             <a:r>
-              <a:t>Timing: final 15 to 20 seconds.</a:t>
-            </a:r>
-          </a:p>
-          <a:p/>
-          <a:p>
-            <a:r>
-              <a:t>Watch next: Should I Make an Internal Move? 3 Questions to Decide.</a:t>
-            </a:r>
-          </a:p>
-          <a:p/>
-          <a:p>
-            <a:r>
-              <a:t>All content is held left of x=1130 so the right side stays clear for YouTube</a:t>
-            </a:r>
-          </a:p>
-          <a:p>
-            <a:r>
-              <a:t>end-screen elements.</a:t>
-            </a:r>
-          </a:p>
-          <a:p/>
-          <a:p>
-            <a:r>
-              <a:t>Closing line: your career does not need to look linear to be coherent, but you</a:t>
-            </a:r>
-          </a:p>
-          <a:p>
-            <a:r>
-              <a:t>do have to make the continuity visible.</a:t>
+              <a:t>Single-state frame — main slide 11.</a:t>
+            </a:r>
+          </a:p>
+          <a:p>
+            <a:r>
+              <a:t>Timing: approximately 8:48 to the end, about 9:20.</a:t>
+            </a:r>
+          </a:p>
+          <a:p>
+            <a:r>
+              <a:t>The card reads "Should I Make an Internal Move? 3 Questions to Decide" with the playlist line. That is the locked Video 5 title and it matches what Temidayo says.</a:t>
+            </a:r>
+          </a:p>
+          <a:p>
+            <a:r>
+              <a:t>Closing lines: "Your career does not have to look linear to make sense. But you do have to make the continuity visible." Stay on her for both.</a:t>
+            </a:r>
+          </a:p>
+          <a:p>
+            <a:r>
+              <a:t>Do not summarize this video again.</a:t>
+            </a:r>
+          </a:p>
+          <a:p>
+            <a:r>
+              <a:t>The right side of the frame is left open for the YouTube linked-video end-screen element. Hold the final frame for at least 12 seconds. Do not leave Subscribe as the only end-screen element.</a:t>
             </a:r>
           </a:p>
         </p:txBody>
@@ -2297,35 +2292,32 @@
           <a:lstStyle/>
           <a:p>
             <a:r>
-              <a:t>Timing: approximately 0:35 to 2:35.</a:t>
-            </a:r>
-          </a:p>
-          <a:p/>
-          <a:p>
-            <a:r>
-              <a:t>Begin full screen on Temidayo. This is the first teaching visual and it</a:t>
-            </a:r>
-          </a:p>
-          <a:p>
-            <a:r>
-              <a:t>appears only after the viewer payoff and the early proof beat.</a:t>
-            </a:r>
-          </a:p>
-          <a:p/>
-          <a:p>
-            <a:r>
-              <a:t>Reveal one chapter at a time as the path is narrated, then hold the full path</a:t>
-            </a:r>
-          </a:p>
-          <a:p>
-            <a:r>
-              <a:t>while the recurring work underneath is described.</a:t>
-            </a:r>
-          </a:p>
-          <a:p/>
-          <a:p>
-            <a:r>
-              <a:t>The footer lands last, on the complete path.</a:t>
+              <a:t>Reveal frame 3 of 4 — main slide 1.</a:t>
+            </a:r>
+          </a:p>
+          <a:p>
+            <a:r>
+              <a:t>Timing: approximately 0:32 to 1:21.</a:t>
+            </a:r>
+          </a:p>
+          <a:p>
+            <a:r>
+              <a:t>Do NOT open on this slide. Begin full-screen on Temidayo and let the whole opening land first: the cat-with-nine-lives line, the disconnected-list problem, "The career wasn't the problem. The explanation was.", and the turn to the viewer — "So if your career looks disconnected on paper, let me show you how I learned to explain mine."</a:t>
+            </a:r>
+          </a:p>
+          <a:p>
+            <a:r>
+              <a:t>FACTUAL BOUNDARY: the joke is the entire approved fact. Do not name the employer publicly, do not invent the original conversation, do not script the colleague's words beyond "a cat with nine lives", and use NO CAT IMAGERY anywhere — not in the edit, not in the thumbnail.</a:t>
+            </a:r>
+          </a:p>
+          <a:p>
+            <a:r>
+              <a:t>Bring the chapters up as the chronology. Temidayo deliberately does not read them back: "The slide gives you the chronology, so I am not going to read every chapter back to you." Let the visual do that work.</a:t>
+            </a:r>
+          </a:p>
+          <a:p>
+            <a:r>
+              <a:t>She then names the limits out loud — the work did not stay identical, some knowledge belonged to the context she was leaving, every move required real learning. Do not trim those.</a:t>
             </a:r>
           </a:p>
         </p:txBody>
@@ -2395,35 +2387,32 @@
           <a:lstStyle/>
           <a:p>
             <a:r>
-              <a:t>Timing: approximately 0:35 to 2:35.</a:t>
-            </a:r>
-          </a:p>
-          <a:p/>
-          <a:p>
-            <a:r>
-              <a:t>Begin full screen on Temidayo. This is the first teaching visual and it</a:t>
-            </a:r>
-          </a:p>
-          <a:p>
-            <a:r>
-              <a:t>appears only after the viewer payoff and the early proof beat.</a:t>
-            </a:r>
-          </a:p>
-          <a:p/>
-          <a:p>
-            <a:r>
-              <a:t>Reveal one chapter at a time as the path is narrated, then hold the full path</a:t>
-            </a:r>
-          </a:p>
-          <a:p>
-            <a:r>
-              <a:t>while the recurring work underneath is described.</a:t>
-            </a:r>
-          </a:p>
-          <a:p/>
-          <a:p>
-            <a:r>
-              <a:t>The footer lands last, on the complete path.</a:t>
+              <a:t>Reveal frame 4 of 4 — main slide 1.</a:t>
+            </a:r>
+          </a:p>
+          <a:p>
+            <a:r>
+              <a:t>Timing: approximately 0:32 to 1:21.</a:t>
+            </a:r>
+          </a:p>
+          <a:p>
+            <a:r>
+              <a:t>Do NOT open on this slide. Begin full-screen on Temidayo and let the whole opening land first: the cat-with-nine-lives line, the disconnected-list problem, "The career wasn't the problem. The explanation was.", and the turn to the viewer — "So if your career looks disconnected on paper, let me show you how I learned to explain mine."</a:t>
+            </a:r>
+          </a:p>
+          <a:p>
+            <a:r>
+              <a:t>FACTUAL BOUNDARY: the joke is the entire approved fact. Do not name the employer publicly, do not invent the original conversation, do not script the colleague's words beyond "a cat with nine lives", and use NO CAT IMAGERY anywhere — not in the edit, not in the thumbnail.</a:t>
+            </a:r>
+          </a:p>
+          <a:p>
+            <a:r>
+              <a:t>Bring the chapters up as the chronology. Temidayo deliberately does not read them back: "The slide gives you the chronology, so I am not going to read every chapter back to you." Let the visual do that work.</a:t>
+            </a:r>
+          </a:p>
+          <a:p>
+            <a:r>
+              <a:t>She then names the limits out loud — the work did not stay identical, some knowledge belonged to the context she was leaving, every move required real learning. Do not trim those.</a:t>
             </a:r>
           </a:p>
         </p:txBody>
@@ -2493,29 +2482,32 @@
           <a:lstStyle/>
           <a:p>
             <a:r>
-              <a:t>Timing: approximately 1:05.</a:t>
-            </a:r>
-          </a:p>
-          <a:p/>
-          <a:p>
-            <a:r>
-              <a:t>Two-column comparison. Chronology first, on its own, while the point about</a:t>
-            </a:r>
-          </a:p>
-          <a:p>
-            <a:r>
-              <a:t>giving someone the chronology is made.</a:t>
-            </a:r>
-          </a:p>
-          <a:p/>
-          <a:p>
-            <a:r>
-              <a:t>Bring PORTABILITY in second and let it carry the weight. It is the half the</a:t>
-            </a:r>
-          </a:p>
-          <a:p>
-            <a:r>
-              <a:t>listener is not being given.</a:t>
+              <a:t>Reveal frame 1 of 2 — main slide 2.</a:t>
+            </a:r>
+          </a:p>
+          <a:p>
+            <a:r>
+              <a:t>Timing: approximately 1:21.</a:t>
+            </a:r>
+          </a:p>
+          <a:p>
+            <a:r>
+              <a:t>The central distinction of the video. Reveal the second half after the first has been stated.</a:t>
+            </a:r>
+          </a:p>
+          <a:p>
+            <a:r>
+              <a:t>Note the direct-address framing in v3.0: "when someone asks you, 'Walk me through your background,' you probably give them a list." The list that follows is the viewer's list, not a case study. Keep it restrained — no résumé-scroll animation, no timeline gag.</a:t>
+            </a:r>
+          </a:p>
+          <a:p>
+            <a:r>
+              <a:t>Close on the instruction: give them enough chronology to orient them, then explain what the work repeatedly required you to become able to do.</a:t>
+            </a:r>
+          </a:p>
+          <a:p>
+            <a:r>
+              <a:t>"There are three parts, and I want to walk you through each one" is the coaching turn. Stay on Temidayo.</a:t>
             </a:r>
           </a:p>
         </p:txBody>
@@ -2585,29 +2577,32 @@
           <a:lstStyle/>
           <a:p>
             <a:r>
-              <a:t>Timing: approximately 1:05.</a:t>
-            </a:r>
-          </a:p>
-          <a:p/>
-          <a:p>
-            <a:r>
-              <a:t>Two-column comparison. Chronology first, on its own, while the point about</a:t>
-            </a:r>
-          </a:p>
-          <a:p>
-            <a:r>
-              <a:t>giving someone the chronology is made.</a:t>
-            </a:r>
-          </a:p>
-          <a:p/>
-          <a:p>
-            <a:r>
-              <a:t>Bring PORTABILITY in second and let it carry the weight. It is the half the</a:t>
-            </a:r>
-          </a:p>
-          <a:p>
-            <a:r>
-              <a:t>listener is not being given.</a:t>
+              <a:t>Reveal frame 2 of 2 — main slide 2.</a:t>
+            </a:r>
+          </a:p>
+          <a:p>
+            <a:r>
+              <a:t>Timing: approximately 1:21.</a:t>
+            </a:r>
+          </a:p>
+          <a:p>
+            <a:r>
+              <a:t>The central distinction of the video. Reveal the second half after the first has been stated.</a:t>
+            </a:r>
+          </a:p>
+          <a:p>
+            <a:r>
+              <a:t>Note the direct-address framing in v3.0: "when someone asks you, 'Walk me through your background,' you probably give them a list." The list that follows is the viewer's list, not a case study. Keep it restrained — no résumé-scroll animation, no timeline gag.</a:t>
+            </a:r>
+          </a:p>
+          <a:p>
+            <a:r>
+              <a:t>Close on the instruction: give them enough chronology to orient them, then explain what the work repeatedly required you to become able to do.</a:t>
+            </a:r>
+          </a:p>
+          <a:p>
+            <a:r>
+              <a:t>"There are three parts, and I want to walk you through each one" is the coaching turn. Stay on Temidayo.</a:t>
             </a:r>
           </a:p>
         </p:txBody>
@@ -2677,29 +2672,32 @@
           <a:lstStyle/>
           <a:p>
             <a:r>
-              <a:t>Timing: approximately 2:35 to 3:35.</a:t>
-            </a:r>
-          </a:p>
-          <a:p/>
-          <a:p>
-            <a:r>
-              <a:t>Section break. Hold briefly, then return to presenter.</a:t>
-            </a:r>
-          </a:p>
-          <a:p/>
-          <a:p>
-            <a:r>
-              <a:t>The point being carried: orient the listener, do not defend every decision or</a:t>
-            </a:r>
-          </a:p>
-          <a:p>
-            <a:r>
-              <a:t>recite every position. Enough chronology to establish the shape of the path,</a:t>
-            </a:r>
-          </a:p>
-          <a:p>
-            <a:r>
-              <a:t>short enough that there is room left to explain what the chapters built.</a:t>
+              <a:t>Single-state frame — main slide 3.</a:t>
+            </a:r>
+          </a:p>
+          <a:p>
+            <a:r>
+              <a:t>Timing: approximately 2:09.</a:t>
+            </a:r>
+          </a:p>
+          <a:p>
+            <a:r>
+              <a:t>Reveal the three cues as she names them.</a:t>
+            </a:r>
+          </a:p>
+          <a:p>
+            <a:r>
+              <a:t>The coached framing is deliberate: "Your first sentence only has one job: orientation, not defense." Do not cut it.</a:t>
+            </a:r>
+          </a:p>
+          <a:p>
+            <a:r>
+              <a:t>Her own example chapters are spoken once, briefly. The 2008 financial-crisis context stays exactly as spoken and gains nothing: she graduated into that market, so the first turn was not part of a designed plan. No employer, no metric, no further detail.</a:t>
+            </a:r>
+          </a:p>
+          <a:p>
+            <a:r>
+              <a:t>Close on the honesty line: a coherent career story does not require pretending every move was strategic.</a:t>
             </a:r>
           </a:p>
         </p:txBody>
@@ -2769,35 +2767,27 @@
           <a:lstStyle/>
           <a:p>
             <a:r>
-              <a:t>Timing: approximately 3:35 to 5:10.</a:t>
-            </a:r>
-          </a:p>
-          <a:p/>
-          <a:p>
-            <a:r>
-              <a:t>Reveal the verbs one at a time as they are named. Verbs reveal portability</a:t>
-            </a:r>
-          </a:p>
-          <a:p>
-            <a:r>
-              <a:t>where titles, industries and internal terminology create separation.</a:t>
-            </a:r>
-          </a:p>
-          <a:p/>
-          <a:p>
-            <a:r>
-              <a:t>The question lands last, after all four verbs are on screen.</a:t>
-            </a:r>
-          </a:p>
-          <a:p/>
-          <a:p>
-            <a:r>
-              <a:t>Each verb needs evidence. A portable capability is not a word you like; it is</a:t>
-            </a:r>
-          </a:p>
-          <a:p>
-            <a:r>
-              <a:t>something your work repeatedly required you to demonstrate.</a:t>
+              <a:t>Reveal frame 1 of 5 — main slide 4.</a:t>
+            </a:r>
+          </a:p>
+          <a:p>
+            <a:r>
+              <a:t>Timing: approximately 3:11, holding to about 3:40.</a:t>
+            </a:r>
+          </a:p>
+          <a:p>
+            <a:r>
+              <a:t>Reveal NOTICE • TRANSLATE • BUILD • DECIDE as the questions are asked.</a:t>
+            </a:r>
+          </a:p>
+          <a:p>
+            <a:r>
+              <a:t>"In the second sentence, I want you to look underneath the titles" is the coaching bridge into this section. Keep it.</a:t>
+            </a:r>
+          </a:p>
+          <a:p>
+            <a:r>
+              <a:t>The four questions are handed to the viewer one at a time. Let each land; do not stack them into a single graphic.</a:t>
             </a:r>
           </a:p>
         </p:txBody>
@@ -2867,35 +2857,27 @@
           <a:lstStyle/>
           <a:p>
             <a:r>
-              <a:t>Timing: approximately 3:35 to 5:10.</a:t>
-            </a:r>
-          </a:p>
-          <a:p/>
-          <a:p>
-            <a:r>
-              <a:t>Reveal the verbs one at a time as they are named. Verbs reveal portability</a:t>
-            </a:r>
-          </a:p>
-          <a:p>
-            <a:r>
-              <a:t>where titles, industries and internal terminology create separation.</a:t>
-            </a:r>
-          </a:p>
-          <a:p/>
-          <a:p>
-            <a:r>
-              <a:t>The question lands last, after all four verbs are on screen.</a:t>
-            </a:r>
-          </a:p>
-          <a:p/>
-          <a:p>
-            <a:r>
-              <a:t>Each verb needs evidence. A portable capability is not a word you like; it is</a:t>
-            </a:r>
-          </a:p>
-          <a:p>
-            <a:r>
-              <a:t>something your work repeatedly required you to demonstrate.</a:t>
+              <a:t>Reveal frame 2 of 5 — main slide 4.</a:t>
+            </a:r>
+          </a:p>
+          <a:p>
+            <a:r>
+              <a:t>Timing: approximately 3:11, holding to about 3:40.</a:t>
+            </a:r>
+          </a:p>
+          <a:p>
+            <a:r>
+              <a:t>Reveal NOTICE • TRANSLATE • BUILD • DECIDE as the questions are asked.</a:t>
+            </a:r>
+          </a:p>
+          <a:p>
+            <a:r>
+              <a:t>"In the second sentence, I want you to look underneath the titles" is the coaching bridge into this section. Keep it.</a:t>
+            </a:r>
+          </a:p>
+          <a:p>
+            <a:r>
+              <a:t>The four questions are handed to the viewer one at a time. Let each land; do not stack them into a single graphic.</a:t>
             </a:r>
           </a:p>
         </p:txBody>

--- a/deliverables/video-4-slides/out/Video_4_Reveal_Builds.pptx
+++ b/deliverables/video-4-slides/out/Video_4_Reveal_Builds.pptx
@@ -907,7 +907,7 @@
           </a:p>
           <a:p>
             <a:r>
-              <a:t>Temidayo's own recurring verbs — examine, translate, connect, build — are her evidence, not a template. The script is explicit that accounting, cybersecurity and people strategy are NOT the same profession, and that she would not force a connection the evidence does not support. In v3.0 that is turned to the viewer: "so do not force yours either." Do not cut either half.</a:t>
+              <a:t>Temidayo's own recurring verbs — examine, translate, connect, build — are her evidence, not a template. The script is explicit that accounting, cybersecurity and people strategy are NOT the same profession, and that she would not force a connection the evidence does not support. In v4.0 that is turned to the viewer: "so do not force yours either." Do not cut either half.</a:t>
             </a:r>
           </a:p>
           <a:p>
@@ -997,7 +997,7 @@
           </a:p>
           <a:p>
             <a:r>
-              <a:t>Temidayo's own recurring verbs — examine, translate, connect, build — are her evidence, not a template. The script is explicit that accounting, cybersecurity and people strategy are NOT the same profession, and that she would not force a connection the evidence does not support. In v3.0 that is turned to the viewer: "so do not force yours either." Do not cut either half.</a:t>
+              <a:t>Temidayo's own recurring verbs — examine, translate, connect, build — are her evidence, not a template. The script is explicit that accounting, cybersecurity and people strategy are NOT the same profession, and that she would not force a connection the evidence does not support. In v4.0 that is turned to the viewer: "so do not force yours either." Do not cut either half.</a:t>
             </a:r>
           </a:p>
           <a:p>
@@ -2117,7 +2117,7 @@
           </a:p>
           <a:p>
             <a:r>
-              <a:t>Exact invitation, verbatim from the v3.0 script:</a:t>
+              <a:t>Exact invitation, verbatim from the v4.0 script:</a:t>
             </a:r>
           </a:p>
           <a:p>
@@ -2497,7 +2497,7 @@
           </a:p>
           <a:p>
             <a:r>
-              <a:t>Note the direct-address framing in v3.0: "when someone asks you, 'Walk me through your background,' you probably give them a list." The list that follows is the viewer's list, not a case study. Keep it restrained — no résumé-scroll animation, no timeline gag.</a:t>
+              <a:t>Note the direct-address framing in v4.0: "when someone asks you, 'Walk me through your background,' you probably give them a list." The list that follows is the viewer's list, not a case study. Keep it restrained — no résumé-scroll animation, no timeline gag.</a:t>
             </a:r>
           </a:p>
           <a:p>
@@ -2592,7 +2592,7 @@
           </a:p>
           <a:p>
             <a:r>
-              <a:t>Note the direct-address framing in v3.0: "when someone asks you, 'Walk me through your background,' you probably give them a list." The list that follows is the viewer's list, not a case study. Keep it restrained — no résumé-scroll animation, no timeline gag.</a:t>
+              <a:t>Note the direct-address framing in v4.0: "when someone asks you, 'Walk me through your background,' you probably give them a list." The list that follows is the viewer's list, not a case study. Keep it restrained — no résumé-scroll animation, no timeline gag.</a:t>
             </a:r>
           </a:p>
           <a:p>

--- a/deliverables/video-4-slides/out/Video_4_Reveal_Builds.pptx
+++ b/deliverables/video-4-slides/out/Video_4_Reveal_Builds.pptx
@@ -532,27 +532,27 @@
           </a:p>
           <a:p>
             <a:r>
-              <a:t>Timing: approximately 0:32 to 1:21.</a:t>
-            </a:r>
-          </a:p>
-          <a:p>
-            <a:r>
-              <a:t>Do NOT open on this slide. Begin full-screen on Temidayo and let the whole opening land first: the cat-with-nine-lives line, the disconnected-list problem, "The career wasn't the problem. The explanation was.", and the turn to the viewer — "So if your career looks disconnected on paper, let me show you how I learned to explain mine."</a:t>
-            </a:r>
-          </a:p>
-          <a:p>
-            <a:r>
-              <a:t>FACTUAL BOUNDARY: the joke is the entire approved fact. Do not name the employer publicly, do not invent the original conversation, do not script the colleague's words beyond "a cat with nine lives", and use NO CAT IMAGERY anywhere — not in the edit, not in the thumbnail.</a:t>
-            </a:r>
-          </a:p>
-          <a:p>
-            <a:r>
-              <a:t>Bring the chapters up as the chronology. Temidayo deliberately does not read them back: "The slide gives you the chronology, so I am not going to read every chapter back to you." Let the visual do that work.</a:t>
-            </a:r>
-          </a:p>
-          <a:p>
-            <a:r>
-              <a:t>She then names the limits out loud — the work did not stay identical, some knowledge belonged to the context she was leaving, every move required real learning. Do not trim those.</a:t>
+              <a:t>Timing: approximately 0:48 to 1:35.</a:t>
+            </a:r>
+          </a:p>
+          <a:p>
+            <a:r>
+              <a:t>Do NOT open on this slide. Begin full-screen on Temidayo and let the opening land: the viewer's CV making sense only to them, the exact moment halfway into the second job when it stops landing, the cat-with-nine-lives joke, "the career was not the problem, the explanation was", and the offer.</a:t>
+            </a:r>
+          </a:p>
+          <a:p>
+            <a:r>
+              <a:t>FACTUAL BOUNDARY: the joke is the entire approved fact. A senior-manager friend at EY used to joke it. Do not invent the original conversation, do not script the friend's words, and use NO CAT IMAGERY anywhere — edit, graphic or thumbnail.</a:t>
+            </a:r>
+          </a:p>
+          <a:p>
+            <a:r>
+              <a:t>The chronology lives on the slide. Temidayo does not read it: "The slide has the chapters, so I am not going to read them to you."</a:t>
+            </a:r>
+          </a:p>
+          <a:p>
+            <a:r>
+              <a:t>What she does instead is confess the old habit — listing the jobs and handing the listener a pile of parts. That admission earns the method. Keep it.</a:t>
             </a:r>
           </a:p>
         </p:txBody>
@@ -627,22 +627,22 @@
           </a:p>
           <a:p>
             <a:r>
-              <a:t>Timing: approximately 3:11, holding to about 3:40.</a:t>
-            </a:r>
-          </a:p>
-          <a:p>
-            <a:r>
-              <a:t>Reveal NOTICE • TRANSLATE • BUILD • DECIDE as the questions are asked.</a:t>
-            </a:r>
-          </a:p>
-          <a:p>
-            <a:r>
-              <a:t>"In the second sentence, I want you to look underneath the titles" is the coaching bridge into this section. Keep it.</a:t>
-            </a:r>
-          </a:p>
-          <a:p>
-            <a:r>
-              <a:t>The four questions are handed to the viewer one at a time. Let each land; do not stack them into a single graphic.</a:t>
+              <a:t>Timing: approximately 3:26, holding to about 3:56.</a:t>
+            </a:r>
+          </a:p>
+          <a:p>
+            <a:r>
+              <a:t>Reveal NOTICE • TRANSLATE • BUILD • DECIDE as the questions arrive.</a:t>
+            </a:r>
+          </a:p>
+          <a:p>
+            <a:r>
+              <a:t>"In your second sentence, I want you to look under the labels." That is the coaching bridge into the section.</a:t>
+            </a:r>
+          </a:p>
+          <a:p>
+            <a:r>
+              <a:t>Four questions, one at a time. Do not stack them into a single graphic.</a:t>
             </a:r>
           </a:p>
         </p:txBody>
@@ -717,22 +717,22 @@
           </a:p>
           <a:p>
             <a:r>
-              <a:t>Timing: approximately 3:11, holding to about 3:40.</a:t>
-            </a:r>
-          </a:p>
-          <a:p>
-            <a:r>
-              <a:t>Reveal NOTICE • TRANSLATE • BUILD • DECIDE as the questions are asked.</a:t>
-            </a:r>
-          </a:p>
-          <a:p>
-            <a:r>
-              <a:t>"In the second sentence, I want you to look underneath the titles" is the coaching bridge into this section. Keep it.</a:t>
-            </a:r>
-          </a:p>
-          <a:p>
-            <a:r>
-              <a:t>The four questions are handed to the viewer one at a time. Let each land; do not stack them into a single graphic.</a:t>
+              <a:t>Timing: approximately 3:26, holding to about 3:56.</a:t>
+            </a:r>
+          </a:p>
+          <a:p>
+            <a:r>
+              <a:t>Reveal NOTICE • TRANSLATE • BUILD • DECIDE as the questions arrive.</a:t>
+            </a:r>
+          </a:p>
+          <a:p>
+            <a:r>
+              <a:t>"In your second sentence, I want you to look under the labels." That is the coaching bridge into the section.</a:t>
+            </a:r>
+          </a:p>
+          <a:p>
+            <a:r>
+              <a:t>Four questions, one at a time. Do not stack them into a single graphic.</a:t>
             </a:r>
           </a:p>
         </p:txBody>
@@ -807,22 +807,22 @@
           </a:p>
           <a:p>
             <a:r>
-              <a:t>Timing: approximately 3:11, holding to about 3:40.</a:t>
-            </a:r>
-          </a:p>
-          <a:p>
-            <a:r>
-              <a:t>Reveal NOTICE • TRANSLATE • BUILD • DECIDE as the questions are asked.</a:t>
-            </a:r>
-          </a:p>
-          <a:p>
-            <a:r>
-              <a:t>"In the second sentence, I want you to look underneath the titles" is the coaching bridge into this section. Keep it.</a:t>
-            </a:r>
-          </a:p>
-          <a:p>
-            <a:r>
-              <a:t>The four questions are handed to the viewer one at a time. Let each land; do not stack them into a single graphic.</a:t>
+              <a:t>Timing: approximately 3:26, holding to about 3:56.</a:t>
+            </a:r>
+          </a:p>
+          <a:p>
+            <a:r>
+              <a:t>Reveal NOTICE • TRANSLATE • BUILD • DECIDE as the questions arrive.</a:t>
+            </a:r>
+          </a:p>
+          <a:p>
+            <a:r>
+              <a:t>"In your second sentence, I want you to look under the labels." That is the coaching bridge into the section.</a:t>
+            </a:r>
+          </a:p>
+          <a:p>
+            <a:r>
+              <a:t>Four questions, one at a time. Do not stack them into a single graphic.</a:t>
             </a:r>
           </a:p>
         </p:txBody>
@@ -897,7 +897,7 @@
           </a:p>
           <a:p>
             <a:r>
-              <a:t>Timing: approximately 3:40.</a:t>
+              <a:t>Timing: approximately 3:56.</a:t>
             </a:r>
           </a:p>
           <a:p>
@@ -907,12 +907,17 @@
           </a:p>
           <a:p>
             <a:r>
-              <a:t>Temidayo's own recurring verbs — examine, translate, connect, build — are her evidence, not a template. The script is explicit that accounting, cybersecurity and people strategy are NOT the same profession, and that she would not force a connection the evidence does not support. In v4.0 that is turned to the viewer: "so do not force yours either." Do not cut either half.</a:t>
-            </a:r>
-          </a:p>
-          <a:p>
-            <a:r>
-              <a:t>Close on the rule: a portable capability is not a word you like, it is something your work repeatedly required you to demonstrate.</a:t>
+              <a:t>Her own verbs — examine, translate, connect, build — are her evidence, not a template for the viewer.</a:t>
+            </a:r>
+          </a:p>
+          <a:p>
+            <a:r>
+              <a:t>The script is explicit that accounting, cybersecurity and people strategy are NOT the same profession, and that she would not force a connection the evidence does not support. In v5.0 that is turned to the viewer as well: "and I do not want you to either. A forced story is worse than a messy one, because the person listening can feel it." Do not cut either half.</a:t>
+            </a:r>
+          </a:p>
+          <a:p>
+            <a:r>
+              <a:t>Close on the rule: a portable capability is not a word you like the sound of.</a:t>
             </a:r>
           </a:p>
         </p:txBody>
@@ -987,7 +992,7 @@
           </a:p>
           <a:p>
             <a:r>
-              <a:t>Timing: approximately 3:40.</a:t>
+              <a:t>Timing: approximately 3:56.</a:t>
             </a:r>
           </a:p>
           <a:p>
@@ -997,12 +1002,17 @@
           </a:p>
           <a:p>
             <a:r>
-              <a:t>Temidayo's own recurring verbs — examine, translate, connect, build — are her evidence, not a template. The script is explicit that accounting, cybersecurity and people strategy are NOT the same profession, and that she would not force a connection the evidence does not support. In v4.0 that is turned to the viewer: "so do not force yours either." Do not cut either half.</a:t>
-            </a:r>
-          </a:p>
-          <a:p>
-            <a:r>
-              <a:t>Close on the rule: a portable capability is not a word you like, it is something your work repeatedly required you to demonstrate.</a:t>
+              <a:t>Her own verbs — examine, translate, connect, build — are her evidence, not a template for the viewer.</a:t>
+            </a:r>
+          </a:p>
+          <a:p>
+            <a:r>
+              <a:t>The script is explicit that accounting, cybersecurity and people strategy are NOT the same profession, and that she would not force a connection the evidence does not support. In v5.0 that is turned to the viewer as well: "and I do not want you to either. A forced story is worse than a messy one, because the person listening can feel it." Do not cut either half.</a:t>
+            </a:r>
+          </a:p>
+          <a:p>
+            <a:r>
+              <a:t>Close on the rule: a portable capability is not a word you like the sound of.</a:t>
             </a:r>
           </a:p>
         </p:txBody>
@@ -1077,7 +1087,7 @@
           </a:p>
           <a:p>
             <a:r>
-              <a:t>Timing: approximately 4:52, holding to about 5:11.</a:t>
+              <a:t>Timing: approximately 5:28, holding to about 5:49.</a:t>
             </a:r>
           </a:p>
           <a:p>
@@ -1087,7 +1097,7 @@
           </a:p>
           <a:p>
             <a:r>
-              <a:t>The goal is not to prove the next move was inevitable. It is to make the connection understandable. That distinction is the whole section.</a:t>
+              <a:t>You are not proving the next move was inevitable. You are making the connection possible to hear. That distinction is the section.</a:t>
             </a:r>
           </a:p>
         </p:txBody>
@@ -1162,7 +1172,7 @@
           </a:p>
           <a:p>
             <a:r>
-              <a:t>Timing: approximately 4:52, holding to about 5:11.</a:t>
+              <a:t>Timing: approximately 5:28, holding to about 5:49.</a:t>
             </a:r>
           </a:p>
           <a:p>
@@ -1172,7 +1182,7 @@
           </a:p>
           <a:p>
             <a:r>
-              <a:t>The goal is not to prove the next move was inevitable. It is to make the connection understandable. That distinction is the whole section.</a:t>
+              <a:t>You are not proving the next move was inevitable. You are making the connection possible to hear. That distinction is the section.</a:t>
             </a:r>
           </a:p>
         </p:txBody>
@@ -1247,7 +1257,7 @@
           </a:p>
           <a:p>
             <a:r>
-              <a:t>Timing: approximately 4:52, holding to about 5:11.</a:t>
+              <a:t>Timing: approximately 5:28, holding to about 5:49.</a:t>
             </a:r>
           </a:p>
           <a:p>
@@ -1257,7 +1267,7 @@
           </a:p>
           <a:p>
             <a:r>
-              <a:t>The goal is not to prove the next move was inevitable. It is to make the connection understandable. That distinction is the whole section.</a:t>
+              <a:t>You are not proving the next move was inevitable. You are making the connection possible to hear. That distinction is the section.</a:t>
             </a:r>
           </a:p>
         </p:txBody>
@@ -1332,7 +1342,7 @@
           </a:p>
           <a:p>
             <a:r>
-              <a:t>Timing: approximately 5:11.</a:t>
+              <a:t>Timing: approximately 5:49.</a:t>
             </a:r>
           </a:p>
           <a:p>
@@ -1342,22 +1352,22 @@
           </a:p>
           <a:p>
             <a:r>
-              <a:t>"The third sentence explains why the next direction makes sense" is spoken as part of the coaching; it is not a caption.</a:t>
-            </a:r>
-          </a:p>
-          <a:p>
-            <a:r>
-              <a:t>Her worked example is hers — "Here is mine:". Then note what it does NOT say: not every chapter was the same, not every move was planned, not everything transferred automatically. Those three denials are load-bearing and must not be trimmed for pace.</a:t>
-            </a:r>
-          </a:p>
-          <a:p>
-            <a:r>
-              <a:t>Close on the hand-off: "Now try the same three sentences on your own career." Stay on Temidayo for it.</a:t>
-            </a:r>
-          </a:p>
-          <a:p>
-            <a:r>
-              <a:t>This is the only memory device in the video. Do not add CAR, the Career Evidence 3 Cs, or any second framework.</a:t>
+              <a:t>"The third sentence is doing the real work. It is where the past stops being a list and starts pointing somewhere." That is spoken coaching, not a caption.</a:t>
+            </a:r>
+          </a:p>
+          <a:p>
+            <a:r>
+              <a:t>Her worked example is hers. Then the three denials: not the same chapters, not planned, not everything transferred. All three are load-bearing and must not be trimmed for pace.</a:t>
+            </a:r>
+          </a:p>
+          <a:p>
+            <a:r>
+              <a:t>Close on the hand-off: "Now try the same three sentences on your own career. Out loud, not in your head." The out-loud instruction is deliberate — it is how the viewer finds the sentence they cannot finish.</a:t>
+            </a:r>
+          </a:p>
+          <a:p>
+            <a:r>
+              <a:t>This is the only memory device in the video. Do not add CAR or the 3 Cs.</a:t>
             </a:r>
           </a:p>
         </p:txBody>
@@ -1432,7 +1442,7 @@
           </a:p>
           <a:p>
             <a:r>
-              <a:t>Timing: approximately 5:11.</a:t>
+              <a:t>Timing: approximately 5:49.</a:t>
             </a:r>
           </a:p>
           <a:p>
@@ -1442,22 +1452,22 @@
           </a:p>
           <a:p>
             <a:r>
-              <a:t>"The third sentence explains why the next direction makes sense" is spoken as part of the coaching; it is not a caption.</a:t>
-            </a:r>
-          </a:p>
-          <a:p>
-            <a:r>
-              <a:t>Her worked example is hers — "Here is mine:". Then note what it does NOT say: not every chapter was the same, not every move was planned, not everything transferred automatically. Those three denials are load-bearing and must not be trimmed for pace.</a:t>
-            </a:r>
-          </a:p>
-          <a:p>
-            <a:r>
-              <a:t>Close on the hand-off: "Now try the same three sentences on your own career." Stay on Temidayo for it.</a:t>
-            </a:r>
-          </a:p>
-          <a:p>
-            <a:r>
-              <a:t>This is the only memory device in the video. Do not add CAR, the Career Evidence 3 Cs, or any second framework.</a:t>
+              <a:t>"The third sentence is doing the real work. It is where the past stops being a list and starts pointing somewhere." That is spoken coaching, not a caption.</a:t>
+            </a:r>
+          </a:p>
+          <a:p>
+            <a:r>
+              <a:t>Her worked example is hers. Then the three denials: not the same chapters, not planned, not everything transferred. All three are load-bearing and must not be trimmed for pace.</a:t>
+            </a:r>
+          </a:p>
+          <a:p>
+            <a:r>
+              <a:t>Close on the hand-off: "Now try the same three sentences on your own career. Out loud, not in your head." The out-loud instruction is deliberate — it is how the viewer finds the sentence they cannot finish.</a:t>
+            </a:r>
+          </a:p>
+          <a:p>
+            <a:r>
+              <a:t>This is the only memory device in the video. Do not add CAR or the 3 Cs.</a:t>
             </a:r>
           </a:p>
         </p:txBody>
@@ -1532,27 +1542,27 @@
           </a:p>
           <a:p>
             <a:r>
-              <a:t>Timing: approximately 0:32 to 1:21.</a:t>
-            </a:r>
-          </a:p>
-          <a:p>
-            <a:r>
-              <a:t>Do NOT open on this slide. Begin full-screen on Temidayo and let the whole opening land first: the cat-with-nine-lives line, the disconnected-list problem, "The career wasn't the problem. The explanation was.", and the turn to the viewer — "So if your career looks disconnected on paper, let me show you how I learned to explain mine."</a:t>
-            </a:r>
-          </a:p>
-          <a:p>
-            <a:r>
-              <a:t>FACTUAL BOUNDARY: the joke is the entire approved fact. Do not name the employer publicly, do not invent the original conversation, do not script the colleague's words beyond "a cat with nine lives", and use NO CAT IMAGERY anywhere — not in the edit, not in the thumbnail.</a:t>
-            </a:r>
-          </a:p>
-          <a:p>
-            <a:r>
-              <a:t>Bring the chapters up as the chronology. Temidayo deliberately does not read them back: "The slide gives you the chronology, so I am not going to read every chapter back to you." Let the visual do that work.</a:t>
-            </a:r>
-          </a:p>
-          <a:p>
-            <a:r>
-              <a:t>She then names the limits out loud — the work did not stay identical, some knowledge belonged to the context she was leaving, every move required real learning. Do not trim those.</a:t>
+              <a:t>Timing: approximately 0:48 to 1:35.</a:t>
+            </a:r>
+          </a:p>
+          <a:p>
+            <a:r>
+              <a:t>Do NOT open on this slide. Begin full-screen on Temidayo and let the opening land: the viewer's CV making sense only to them, the exact moment halfway into the second job when it stops landing, the cat-with-nine-lives joke, "the career was not the problem, the explanation was", and the offer.</a:t>
+            </a:r>
+          </a:p>
+          <a:p>
+            <a:r>
+              <a:t>FACTUAL BOUNDARY: the joke is the entire approved fact. A senior-manager friend at EY used to joke it. Do not invent the original conversation, do not script the friend's words, and use NO CAT IMAGERY anywhere — edit, graphic or thumbnail.</a:t>
+            </a:r>
+          </a:p>
+          <a:p>
+            <a:r>
+              <a:t>The chronology lives on the slide. Temidayo does not read it: "The slide has the chapters, so I am not going to read them to you."</a:t>
+            </a:r>
+          </a:p>
+          <a:p>
+            <a:r>
+              <a:t>What she does instead is confess the old habit — listing the jobs and handing the listener a pile of parts. That admission earns the method. Keep it.</a:t>
             </a:r>
           </a:p>
         </p:txBody>
@@ -1627,7 +1637,7 @@
           </a:p>
           <a:p>
             <a:r>
-              <a:t>Timing: approximately 5:11.</a:t>
+              <a:t>Timing: approximately 5:49.</a:t>
             </a:r>
           </a:p>
           <a:p>
@@ -1637,22 +1647,22 @@
           </a:p>
           <a:p>
             <a:r>
-              <a:t>"The third sentence explains why the next direction makes sense" is spoken as part of the coaching; it is not a caption.</a:t>
-            </a:r>
-          </a:p>
-          <a:p>
-            <a:r>
-              <a:t>Her worked example is hers — "Here is mine:". Then note what it does NOT say: not every chapter was the same, not every move was planned, not everything transferred automatically. Those three denials are load-bearing and must not be trimmed for pace.</a:t>
-            </a:r>
-          </a:p>
-          <a:p>
-            <a:r>
-              <a:t>Close on the hand-off: "Now try the same three sentences on your own career." Stay on Temidayo for it.</a:t>
-            </a:r>
-          </a:p>
-          <a:p>
-            <a:r>
-              <a:t>This is the only memory device in the video. Do not add CAR, the Career Evidence 3 Cs, or any second framework.</a:t>
+              <a:t>"The third sentence is doing the real work. It is where the past stops being a list and starts pointing somewhere." That is spoken coaching, not a caption.</a:t>
+            </a:r>
+          </a:p>
+          <a:p>
+            <a:r>
+              <a:t>Her worked example is hers. Then the three denials: not the same chapters, not planned, not everything transferred. All three are load-bearing and must not be trimmed for pace.</a:t>
+            </a:r>
+          </a:p>
+          <a:p>
+            <a:r>
+              <a:t>Close on the hand-off: "Now try the same three sentences on your own career. Out loud, not in your head." The out-loud instruction is deliberate — it is how the viewer finds the sentence they cannot finish.</a:t>
+            </a:r>
+          </a:p>
+          <a:p>
+            <a:r>
+              <a:t>This is the only memory device in the video. Do not add CAR or the 3 Cs.</a:t>
             </a:r>
           </a:p>
         </p:txBody>
@@ -1727,7 +1737,7 @@
           </a:p>
           <a:p>
             <a:r>
-              <a:t>Timing: approximately 6:17.</a:t>
+              <a:t>Timing: approximately 7:05.</a:t>
             </a:r>
           </a:p>
           <a:p>
@@ -1737,17 +1747,17 @@
           </a:p>
           <a:p>
             <a:r>
-              <a:t>"There is an honesty test here, and here is what I would not do." That framing is Temidayo taking the risk first, then handing the viewer the standard. Keep it.</a:t>
-            </a:r>
-          </a:p>
-          <a:p>
-            <a:r>
-              <a:t>Markets, caregiving, health, compensation, restructuring and unpredicted opportunity are all named as legitimate. Interruption, redirection and relearning are all allowed in a truthful explanation.</a:t>
-            </a:r>
-          </a:p>
-          <a:p>
-            <a:r>
-              <a:t>Close on: you are not trying to make your career look linear, you are trying to make your formation legible.</a:t>
+              <a:t>"And here is what I would not do." She takes the risk first, then hands the viewer the standard.</a:t>
+            </a:r>
+          </a:p>
+          <a:p>
+            <a:r>
+              <a:t>Markets, caregiving, health, money, restructures and unpredicted opportunity are all named as legitimate. Interruption, redirection and relearning all belong in a truthful explanation.</a:t>
+            </a:r>
+          </a:p>
+          <a:p>
+            <a:r>
+              <a:t>"If one of your chapters does not fit a tidy progression, leave it untidy." Let that land — it is the permission the viewer came for.</a:t>
             </a:r>
           </a:p>
         </p:txBody>
@@ -1822,27 +1832,37 @@
           </a:p>
           <a:p>
             <a:r>
-              <a:t>Timing: approximately 7:08.</a:t>
-            </a:r>
-          </a:p>
-          <a:p>
-            <a:r>
-              <a:t>Reveal the three test questions one at a time, then the evidence challenges.</a:t>
-            </a:r>
-          </a:p>
-          <a:p>
-            <a:r>
-              <a:t>The three "if you say…" lines are the sharpest moment in the video and they are addressed straight at the viewer. Do not soften them and do not bury them under a graphic.</a:t>
-            </a:r>
-          </a:p>
-          <a:p>
-            <a:r>
-              <a:t>Then the written exercise: three or four chapters, the problem, the judgment, one piece of PERMITTED evidence, then circle the repeating verbs. The permitted qualifier is not optional.</a:t>
-            </a:r>
-          </a:p>
-          <a:p>
-            <a:r>
-              <a:t>Close on the reassurance: if it still sounds disconnected, the problem may not be your path — you may just need better evidence behind the connection.</a:t>
+              <a:t>Timing: approximately 8:03.</a:t>
+            </a:r>
+          </a:p>
+          <a:p>
+            <a:r>
+              <a:t>Reveal the three test questions, then the evidence challenges.</a:t>
+            </a:r>
+          </a:p>
+          <a:p>
+            <a:r>
+              <a:t>The three "if you say…" lines are the sharpest moment in the video, and the follow-up "who disagreed first" is the one that makes it real. Do not soften them or bury them under a graphic.</a:t>
+            </a:r>
+          </a:p>
+          <a:p>
+            <a:r>
+              <a:t>Then the written exercise, with the PERMITTED evidence qualifier intact.</a:t>
+            </a:r>
+          </a:p>
+          <a:p>
+            <a:r>
+              <a:t>Then the honest limits: this will not make a hiring manager say yes, fix a market, make a change easy, or remove the relearning. What it removes is the part where the viewer's own experience works against them in the room.</a:t>
+            </a:r>
+          </a:p>
+          <a:p>
+            <a:r>
+              <a:t>IDENTITY EXIT, at about 9:31: "I want you to stop apologising for a career that actually makes sense — and to be able to say what it built, plainly, without inventing a plan you never had."</a:t>
+            </a:r>
+          </a:p>
+          <a:p>
+            <a:r>
+              <a:t>That is the point of the video. If the edit runs long, cut something else.</a:t>
             </a:r>
           </a:p>
         </p:txBody>
@@ -1917,27 +1937,37 @@
           </a:p>
           <a:p>
             <a:r>
-              <a:t>Timing: approximately 7:08.</a:t>
-            </a:r>
-          </a:p>
-          <a:p>
-            <a:r>
-              <a:t>Reveal the three test questions one at a time, then the evidence challenges.</a:t>
-            </a:r>
-          </a:p>
-          <a:p>
-            <a:r>
-              <a:t>The three "if you say…" lines are the sharpest moment in the video and they are addressed straight at the viewer. Do not soften them and do not bury them under a graphic.</a:t>
-            </a:r>
-          </a:p>
-          <a:p>
-            <a:r>
-              <a:t>Then the written exercise: three or four chapters, the problem, the judgment, one piece of PERMITTED evidence, then circle the repeating verbs. The permitted qualifier is not optional.</a:t>
-            </a:r>
-          </a:p>
-          <a:p>
-            <a:r>
-              <a:t>Close on the reassurance: if it still sounds disconnected, the problem may not be your path — you may just need better evidence behind the connection.</a:t>
+              <a:t>Timing: approximately 8:03.</a:t>
+            </a:r>
+          </a:p>
+          <a:p>
+            <a:r>
+              <a:t>Reveal the three test questions, then the evidence challenges.</a:t>
+            </a:r>
+          </a:p>
+          <a:p>
+            <a:r>
+              <a:t>The three "if you say…" lines are the sharpest moment in the video, and the follow-up "who disagreed first" is the one that makes it real. Do not soften them or bury them under a graphic.</a:t>
+            </a:r>
+          </a:p>
+          <a:p>
+            <a:r>
+              <a:t>Then the written exercise, with the PERMITTED evidence qualifier intact.</a:t>
+            </a:r>
+          </a:p>
+          <a:p>
+            <a:r>
+              <a:t>Then the honest limits: this will not make a hiring manager say yes, fix a market, make a change easy, or remove the relearning. What it removes is the part where the viewer's own experience works against them in the room.</a:t>
+            </a:r>
+          </a:p>
+          <a:p>
+            <a:r>
+              <a:t>IDENTITY EXIT, at about 9:31: "I want you to stop apologising for a career that actually makes sense — and to be able to say what it built, plainly, without inventing a plan you never had."</a:t>
+            </a:r>
+          </a:p>
+          <a:p>
+            <a:r>
+              <a:t>That is the point of the video. If the edit runs long, cut something else.</a:t>
             </a:r>
           </a:p>
         </p:txBody>
@@ -2012,27 +2042,37 @@
           </a:p>
           <a:p>
             <a:r>
-              <a:t>Timing: approximately 7:08.</a:t>
-            </a:r>
-          </a:p>
-          <a:p>
-            <a:r>
-              <a:t>Reveal the three test questions one at a time, then the evidence challenges.</a:t>
-            </a:r>
-          </a:p>
-          <a:p>
-            <a:r>
-              <a:t>The three "if you say…" lines are the sharpest moment in the video and they are addressed straight at the viewer. Do not soften them and do not bury them under a graphic.</a:t>
-            </a:r>
-          </a:p>
-          <a:p>
-            <a:r>
-              <a:t>Then the written exercise: three or four chapters, the problem, the judgment, one piece of PERMITTED evidence, then circle the repeating verbs. The permitted qualifier is not optional.</a:t>
-            </a:r>
-          </a:p>
-          <a:p>
-            <a:r>
-              <a:t>Close on the reassurance: if it still sounds disconnected, the problem may not be your path — you may just need better evidence behind the connection.</a:t>
+              <a:t>Timing: approximately 8:03.</a:t>
+            </a:r>
+          </a:p>
+          <a:p>
+            <a:r>
+              <a:t>Reveal the three test questions, then the evidence challenges.</a:t>
+            </a:r>
+          </a:p>
+          <a:p>
+            <a:r>
+              <a:t>The three "if you say…" lines are the sharpest moment in the video, and the follow-up "who disagreed first" is the one that makes it real. Do not soften them or bury them under a graphic.</a:t>
+            </a:r>
+          </a:p>
+          <a:p>
+            <a:r>
+              <a:t>Then the written exercise, with the PERMITTED evidence qualifier intact.</a:t>
+            </a:r>
+          </a:p>
+          <a:p>
+            <a:r>
+              <a:t>Then the honest limits: this will not make a hiring manager say yes, fix a market, make a change easy, or remove the relearning. What it removes is the part where the viewer's own experience works against them in the room.</a:t>
+            </a:r>
+          </a:p>
+          <a:p>
+            <a:r>
+              <a:t>IDENTITY EXIT, at about 9:31: "I want you to stop apologising for a career that actually makes sense — and to be able to say what it built, plainly, without inventing a plan you never had."</a:t>
+            </a:r>
+          </a:p>
+          <a:p>
+            <a:r>
+              <a:t>That is the point of the video. If the edit runs long, cut something else.</a:t>
             </a:r>
           </a:p>
         </p:txBody>
@@ -2107,27 +2147,22 @@
           </a:p>
           <a:p>
             <a:r>
-              <a:t>Timing: approximately 8:31.</a:t>
-            </a:r>
-          </a:p>
-          <a:p>
-            <a:r>
-              <a:t>Calm and brief. This is the only invitation in the video, and it is the FREE Career Evidence Starter — not Keep the Proof, not the Capability Formation Field Kit.</a:t>
-            </a:r>
-          </a:p>
-          <a:p>
-            <a:r>
-              <a:t>Exact invitation, verbatim from the v4.0 script:</a:t>
-            </a:r>
-          </a:p>
-          <a:p>
-            <a:r>
-              <a:t>"If you want to try this on one real accomplishment of yours, I made a free Career Evidence Starter. Set aside about 10 to 15 focused minutes and you will leave with one portable Proof Line. I've linked it below."</a:t>
-            </a:r>
-          </a:p>
-          <a:p>
-            <a:r>
-              <a:t>Show the real Starter artwork. Use the direct public landing-page URL only — temidayoafonja.com/career-evidence-starter. Do not expose a PDF link.</a:t>
+              <a:t>Timing: approximately 9:50.</a:t>
+            </a:r>
+          </a:p>
+          <a:p>
+            <a:r>
+              <a:t>Calm and brief. The only invitation in the video, and it is the FREE Career Evidence Starter — not Keep the Proof, not the Field Kit.</a:t>
+            </a:r>
+          </a:p>
+          <a:p>
+            <a:r>
+              <a:t>It lands AFTER the identity bridge. Keep that order.</a:t>
+            </a:r>
+          </a:p>
+          <a:p>
+            <a:r>
+              <a:t>Show the real Starter artwork. Direct public landing-page URL only — no PDF link.</a:t>
             </a:r>
           </a:p>
         </p:txBody>
@@ -2202,22 +2237,22 @@
           </a:p>
           <a:p>
             <a:r>
-              <a:t>Timing: approximately 8:48 to the end, about 9:20.</a:t>
-            </a:r>
-          </a:p>
-          <a:p>
-            <a:r>
-              <a:t>The card reads "Should I Make an Internal Move? 3 Questions to Decide" with the playlist line. That is the locked Video 5 title and it matches what Temidayo says.</a:t>
-            </a:r>
-          </a:p>
-          <a:p>
-            <a:r>
-              <a:t>Closing lines: "Your career does not have to look linear to make sense. But you do have to make the continuity visible." Stay on her for both.</a:t>
-            </a:r>
-          </a:p>
-          <a:p>
-            <a:r>
-              <a:t>Do not summarize this video again.</a:t>
+              <a:t>Timing: approximately 10:11 to the end, about 10:40.</a:t>
+            </a:r>
+          </a:p>
+          <a:p>
+            <a:r>
+              <a:t>The card reads "Should I Make an Internal Move? 3 Questions to Decide" with the playlist line — the locked Video 5 title, matching what Temidayo says.</a:t>
+            </a:r>
+          </a:p>
+          <a:p>
+            <a:r>
+              <a:t>Closing lines: "Your career does not have to look linear to make sense. But somebody has to be able to hear it." Stay on her for both.</a:t>
+            </a:r>
+          </a:p>
+          <a:p>
+            <a:r>
+              <a:t>Do not summarize the video again.</a:t>
             </a:r>
           </a:p>
           <a:p>
@@ -2297,27 +2332,27 @@
           </a:p>
           <a:p>
             <a:r>
-              <a:t>Timing: approximately 0:32 to 1:21.</a:t>
-            </a:r>
-          </a:p>
-          <a:p>
-            <a:r>
-              <a:t>Do NOT open on this slide. Begin full-screen on Temidayo and let the whole opening land first: the cat-with-nine-lives line, the disconnected-list problem, "The career wasn't the problem. The explanation was.", and the turn to the viewer — "So if your career looks disconnected on paper, let me show you how I learned to explain mine."</a:t>
-            </a:r>
-          </a:p>
-          <a:p>
-            <a:r>
-              <a:t>FACTUAL BOUNDARY: the joke is the entire approved fact. Do not name the employer publicly, do not invent the original conversation, do not script the colleague's words beyond "a cat with nine lives", and use NO CAT IMAGERY anywhere — not in the edit, not in the thumbnail.</a:t>
-            </a:r>
-          </a:p>
-          <a:p>
-            <a:r>
-              <a:t>Bring the chapters up as the chronology. Temidayo deliberately does not read them back: "The slide gives you the chronology, so I am not going to read every chapter back to you." Let the visual do that work.</a:t>
-            </a:r>
-          </a:p>
-          <a:p>
-            <a:r>
-              <a:t>She then names the limits out loud — the work did not stay identical, some knowledge belonged to the context she was leaving, every move required real learning. Do not trim those.</a:t>
+              <a:t>Timing: approximately 0:48 to 1:35.</a:t>
+            </a:r>
+          </a:p>
+          <a:p>
+            <a:r>
+              <a:t>Do NOT open on this slide. Begin full-screen on Temidayo and let the opening land: the viewer's CV making sense only to them, the exact moment halfway into the second job when it stops landing, the cat-with-nine-lives joke, "the career was not the problem, the explanation was", and the offer.</a:t>
+            </a:r>
+          </a:p>
+          <a:p>
+            <a:r>
+              <a:t>FACTUAL BOUNDARY: the joke is the entire approved fact. A senior-manager friend at EY used to joke it. Do not invent the original conversation, do not script the friend's words, and use NO CAT IMAGERY anywhere — edit, graphic or thumbnail.</a:t>
+            </a:r>
+          </a:p>
+          <a:p>
+            <a:r>
+              <a:t>The chronology lives on the slide. Temidayo does not read it: "The slide has the chapters, so I am not going to read them to you."</a:t>
+            </a:r>
+          </a:p>
+          <a:p>
+            <a:r>
+              <a:t>What she does instead is confess the old habit — listing the jobs and handing the listener a pile of parts. That admission earns the method. Keep it.</a:t>
             </a:r>
           </a:p>
         </p:txBody>
@@ -2392,27 +2427,27 @@
           </a:p>
           <a:p>
             <a:r>
-              <a:t>Timing: approximately 0:32 to 1:21.</a:t>
-            </a:r>
-          </a:p>
-          <a:p>
-            <a:r>
-              <a:t>Do NOT open on this slide. Begin full-screen on Temidayo and let the whole opening land first: the cat-with-nine-lives line, the disconnected-list problem, "The career wasn't the problem. The explanation was.", and the turn to the viewer — "So if your career looks disconnected on paper, let me show you how I learned to explain mine."</a:t>
-            </a:r>
-          </a:p>
-          <a:p>
-            <a:r>
-              <a:t>FACTUAL BOUNDARY: the joke is the entire approved fact. Do not name the employer publicly, do not invent the original conversation, do not script the colleague's words beyond "a cat with nine lives", and use NO CAT IMAGERY anywhere — not in the edit, not in the thumbnail.</a:t>
-            </a:r>
-          </a:p>
-          <a:p>
-            <a:r>
-              <a:t>Bring the chapters up as the chronology. Temidayo deliberately does not read them back: "The slide gives you the chronology, so I am not going to read every chapter back to you." Let the visual do that work.</a:t>
-            </a:r>
-          </a:p>
-          <a:p>
-            <a:r>
-              <a:t>She then names the limits out loud — the work did not stay identical, some knowledge belonged to the context she was leaving, every move required real learning. Do not trim those.</a:t>
+              <a:t>Timing: approximately 0:48 to 1:35.</a:t>
+            </a:r>
+          </a:p>
+          <a:p>
+            <a:r>
+              <a:t>Do NOT open on this slide. Begin full-screen on Temidayo and let the opening land: the viewer's CV making sense only to them, the exact moment halfway into the second job when it stops landing, the cat-with-nine-lives joke, "the career was not the problem, the explanation was", and the offer.</a:t>
+            </a:r>
+          </a:p>
+          <a:p>
+            <a:r>
+              <a:t>FACTUAL BOUNDARY: the joke is the entire approved fact. A senior-manager friend at EY used to joke it. Do not invent the original conversation, do not script the friend's words, and use NO CAT IMAGERY anywhere — edit, graphic or thumbnail.</a:t>
+            </a:r>
+          </a:p>
+          <a:p>
+            <a:r>
+              <a:t>The chronology lives on the slide. Temidayo does not read it: "The slide has the chapters, so I am not going to read them to you."</a:t>
+            </a:r>
+          </a:p>
+          <a:p>
+            <a:r>
+              <a:t>What she does instead is confess the old habit — listing the jobs and handing the listener a pile of parts. That admission earns the method. Keep it.</a:t>
             </a:r>
           </a:p>
         </p:txBody>
@@ -2487,27 +2522,27 @@
           </a:p>
           <a:p>
             <a:r>
-              <a:t>Timing: approximately 1:21.</a:t>
-            </a:r>
-          </a:p>
-          <a:p>
-            <a:r>
-              <a:t>The central distinction of the video. Reveal the second half after the first has been stated.</a:t>
-            </a:r>
-          </a:p>
-          <a:p>
-            <a:r>
-              <a:t>Note the direct-address framing in v4.0: "when someone asks you, 'Walk me through your background,' you probably give them a list." The list that follows is the viewer's list, not a case study. Keep it restrained — no résumé-scroll animation, no timeline gag.</a:t>
-            </a:r>
-          </a:p>
-          <a:p>
-            <a:r>
-              <a:t>Close on the instruction: give them enough chronology to orient them, then explain what the work repeatedly required you to become able to do.</a:t>
-            </a:r>
-          </a:p>
-          <a:p>
-            <a:r>
-              <a:t>"There are three parts, and I want to walk you through each one" is the coaching turn. Stay on Temidayo.</a:t>
+              <a:t>Timing: approximately 1:35.</a:t>
+            </a:r>
+          </a:p>
+          <a:p>
+            <a:r>
+              <a:t>The central distinction. Reveal the second half after the first has landed.</a:t>
+            </a:r>
+          </a:p>
+          <a:p>
+            <a:r>
+              <a:t>The straight-line versus non-straight-line explanation is the mechanism of the whole video: for a nonlinear path, a chronology actively works against you, because every jump is one more thing the listener has to explain to themselves.</a:t>
+            </a:r>
+          </a:p>
+          <a:p>
+            <a:r>
+              <a:t>Restrained treatment. No résumé-scroll animation, no timeline gag.</a:t>
+            </a:r>
+          </a:p>
+          <a:p>
+            <a:r>
+              <a:t>Close on the instruction, then the coaching turn: "There are three parts to it. I want to walk you through each one." </a:t>
             </a:r>
           </a:p>
         </p:txBody>
@@ -2582,27 +2617,27 @@
           </a:p>
           <a:p>
             <a:r>
-              <a:t>Timing: approximately 1:21.</a:t>
-            </a:r>
-          </a:p>
-          <a:p>
-            <a:r>
-              <a:t>The central distinction of the video. Reveal the second half after the first has been stated.</a:t>
-            </a:r>
-          </a:p>
-          <a:p>
-            <a:r>
-              <a:t>Note the direct-address framing in v4.0: "when someone asks you, 'Walk me through your background,' you probably give them a list." The list that follows is the viewer's list, not a case study. Keep it restrained — no résumé-scroll animation, no timeline gag.</a:t>
-            </a:r>
-          </a:p>
-          <a:p>
-            <a:r>
-              <a:t>Close on the instruction: give them enough chronology to orient them, then explain what the work repeatedly required you to become able to do.</a:t>
-            </a:r>
-          </a:p>
-          <a:p>
-            <a:r>
-              <a:t>"There are three parts, and I want to walk you through each one" is the coaching turn. Stay on Temidayo.</a:t>
+              <a:t>Timing: approximately 1:35.</a:t>
+            </a:r>
+          </a:p>
+          <a:p>
+            <a:r>
+              <a:t>The central distinction. Reveal the second half after the first has landed.</a:t>
+            </a:r>
+          </a:p>
+          <a:p>
+            <a:r>
+              <a:t>The straight-line versus non-straight-line explanation is the mechanism of the whole video: for a nonlinear path, a chronology actively works against you, because every jump is one more thing the listener has to explain to themselves.</a:t>
+            </a:r>
+          </a:p>
+          <a:p>
+            <a:r>
+              <a:t>Restrained treatment. No résumé-scroll animation, no timeline gag.</a:t>
+            </a:r>
+          </a:p>
+          <a:p>
+            <a:r>
+              <a:t>Close on the instruction, then the coaching turn: "There are three parts to it. I want to walk you through each one." </a:t>
             </a:r>
           </a:p>
         </p:txBody>
@@ -2677,27 +2712,27 @@
           </a:p>
           <a:p>
             <a:r>
-              <a:t>Timing: approximately 2:09.</a:t>
-            </a:r>
-          </a:p>
-          <a:p>
-            <a:r>
-              <a:t>Reveal the three cues as she names them.</a:t>
-            </a:r>
-          </a:p>
-          <a:p>
-            <a:r>
-              <a:t>The coached framing is deliberate: "Your first sentence only has one job: orientation, not defense." Do not cut it.</a:t>
-            </a:r>
-          </a:p>
-          <a:p>
-            <a:r>
-              <a:t>Her own example chapters are spoken once, briefly. The 2008 financial-crisis context stays exactly as spoken and gains nothing: she graduated into that market, so the first turn was not part of a designed plan. No employer, no metric, no further detail.</a:t>
-            </a:r>
-          </a:p>
-          <a:p>
-            <a:r>
-              <a:t>Close on the honesty line: a coherent career story does not require pretending every move was strategic.</a:t>
+              <a:t>Timing: approximately 2:28.</a:t>
+            </a:r>
+          </a:p>
+          <a:p>
+            <a:r>
+              <a:t>Reveal the cues as she names them.</a:t>
+            </a:r>
+          </a:p>
+          <a:p>
+            <a:r>
+              <a:t>"Your first sentence has one job: orientation. Not defence." Do not cut it.</a:t>
+            </a:r>
+          </a:p>
+          <a:p>
+            <a:r>
+              <a:t>The December 2008 context stays exactly as spoken — accounting degree, financial crisis, took the door that was open, not a designed plan. Nothing is added.</a:t>
+            </a:r>
+          </a:p>
+          <a:p>
+            <a:r>
+              <a:t>Close on the honesty line: a career story does not become coherent by pretending every move was strategic.</a:t>
             </a:r>
           </a:p>
         </p:txBody>
@@ -2772,22 +2807,22 @@
           </a:p>
           <a:p>
             <a:r>
-              <a:t>Timing: approximately 3:11, holding to about 3:40.</a:t>
-            </a:r>
-          </a:p>
-          <a:p>
-            <a:r>
-              <a:t>Reveal NOTICE • TRANSLATE • BUILD • DECIDE as the questions are asked.</a:t>
-            </a:r>
-          </a:p>
-          <a:p>
-            <a:r>
-              <a:t>"In the second sentence, I want you to look underneath the titles" is the coaching bridge into this section. Keep it.</a:t>
-            </a:r>
-          </a:p>
-          <a:p>
-            <a:r>
-              <a:t>The four questions are handed to the viewer one at a time. Let each land; do not stack them into a single graphic.</a:t>
+              <a:t>Timing: approximately 3:26, holding to about 3:56.</a:t>
+            </a:r>
+          </a:p>
+          <a:p>
+            <a:r>
+              <a:t>Reveal NOTICE • TRANSLATE • BUILD • DECIDE as the questions arrive.</a:t>
+            </a:r>
+          </a:p>
+          <a:p>
+            <a:r>
+              <a:t>"In your second sentence, I want you to look under the labels." That is the coaching bridge into the section.</a:t>
+            </a:r>
+          </a:p>
+          <a:p>
+            <a:r>
+              <a:t>Four questions, one at a time. Do not stack them into a single graphic.</a:t>
             </a:r>
           </a:p>
         </p:txBody>
@@ -2862,22 +2897,22 @@
           </a:p>
           <a:p>
             <a:r>
-              <a:t>Timing: approximately 3:11, holding to about 3:40.</a:t>
-            </a:r>
-          </a:p>
-          <a:p>
-            <a:r>
-              <a:t>Reveal NOTICE • TRANSLATE • BUILD • DECIDE as the questions are asked.</a:t>
-            </a:r>
-          </a:p>
-          <a:p>
-            <a:r>
-              <a:t>"In the second sentence, I want you to look underneath the titles" is the coaching bridge into this section. Keep it.</a:t>
-            </a:r>
-          </a:p>
-          <a:p>
-            <a:r>
-              <a:t>The four questions are handed to the viewer one at a time. Let each land; do not stack them into a single graphic.</a:t>
+              <a:t>Timing: approximately 3:26, holding to about 3:56.</a:t>
+            </a:r>
+          </a:p>
+          <a:p>
+            <a:r>
+              <a:t>Reveal NOTICE • TRANSLATE • BUILD • DECIDE as the questions arrive.</a:t>
+            </a:r>
+          </a:p>
+          <a:p>
+            <a:r>
+              <a:t>"In your second sentence, I want you to look under the labels." That is the coaching bridge into the section.</a:t>
+            </a:r>
+          </a:p>
+          <a:p>
+            <a:r>
+              <a:t>Four questions, one at a time. Do not stack them into a single graphic.</a:t>
             </a:r>
           </a:p>
         </p:txBody>

--- a/deliverables/video-4-slides/out/Video_4_Reveal_Builds.pptx
+++ b/deliverables/video-4-slides/out/Video_4_Reveal_Builds.pptx
@@ -532,27 +532,42 @@
           </a:p>
           <a:p>
             <a:r>
-              <a:t>Timing: approximately 0:48 to 1:35.</a:t>
-            </a:r>
-          </a:p>
-          <a:p>
-            <a:r>
-              <a:t>Do NOT open on this slide. Begin full-screen on Temidayo and let the opening land: the viewer's CV making sense only to them, the exact moment halfway into the second job when it stops landing, the cat-with-nine-lives joke, "the career was not the problem, the explanation was", and the offer.</a:t>
-            </a:r>
-          </a:p>
-          <a:p>
-            <a:r>
-              <a:t>FACTUAL BOUNDARY: the joke is the entire approved fact. A senior-manager friend at EY used to joke it. Do not invent the original conversation, do not script the friend's words, and use NO CAT IMAGERY anywhere — edit, graphic or thumbnail.</a:t>
-            </a:r>
-          </a:p>
-          <a:p>
-            <a:r>
-              <a:t>The chronology lives on the slide. Temidayo does not read it: "The slide has the chapters, so I am not going to read them to you."</a:t>
-            </a:r>
-          </a:p>
-          <a:p>
-            <a:r>
-              <a:t>What she does instead is confess the old habit — listing the jobs and handing the listener a pile of parts. That admission earns the method. Keep it.</a:t>
+              <a:t>Timing: approximately 0:30.</a:t>
+            </a:r>
+          </a:p>
+          <a:p>
+            <a:r>
+              <a:t>Slide 1 — Career Path.</a:t>
+            </a:r>
+          </a:p>
+          <a:p>
+            <a:r>
+              <a:t>Cue — the line that lands on this slide: “I’m Temidayo Afonja.”</a:t>
+            </a:r>
+          </a:p>
+          <a:p>
+            <a:r>
+              <a:t>Do NOT open on this slide. Begin full screen on Temidayo. The opening is four beats: the viewer's career makes sense to them, they are less sure it makes sense to anybody else, the cat-with-nine-lives joke, and the offer of three sentences.</a:t>
+            </a:r>
+          </a:p>
+          <a:p>
+            <a:r>
+              <a:t>FACTUAL BOUNDARY: a senior-manager friend at EY used to joke that Temidayo was a cat with nine lives. That is the entire approved fact. Do not invent the original conversation and do not script words for the friend. The friend's pronouns are not established — the script says “they”, and captions must match.</a:t>
+            </a:r>
+          </a:p>
+          <a:p>
+            <a:r>
+              <a:t>NO CAT IMAGERY. Not in the edit, not in a graphic, not in the thumbnail.</a:t>
+            </a:r>
+          </a:p>
+          <a:p>
+            <a:r>
+              <a:t>This slide then carries the four chapters as chronology, plus the December 2008 accounting degree and the financial crisis, exactly as spoken.</a:t>
+            </a:r>
+          </a:p>
+          <a:p>
+            <a:r>
+              <a:t>Reveal states: 4. Reveal frame 1–4 in the build deck.</a:t>
             </a:r>
           </a:p>
         </p:txBody>
@@ -627,22 +642,27 @@
           </a:p>
           <a:p>
             <a:r>
-              <a:t>Timing: approximately 3:26, holding to about 3:56.</a:t>
-            </a:r>
-          </a:p>
-          <a:p>
-            <a:r>
-              <a:t>Reveal NOTICE • TRANSLATE • BUILD • DECIDE as the questions arrive.</a:t>
-            </a:r>
-          </a:p>
-          <a:p>
-            <a:r>
-              <a:t>"In your second sentence, I want you to look under the labels." That is the coaching bridge into the section.</a:t>
-            </a:r>
-          </a:p>
-          <a:p>
-            <a:r>
-              <a:t>Four questions, one at a time. Do not stack them into a single graphic.</a:t>
+              <a:t>Timing: approximately 3:23.</a:t>
+            </a:r>
+          </a:p>
+          <a:p>
+            <a:r>
+              <a:t>Slide 4 — 2 Find the Repeated Work.</a:t>
+            </a:r>
+          </a:p>
+          <a:p>
+            <a:r>
+              <a:t>Cue — the line that lands on this slide: “Sentence two names the work that repeats underneath the chapters.”</a:t>
+            </a:r>
+          </a:p>
+          <a:p>
+            <a:r>
+              <a:t>Sentence two. Section break into the harder half of the method.</a:t>
+            </a:r>
+          </a:p>
+          <a:p>
+            <a:r>
+              <a:t>Reveal states: 5. Reveal frame 8–12 in the build deck.</a:t>
             </a:r>
           </a:p>
         </p:txBody>
@@ -717,22 +737,27 @@
           </a:p>
           <a:p>
             <a:r>
-              <a:t>Timing: approximately 3:26, holding to about 3:56.</a:t>
-            </a:r>
-          </a:p>
-          <a:p>
-            <a:r>
-              <a:t>Reveal NOTICE • TRANSLATE • BUILD • DECIDE as the questions arrive.</a:t>
-            </a:r>
-          </a:p>
-          <a:p>
-            <a:r>
-              <a:t>"In your second sentence, I want you to look under the labels." That is the coaching bridge into the section.</a:t>
-            </a:r>
-          </a:p>
-          <a:p>
-            <a:r>
-              <a:t>Four questions, one at a time. Do not stack them into a single graphic.</a:t>
+              <a:t>Timing: approximately 3:23.</a:t>
+            </a:r>
+          </a:p>
+          <a:p>
+            <a:r>
+              <a:t>Slide 4 — 2 Find the Repeated Work.</a:t>
+            </a:r>
+          </a:p>
+          <a:p>
+            <a:r>
+              <a:t>Cue — the line that lands on this slide: “Sentence two names the work that repeats underneath the chapters.”</a:t>
+            </a:r>
+          </a:p>
+          <a:p>
+            <a:r>
+              <a:t>Sentence two. Section break into the harder half of the method.</a:t>
+            </a:r>
+          </a:p>
+          <a:p>
+            <a:r>
+              <a:t>Reveal states: 5. Reveal frame 8–12 in the build deck.</a:t>
             </a:r>
           </a:p>
         </p:txBody>
@@ -807,22 +832,27 @@
           </a:p>
           <a:p>
             <a:r>
-              <a:t>Timing: approximately 3:26, holding to about 3:56.</a:t>
-            </a:r>
-          </a:p>
-          <a:p>
-            <a:r>
-              <a:t>Reveal NOTICE • TRANSLATE • BUILD • DECIDE as the questions arrive.</a:t>
-            </a:r>
-          </a:p>
-          <a:p>
-            <a:r>
-              <a:t>"In your second sentence, I want you to look under the labels." That is the coaching bridge into the section.</a:t>
-            </a:r>
-          </a:p>
-          <a:p>
-            <a:r>
-              <a:t>Four questions, one at a time. Do not stack them into a single graphic.</a:t>
+              <a:t>Timing: approximately 3:23.</a:t>
+            </a:r>
+          </a:p>
+          <a:p>
+            <a:r>
+              <a:t>Slide 4 — 2 Find the Repeated Work.</a:t>
+            </a:r>
+          </a:p>
+          <a:p>
+            <a:r>
+              <a:t>Cue — the line that lands on this slide: “Sentence two names the work that repeats underneath the chapters.”</a:t>
+            </a:r>
+          </a:p>
+          <a:p>
+            <a:r>
+              <a:t>Sentence two. Section break into the harder half of the method.</a:t>
+            </a:r>
+          </a:p>
+          <a:p>
+            <a:r>
+              <a:t>Reveal states: 5. Reveal frame 8–12 in the build deck.</a:t>
             </a:r>
           </a:p>
         </p:txBody>
@@ -897,27 +927,37 @@
           </a:p>
           <a:p>
             <a:r>
-              <a:t>Timing: approximately 3:56.</a:t>
-            </a:r>
-          </a:p>
-          <a:p>
-            <a:r>
-              <a:t>Show the three nouns first, then the verb question.</a:t>
-            </a:r>
-          </a:p>
-          <a:p>
-            <a:r>
-              <a:t>Her own verbs — examine, translate, connect, build — are her evidence, not a template for the viewer.</a:t>
-            </a:r>
-          </a:p>
-          <a:p>
-            <a:r>
-              <a:t>The script is explicit that accounting, cybersecurity and people strategy are NOT the same profession, and that she would not force a connection the evidence does not support. In v5.0 that is turned to the viewer as well: "and I do not want you to either. A forced story is worse than a messy one, because the person listening can feel it." Do not cut either half.</a:t>
-            </a:r>
-          </a:p>
-          <a:p>
-            <a:r>
-              <a:t>Close on the rule: a portable capability is not a word you like the sound of.</a:t>
+              <a:t>Timing: approximately 3:27.</a:t>
+            </a:r>
+          </a:p>
+          <a:p>
+            <a:r>
+              <a:t>Slide 5 — Look Beneath the Nouns.</a:t>
+            </a:r>
+          </a:p>
+          <a:p>
+            <a:r>
+              <a:t>Cue — the line that lands on this slide: “This is the sentence that does the real work, and it is the one most of us have never written down.”</a:t>
+            </a:r>
+          </a:p>
+          <a:p>
+            <a:r>
+              <a:t>The nouns that hide the work. Reveal the prompts one at a time.</a:t>
+            </a:r>
+          </a:p>
+          <a:p>
+            <a:r>
+              <a:t>Temidayo's own sentence two is spoken in full and is the model for the exercise. Put it on screen verbatim if anything at all.</a:t>
+            </a:r>
+          </a:p>
+          <a:p>
+            <a:r>
+              <a:t>The closing warning is the part that keeps people honest: sentence two usually comes out smaller and more ordinary than expected, and that is correct. Do not cut it — without it the exercise produces inflated language.</a:t>
+            </a:r>
+          </a:p>
+          <a:p>
+            <a:r>
+              <a:t>Reveal states: 2. Reveal frame 13–14 in the build deck.</a:t>
             </a:r>
           </a:p>
         </p:txBody>
@@ -992,27 +1032,37 @@
           </a:p>
           <a:p>
             <a:r>
-              <a:t>Timing: approximately 3:56.</a:t>
-            </a:r>
-          </a:p>
-          <a:p>
-            <a:r>
-              <a:t>Show the three nouns first, then the verb question.</a:t>
-            </a:r>
-          </a:p>
-          <a:p>
-            <a:r>
-              <a:t>Her own verbs — examine, translate, connect, build — are her evidence, not a template for the viewer.</a:t>
-            </a:r>
-          </a:p>
-          <a:p>
-            <a:r>
-              <a:t>The script is explicit that accounting, cybersecurity and people strategy are NOT the same profession, and that she would not force a connection the evidence does not support. In v5.0 that is turned to the viewer as well: "and I do not want you to either. A forced story is worse than a messy one, because the person listening can feel it." Do not cut either half.</a:t>
-            </a:r>
-          </a:p>
-          <a:p>
-            <a:r>
-              <a:t>Close on the rule: a portable capability is not a word you like the sound of.</a:t>
+              <a:t>Timing: approximately 3:27.</a:t>
+            </a:r>
+          </a:p>
+          <a:p>
+            <a:r>
+              <a:t>Slide 5 — Look Beneath the Nouns.</a:t>
+            </a:r>
+          </a:p>
+          <a:p>
+            <a:r>
+              <a:t>Cue — the line that lands on this slide: “This is the sentence that does the real work, and it is the one most of us have never written down.”</a:t>
+            </a:r>
+          </a:p>
+          <a:p>
+            <a:r>
+              <a:t>The nouns that hide the work. Reveal the prompts one at a time.</a:t>
+            </a:r>
+          </a:p>
+          <a:p>
+            <a:r>
+              <a:t>Temidayo's own sentence two is spoken in full and is the model for the exercise. Put it on screen verbatim if anything at all.</a:t>
+            </a:r>
+          </a:p>
+          <a:p>
+            <a:r>
+              <a:t>The closing warning is the part that keeps people honest: sentence two usually comes out smaller and more ordinary than expected, and that is correct. Do not cut it — without it the exercise produces inflated language.</a:t>
+            </a:r>
+          </a:p>
+          <a:p>
+            <a:r>
+              <a:t>Reveal states: 2. Reveal frame 13–14 in the build deck.</a:t>
             </a:r>
           </a:p>
         </p:txBody>
@@ -1087,17 +1137,27 @@
           </a:p>
           <a:p>
             <a:r>
-              <a:t>Timing: approximately 5:28, holding to about 5:49.</a:t>
-            </a:r>
-          </a:p>
-          <a:p>
-            <a:r>
-              <a:t>Reveal PAST CHAPTERS → REPEATED CAPABILITY → NEXT VALUE.</a:t>
-            </a:r>
-          </a:p>
-          <a:p>
-            <a:r>
-              <a:t>You are not proving the next move was inevitable. You are making the connection possible to hear. That distinction is the section.</a:t>
+              <a:t>Timing: approximately 5:06.</a:t>
+            </a:r>
+          </a:p>
+          <a:p>
+            <a:r>
+              <a:t>Slide 6 — 3 Explain the Direction.</a:t>
+            </a:r>
+          </a:p>
+          <a:p>
+            <a:r>
+              <a:t>Cue — the line that lands on this slide: “Sentence three explains why the next direction follows.”</a:t>
+            </a:r>
+          </a:p>
+          <a:p>
+            <a:r>
+              <a:t>Sentence three. Forward-facing, not a justification of the last move.</a:t>
+            </a:r>
+          </a:p>
+          <a:p>
+            <a:r>
+              <a:t>Reveal states: 3. Reveal frame 15–17 in the build deck.</a:t>
             </a:r>
           </a:p>
         </p:txBody>
@@ -1172,17 +1232,27 @@
           </a:p>
           <a:p>
             <a:r>
-              <a:t>Timing: approximately 5:28, holding to about 5:49.</a:t>
-            </a:r>
-          </a:p>
-          <a:p>
-            <a:r>
-              <a:t>Reveal PAST CHAPTERS → REPEATED CAPABILITY → NEXT VALUE.</a:t>
-            </a:r>
-          </a:p>
-          <a:p>
-            <a:r>
-              <a:t>You are not proving the next move was inevitable. You are making the connection possible to hear. That distinction is the section.</a:t>
+              <a:t>Timing: approximately 5:06.</a:t>
+            </a:r>
+          </a:p>
+          <a:p>
+            <a:r>
+              <a:t>Slide 6 — 3 Explain the Direction.</a:t>
+            </a:r>
+          </a:p>
+          <a:p>
+            <a:r>
+              <a:t>Cue — the line that lands on this slide: “Sentence three explains why the next direction follows.”</a:t>
+            </a:r>
+          </a:p>
+          <a:p>
+            <a:r>
+              <a:t>Sentence three. Forward-facing, not a justification of the last move.</a:t>
+            </a:r>
+          </a:p>
+          <a:p>
+            <a:r>
+              <a:t>Reveal states: 3. Reveal frame 15–17 in the build deck.</a:t>
             </a:r>
           </a:p>
         </p:txBody>
@@ -1257,17 +1327,27 @@
           </a:p>
           <a:p>
             <a:r>
-              <a:t>Timing: approximately 5:28, holding to about 5:49.</a:t>
-            </a:r>
-          </a:p>
-          <a:p>
-            <a:r>
-              <a:t>Reveal PAST CHAPTERS → REPEATED CAPABILITY → NEXT VALUE.</a:t>
-            </a:r>
-          </a:p>
-          <a:p>
-            <a:r>
-              <a:t>You are not proving the next move was inevitable. You are making the connection possible to hear. That distinction is the section.</a:t>
+              <a:t>Timing: approximately 5:06.</a:t>
+            </a:r>
+          </a:p>
+          <a:p>
+            <a:r>
+              <a:t>Slide 6 — 3 Explain the Direction.</a:t>
+            </a:r>
+          </a:p>
+          <a:p>
+            <a:r>
+              <a:t>Cue — the line that lands on this slide: “Sentence three explains why the next direction follows.”</a:t>
+            </a:r>
+          </a:p>
+          <a:p>
+            <a:r>
+              <a:t>Sentence three. Forward-facing, not a justification of the last move.</a:t>
+            </a:r>
+          </a:p>
+          <a:p>
+            <a:r>
+              <a:t>Reveal states: 3. Reveal frame 15–17 in the build deck.</a:t>
             </a:r>
           </a:p>
         </p:txBody>
@@ -1342,32 +1422,32 @@
           </a:p>
           <a:p>
             <a:r>
-              <a:t>Timing: approximately 5:49.</a:t>
-            </a:r>
-          </a:p>
-          <a:p>
-            <a:r>
-              <a:t>Reveal the three stems one at a time.</a:t>
-            </a:r>
-          </a:p>
-          <a:p>
-            <a:r>
-              <a:t>"The third sentence is doing the real work. It is where the past stops being a list and starts pointing somewhere." That is spoken coaching, not a caption.</a:t>
-            </a:r>
-          </a:p>
-          <a:p>
-            <a:r>
-              <a:t>Her worked example is hers. Then the three denials: not the same chapters, not planned, not everything transferred. All three are load-bearing and must not be trimmed for pace.</a:t>
-            </a:r>
-          </a:p>
-          <a:p>
-            <a:r>
-              <a:t>Close on the hand-off: "Now try the same three sentences on your own career. Out loud, not in your head." The out-loud instruction is deliberate — it is how the viewer finds the sentence they cannot finish.</a:t>
-            </a:r>
-          </a:p>
-          <a:p>
-            <a:r>
-              <a:t>This is the only memory device in the video. Do not add CAR or the 3 Cs.</a:t>
+              <a:t>Timing: approximately 5:09.</a:t>
+            </a:r>
+          </a:p>
+          <a:p>
+            <a:r>
+              <a:t>Slide 7 — Three-Sentence Structure.</a:t>
+            </a:r>
+          </a:p>
+          <a:p>
+            <a:r>
+              <a:t>Cue — the line that lands on this slide: “Not why the last move happened.”</a:t>
+            </a:r>
+          </a:p>
+          <a:p>
+            <a:r>
+              <a:t>The three sentence stems together for the first time. Reveal in order.</a:t>
+            </a:r>
+          </a:p>
+          <a:p>
+            <a:r>
+              <a:t>“Say it in about forty seconds, and then stop talking.” The stopping is teaching, not a throwaway. Give it a beat.</a:t>
+            </a:r>
+          </a:p>
+          <a:p>
+            <a:r>
+              <a:t>Reveal states: 3. Reveal frame 18–20 in the build deck.</a:t>
             </a:r>
           </a:p>
         </p:txBody>
@@ -1442,32 +1522,32 @@
           </a:p>
           <a:p>
             <a:r>
-              <a:t>Timing: approximately 5:49.</a:t>
-            </a:r>
-          </a:p>
-          <a:p>
-            <a:r>
-              <a:t>Reveal the three stems one at a time.</a:t>
-            </a:r>
-          </a:p>
-          <a:p>
-            <a:r>
-              <a:t>"The third sentence is doing the real work. It is where the past stops being a list and starts pointing somewhere." That is spoken coaching, not a caption.</a:t>
-            </a:r>
-          </a:p>
-          <a:p>
-            <a:r>
-              <a:t>Her worked example is hers. Then the three denials: not the same chapters, not planned, not everything transferred. All three are load-bearing and must not be trimmed for pace.</a:t>
-            </a:r>
-          </a:p>
-          <a:p>
-            <a:r>
-              <a:t>Close on the hand-off: "Now try the same three sentences on your own career. Out loud, not in your head." The out-loud instruction is deliberate — it is how the viewer finds the sentence they cannot finish.</a:t>
-            </a:r>
-          </a:p>
-          <a:p>
-            <a:r>
-              <a:t>This is the only memory device in the video. Do not add CAR or the 3 Cs.</a:t>
+              <a:t>Timing: approximately 5:09.</a:t>
+            </a:r>
+          </a:p>
+          <a:p>
+            <a:r>
+              <a:t>Slide 7 — Three-Sentence Structure.</a:t>
+            </a:r>
+          </a:p>
+          <a:p>
+            <a:r>
+              <a:t>Cue — the line that lands on this slide: “Not why the last move happened.”</a:t>
+            </a:r>
+          </a:p>
+          <a:p>
+            <a:r>
+              <a:t>The three sentence stems together for the first time. Reveal in order.</a:t>
+            </a:r>
+          </a:p>
+          <a:p>
+            <a:r>
+              <a:t>“Say it in about forty seconds, and then stop talking.” The stopping is teaching, not a throwaway. Give it a beat.</a:t>
+            </a:r>
+          </a:p>
+          <a:p>
+            <a:r>
+              <a:t>Reveal states: 3. Reveal frame 18–20 in the build deck.</a:t>
             </a:r>
           </a:p>
         </p:txBody>
@@ -1542,27 +1622,42 @@
           </a:p>
           <a:p>
             <a:r>
-              <a:t>Timing: approximately 0:48 to 1:35.</a:t>
-            </a:r>
-          </a:p>
-          <a:p>
-            <a:r>
-              <a:t>Do NOT open on this slide. Begin full-screen on Temidayo and let the opening land: the viewer's CV making sense only to them, the exact moment halfway into the second job when it stops landing, the cat-with-nine-lives joke, "the career was not the problem, the explanation was", and the offer.</a:t>
-            </a:r>
-          </a:p>
-          <a:p>
-            <a:r>
-              <a:t>FACTUAL BOUNDARY: the joke is the entire approved fact. A senior-manager friend at EY used to joke it. Do not invent the original conversation, do not script the friend's words, and use NO CAT IMAGERY anywhere — edit, graphic or thumbnail.</a:t>
-            </a:r>
-          </a:p>
-          <a:p>
-            <a:r>
-              <a:t>The chronology lives on the slide. Temidayo does not read it: "The slide has the chapters, so I am not going to read them to you."</a:t>
-            </a:r>
-          </a:p>
-          <a:p>
-            <a:r>
-              <a:t>What she does instead is confess the old habit — listing the jobs and handing the listener a pile of parts. That admission earns the method. Keep it.</a:t>
+              <a:t>Timing: approximately 0:30.</a:t>
+            </a:r>
+          </a:p>
+          <a:p>
+            <a:r>
+              <a:t>Slide 1 — Career Path.</a:t>
+            </a:r>
+          </a:p>
+          <a:p>
+            <a:r>
+              <a:t>Cue — the line that lands on this slide: “I’m Temidayo Afonja.”</a:t>
+            </a:r>
+          </a:p>
+          <a:p>
+            <a:r>
+              <a:t>Do NOT open on this slide. Begin full screen on Temidayo. The opening is four beats: the viewer's career makes sense to them, they are less sure it makes sense to anybody else, the cat-with-nine-lives joke, and the offer of three sentences.</a:t>
+            </a:r>
+          </a:p>
+          <a:p>
+            <a:r>
+              <a:t>FACTUAL BOUNDARY: a senior-manager friend at EY used to joke that Temidayo was a cat with nine lives. That is the entire approved fact. Do not invent the original conversation and do not script words for the friend. The friend's pronouns are not established — the script says “they”, and captions must match.</a:t>
+            </a:r>
+          </a:p>
+          <a:p>
+            <a:r>
+              <a:t>NO CAT IMAGERY. Not in the edit, not in a graphic, not in the thumbnail.</a:t>
+            </a:r>
+          </a:p>
+          <a:p>
+            <a:r>
+              <a:t>This slide then carries the four chapters as chronology, plus the December 2008 accounting degree and the financial crisis, exactly as spoken.</a:t>
+            </a:r>
+          </a:p>
+          <a:p>
+            <a:r>
+              <a:t>Reveal states: 4. Reveal frame 1–4 in the build deck.</a:t>
             </a:r>
           </a:p>
         </p:txBody>
@@ -1637,32 +1732,32 @@
           </a:p>
           <a:p>
             <a:r>
-              <a:t>Timing: approximately 5:49.</a:t>
-            </a:r>
-          </a:p>
-          <a:p>
-            <a:r>
-              <a:t>Reveal the three stems one at a time.</a:t>
-            </a:r>
-          </a:p>
-          <a:p>
-            <a:r>
-              <a:t>"The third sentence is doing the real work. It is where the past stops being a list and starts pointing somewhere." That is spoken coaching, not a caption.</a:t>
-            </a:r>
-          </a:p>
-          <a:p>
-            <a:r>
-              <a:t>Her worked example is hers. Then the three denials: not the same chapters, not planned, not everything transferred. All three are load-bearing and must not be trimmed for pace.</a:t>
-            </a:r>
-          </a:p>
-          <a:p>
-            <a:r>
-              <a:t>Close on the hand-off: "Now try the same three sentences on your own career. Out loud, not in your head." The out-loud instruction is deliberate — it is how the viewer finds the sentence they cannot finish.</a:t>
-            </a:r>
-          </a:p>
-          <a:p>
-            <a:r>
-              <a:t>This is the only memory device in the video. Do not add CAR or the 3 Cs.</a:t>
+              <a:t>Timing: approximately 5:09.</a:t>
+            </a:r>
+          </a:p>
+          <a:p>
+            <a:r>
+              <a:t>Slide 7 — Three-Sentence Structure.</a:t>
+            </a:r>
+          </a:p>
+          <a:p>
+            <a:r>
+              <a:t>Cue — the line that lands on this slide: “Not why the last move happened.”</a:t>
+            </a:r>
+          </a:p>
+          <a:p>
+            <a:r>
+              <a:t>The three sentence stems together for the first time. Reveal in order.</a:t>
+            </a:r>
+          </a:p>
+          <a:p>
+            <a:r>
+              <a:t>“Say it in about forty seconds, and then stop talking.” The stopping is teaching, not a throwaway. Give it a beat.</a:t>
+            </a:r>
+          </a:p>
+          <a:p>
+            <a:r>
+              <a:t>Reveal states: 3. Reveal frame 18–20 in the build deck.</a:t>
             </a:r>
           </a:p>
         </p:txBody>
@@ -1737,27 +1832,42 @@
           </a:p>
           <a:p>
             <a:r>
-              <a:t>Timing: approximately 7:05.</a:t>
-            </a:r>
-          </a:p>
-          <a:p>
-            <a:r>
-              <a:t>The honesty test, and the reason the video is credible. Give it room.</a:t>
-            </a:r>
-          </a:p>
-          <a:p>
-            <a:r>
-              <a:t>"And here is what I would not do." She takes the risk first, then hands the viewer the standard.</a:t>
-            </a:r>
-          </a:p>
-          <a:p>
-            <a:r>
-              <a:t>Markets, caregiving, health, money, restructures and unpredicted opportunity are all named as legitimate. Interruption, redirection and relearning all belong in a truthful explanation.</a:t>
-            </a:r>
-          </a:p>
-          <a:p>
-            <a:r>
-              <a:t>"If one of your chapters does not fit a tidy progression, leave it untidy." Let that land — it is the permission the viewer came for.</a:t>
+              <a:t>Timing: approximately 5:57.</a:t>
+            </a:r>
+          </a:p>
+          <a:p>
+            <a:r>
+              <a:t>Slide 8 — Do Not Invent a Perfect Plan.</a:t>
+            </a:r>
+          </a:p>
+          <a:p>
+            <a:r>
+              <a:t>Cue — the line that lands on this slide: “Now the honesty boundary, because this is where it goes wrong.”</a:t>
+            </a:r>
+          </a:p>
+          <a:p>
+            <a:r>
+              <a:t>The honesty boundary in full, and the most important slide in the video.</a:t>
+            </a:r>
+          </a:p>
+          <a:p>
+            <a:r>
+              <a:t>Do not claim every move was intentional. Do not claim everything transferred. Both are said out loud, and both must stay.</a:t>
+            </a:r>
+          </a:p>
+          <a:p>
+            <a:r>
+              <a:t>APPROVED RELEARNING FACTS: went back to school; prepared for a professional certification and did not pass it first time. No further detail, no employer, no dates beyond December 2008.</a:t>
+            </a:r>
+          </a:p>
+          <a:p>
+            <a:r>
+              <a:t>Nothing in the edit may make a nonlinear career look like a failure.</a:t>
+            </a:r>
+          </a:p>
+          <a:p>
+            <a:r>
+              <a:t>Single state. Reveal frame 21 in the build deck.</a:t>
             </a:r>
           </a:p>
         </p:txBody>
@@ -1832,37 +1942,37 @@
           </a:p>
           <a:p>
             <a:r>
-              <a:t>Timing: approximately 8:03.</a:t>
-            </a:r>
-          </a:p>
-          <a:p>
-            <a:r>
-              <a:t>Reveal the three test questions, then the evidence challenges.</a:t>
-            </a:r>
-          </a:p>
-          <a:p>
-            <a:r>
-              <a:t>The three "if you say…" lines are the sharpest moment in the video, and the follow-up "who disagreed first" is the one that makes it real. Do not soften them or bury them under a graphic.</a:t>
-            </a:r>
-          </a:p>
-          <a:p>
-            <a:r>
-              <a:t>Then the written exercise, with the PERMITTED evidence qualifier intact.</a:t>
-            </a:r>
-          </a:p>
-          <a:p>
-            <a:r>
-              <a:t>Then the honest limits: this will not make a hiring manager say yes, fix a market, make a change easy, or remove the relearning. What it removes is the part where the viewer's own experience works against them in the room.</a:t>
-            </a:r>
-          </a:p>
-          <a:p>
-            <a:r>
-              <a:t>IDENTITY EXIT, at about 9:31: "I want you to stop apologising for a career that actually makes sense — and to be able to say what it built, plainly, without inventing a plan you never had."</a:t>
-            </a:r>
-          </a:p>
-          <a:p>
-            <a:r>
-              <a:t>That is the point of the video. If the edit runs long, cut something else.</a:t>
+              <a:t>Timing: approximately 7:00.</a:t>
+            </a:r>
+          </a:p>
+          <a:p>
+            <a:r>
+              <a:t>Slide 9 — Explanation Test.</a:t>
+            </a:r>
+          </a:p>
+          <a:p>
+            <a:r>
+              <a:t>Cue — the line that lands on this slide: “Here is how to test it before you need it.”</a:t>
+            </a:r>
+          </a:p>
+          <a:p>
+            <a:r>
+              <a:t>The test: say the three sentences out loud to someone outside your field, then ask what they think you are good at.</a:t>
+            </a:r>
+          </a:p>
+          <a:p>
+            <a:r>
+              <a:t>Reveal the two possible answers — a list of industries, or a kind of problem.</a:t>
+            </a:r>
+          </a:p>
+          <a:p>
+            <a:r>
+              <a:t>THE IDENTITY EXIT sits at the end of this slide: describing a career that did not go in a straight line without apologising for it, and without inventing a plan you were never running. It is the point of the video. If the edit runs long, cut something else.</a:t>
+            </a:r>
+          </a:p>
+          <a:p>
+            <a:r>
+              <a:t>Reveal states: 3. Reveal frame 22–24 in the build deck.</a:t>
             </a:r>
           </a:p>
         </p:txBody>
@@ -1937,37 +2047,37 @@
           </a:p>
           <a:p>
             <a:r>
-              <a:t>Timing: approximately 8:03.</a:t>
-            </a:r>
-          </a:p>
-          <a:p>
-            <a:r>
-              <a:t>Reveal the three test questions, then the evidence challenges.</a:t>
-            </a:r>
-          </a:p>
-          <a:p>
-            <a:r>
-              <a:t>The three "if you say…" lines are the sharpest moment in the video, and the follow-up "who disagreed first" is the one that makes it real. Do not soften them or bury them under a graphic.</a:t>
-            </a:r>
-          </a:p>
-          <a:p>
-            <a:r>
-              <a:t>Then the written exercise, with the PERMITTED evidence qualifier intact.</a:t>
-            </a:r>
-          </a:p>
-          <a:p>
-            <a:r>
-              <a:t>Then the honest limits: this will not make a hiring manager say yes, fix a market, make a change easy, or remove the relearning. What it removes is the part where the viewer's own experience works against them in the room.</a:t>
-            </a:r>
-          </a:p>
-          <a:p>
-            <a:r>
-              <a:t>IDENTITY EXIT, at about 9:31: "I want you to stop apologising for a career that actually makes sense — and to be able to say what it built, plainly, without inventing a plan you never had."</a:t>
-            </a:r>
-          </a:p>
-          <a:p>
-            <a:r>
-              <a:t>That is the point of the video. If the edit runs long, cut something else.</a:t>
+              <a:t>Timing: approximately 7:00.</a:t>
+            </a:r>
+          </a:p>
+          <a:p>
+            <a:r>
+              <a:t>Slide 9 — Explanation Test.</a:t>
+            </a:r>
+          </a:p>
+          <a:p>
+            <a:r>
+              <a:t>Cue — the line that lands on this slide: “Here is how to test it before you need it.”</a:t>
+            </a:r>
+          </a:p>
+          <a:p>
+            <a:r>
+              <a:t>The test: say the three sentences out loud to someone outside your field, then ask what they think you are good at.</a:t>
+            </a:r>
+          </a:p>
+          <a:p>
+            <a:r>
+              <a:t>Reveal the two possible answers — a list of industries, or a kind of problem.</a:t>
+            </a:r>
+          </a:p>
+          <a:p>
+            <a:r>
+              <a:t>THE IDENTITY EXIT sits at the end of this slide: describing a career that did not go in a straight line without apologising for it, and without inventing a plan you were never running. It is the point of the video. If the edit runs long, cut something else.</a:t>
+            </a:r>
+          </a:p>
+          <a:p>
+            <a:r>
+              <a:t>Reveal states: 3. Reveal frame 22–24 in the build deck.</a:t>
             </a:r>
           </a:p>
         </p:txBody>
@@ -2042,37 +2152,37 @@
           </a:p>
           <a:p>
             <a:r>
-              <a:t>Timing: approximately 8:03.</a:t>
-            </a:r>
-          </a:p>
-          <a:p>
-            <a:r>
-              <a:t>Reveal the three test questions, then the evidence challenges.</a:t>
-            </a:r>
-          </a:p>
-          <a:p>
-            <a:r>
-              <a:t>The three "if you say…" lines are the sharpest moment in the video, and the follow-up "who disagreed first" is the one that makes it real. Do not soften them or bury them under a graphic.</a:t>
-            </a:r>
-          </a:p>
-          <a:p>
-            <a:r>
-              <a:t>Then the written exercise, with the PERMITTED evidence qualifier intact.</a:t>
-            </a:r>
-          </a:p>
-          <a:p>
-            <a:r>
-              <a:t>Then the honest limits: this will not make a hiring manager say yes, fix a market, make a change easy, or remove the relearning. What it removes is the part where the viewer's own experience works against them in the room.</a:t>
-            </a:r>
-          </a:p>
-          <a:p>
-            <a:r>
-              <a:t>IDENTITY EXIT, at about 9:31: "I want you to stop apologising for a career that actually makes sense — and to be able to say what it built, plainly, without inventing a plan you never had."</a:t>
-            </a:r>
-          </a:p>
-          <a:p>
-            <a:r>
-              <a:t>That is the point of the video. If the edit runs long, cut something else.</a:t>
+              <a:t>Timing: approximately 7:00.</a:t>
+            </a:r>
+          </a:p>
+          <a:p>
+            <a:r>
+              <a:t>Slide 9 — Explanation Test.</a:t>
+            </a:r>
+          </a:p>
+          <a:p>
+            <a:r>
+              <a:t>Cue — the line that lands on this slide: “Here is how to test it before you need it.”</a:t>
+            </a:r>
+          </a:p>
+          <a:p>
+            <a:r>
+              <a:t>The test: say the three sentences out loud to someone outside your field, then ask what they think you are good at.</a:t>
+            </a:r>
+          </a:p>
+          <a:p>
+            <a:r>
+              <a:t>Reveal the two possible answers — a list of industries, or a kind of problem.</a:t>
+            </a:r>
+          </a:p>
+          <a:p>
+            <a:r>
+              <a:t>THE IDENTITY EXIT sits at the end of this slide: describing a career that did not go in a straight line without apologising for it, and without inventing a plan you were never running. It is the point of the video. If the edit runs long, cut something else.</a:t>
+            </a:r>
+          </a:p>
+          <a:p>
+            <a:r>
+              <a:t>Reveal states: 3. Reveal frame 22–24 in the build deck.</a:t>
             </a:r>
           </a:p>
         </p:txBody>
@@ -2147,22 +2257,32 @@
           </a:p>
           <a:p>
             <a:r>
-              <a:t>Timing: approximately 9:50.</a:t>
-            </a:r>
-          </a:p>
-          <a:p>
-            <a:r>
-              <a:t>Calm and brief. The only invitation in the video, and it is the FREE Career Evidence Starter — not Keep the Proof, not the Field Kit.</a:t>
-            </a:r>
-          </a:p>
-          <a:p>
-            <a:r>
-              <a:t>It lands AFTER the identity bridge. Keep that order.</a:t>
-            </a:r>
-          </a:p>
-          <a:p>
-            <a:r>
-              <a:t>Show the real Starter artwork. Direct public landing-page URL only — no PDF link.</a:t>
+              <a:t>Timing: approximately 8:17.</a:t>
+            </a:r>
+          </a:p>
+          <a:p>
+            <a:r>
+              <a:t>Slide 10 — Career Evidence Starter.</a:t>
+            </a:r>
+          </a:p>
+          <a:p>
+            <a:r>
+              <a:t>Cue — the line that lands on this slide: “Sentence two is the hard one, and it goes much better when you have real evidence in front of you instead of trying to remember.”</a:t>
+            </a:r>
+          </a:p>
+          <a:p>
+            <a:r>
+              <a:t>Show the REAL Career Evidence Starter artifact briefly. Use the public landing-page URL only — do not expose a direct PDF link.</a:t>
+            </a:r>
+          </a:p>
+          <a:p>
+            <a:r>
+              <a:t>The Starter is the only CTA in this video. Keep the Proof is NOT restored. Do not add the Field Kit.</a:t>
+            </a:r>
+          </a:p>
+          <a:p>
+            <a:r>
+              <a:t>Single state. Reveal frame 25 in the build deck.</a:t>
             </a:r>
           </a:p>
         </p:txBody>
@@ -2237,27 +2357,32 @@
           </a:p>
           <a:p>
             <a:r>
-              <a:t>Timing: approximately 10:11 to the end, about 10:40.</a:t>
-            </a:r>
-          </a:p>
-          <a:p>
-            <a:r>
-              <a:t>The card reads "Should I Make an Internal Move? 3 Questions to Decide" with the playlist line — the locked Video 5 title, matching what Temidayo says.</a:t>
-            </a:r>
-          </a:p>
-          <a:p>
-            <a:r>
-              <a:t>Closing lines: "Your career does not have to look linear to make sense. But somebody has to be able to hear it." Stay on her for both.</a:t>
-            </a:r>
-          </a:p>
-          <a:p>
-            <a:r>
-              <a:t>Do not summarize the video again.</a:t>
-            </a:r>
-          </a:p>
-          <a:p>
-            <a:r>
-              <a:t>The right side of the frame is left open for the YouTube linked-video end-screen element. Hold the final frame for at least 12 seconds. Do not leave Subscribe as the only end-screen element.</a:t>
+              <a:t>Timing: approximately 8:45.</a:t>
+            </a:r>
+          </a:p>
+          <a:p>
+            <a:r>
+              <a:t>Slide 11 — Watch Next.</a:t>
+            </a:r>
+          </a:p>
+          <a:p>
+            <a:r>
+              <a:t>Cue — the line that lands on this slide: “And there is a version of this question that arrives before you ever explain anything to an outsider.”</a:t>
+            </a:r>
+          </a:p>
+          <a:p>
+            <a:r>
+              <a:t>The Video 5 route. Card reads “Should I Make an Internal Move? 3 Questions to Decide”.</a:t>
+            </a:r>
+          </a:p>
+          <a:p>
+            <a:r>
+              <a:t>Sign off clean on the last two lines. No music sting.</a:t>
+            </a:r>
+          </a:p>
+          <a:p>
+            <a:r>
+              <a:t>Single state. Reveal frame 26 in the build deck.</a:t>
             </a:r>
           </a:p>
         </p:txBody>
@@ -2332,27 +2457,42 @@
           </a:p>
           <a:p>
             <a:r>
-              <a:t>Timing: approximately 0:48 to 1:35.</a:t>
-            </a:r>
-          </a:p>
-          <a:p>
-            <a:r>
-              <a:t>Do NOT open on this slide. Begin full-screen on Temidayo and let the opening land: the viewer's CV making sense only to them, the exact moment halfway into the second job when it stops landing, the cat-with-nine-lives joke, "the career was not the problem, the explanation was", and the offer.</a:t>
-            </a:r>
-          </a:p>
-          <a:p>
-            <a:r>
-              <a:t>FACTUAL BOUNDARY: the joke is the entire approved fact. A senior-manager friend at EY used to joke it. Do not invent the original conversation, do not script the friend's words, and use NO CAT IMAGERY anywhere — edit, graphic or thumbnail.</a:t>
-            </a:r>
-          </a:p>
-          <a:p>
-            <a:r>
-              <a:t>The chronology lives on the slide. Temidayo does not read it: "The slide has the chapters, so I am not going to read them to you."</a:t>
-            </a:r>
-          </a:p>
-          <a:p>
-            <a:r>
-              <a:t>What she does instead is confess the old habit — listing the jobs and handing the listener a pile of parts. That admission earns the method. Keep it.</a:t>
+              <a:t>Timing: approximately 0:30.</a:t>
+            </a:r>
+          </a:p>
+          <a:p>
+            <a:r>
+              <a:t>Slide 1 — Career Path.</a:t>
+            </a:r>
+          </a:p>
+          <a:p>
+            <a:r>
+              <a:t>Cue — the line that lands on this slide: “I’m Temidayo Afonja.”</a:t>
+            </a:r>
+          </a:p>
+          <a:p>
+            <a:r>
+              <a:t>Do NOT open on this slide. Begin full screen on Temidayo. The opening is four beats: the viewer's career makes sense to them, they are less sure it makes sense to anybody else, the cat-with-nine-lives joke, and the offer of three sentences.</a:t>
+            </a:r>
+          </a:p>
+          <a:p>
+            <a:r>
+              <a:t>FACTUAL BOUNDARY: a senior-manager friend at EY used to joke that Temidayo was a cat with nine lives. That is the entire approved fact. Do not invent the original conversation and do not script words for the friend. The friend's pronouns are not established — the script says “they”, and captions must match.</a:t>
+            </a:r>
+          </a:p>
+          <a:p>
+            <a:r>
+              <a:t>NO CAT IMAGERY. Not in the edit, not in a graphic, not in the thumbnail.</a:t>
+            </a:r>
+          </a:p>
+          <a:p>
+            <a:r>
+              <a:t>This slide then carries the four chapters as chronology, plus the December 2008 accounting degree and the financial crisis, exactly as spoken.</a:t>
+            </a:r>
+          </a:p>
+          <a:p>
+            <a:r>
+              <a:t>Reveal states: 4. Reveal frame 1–4 in the build deck.</a:t>
             </a:r>
           </a:p>
         </p:txBody>
@@ -2427,27 +2567,42 @@
           </a:p>
           <a:p>
             <a:r>
-              <a:t>Timing: approximately 0:48 to 1:35.</a:t>
-            </a:r>
-          </a:p>
-          <a:p>
-            <a:r>
-              <a:t>Do NOT open on this slide. Begin full-screen on Temidayo and let the opening land: the viewer's CV making sense only to them, the exact moment halfway into the second job when it stops landing, the cat-with-nine-lives joke, "the career was not the problem, the explanation was", and the offer.</a:t>
-            </a:r>
-          </a:p>
-          <a:p>
-            <a:r>
-              <a:t>FACTUAL BOUNDARY: the joke is the entire approved fact. A senior-manager friend at EY used to joke it. Do not invent the original conversation, do not script the friend's words, and use NO CAT IMAGERY anywhere — edit, graphic or thumbnail.</a:t>
-            </a:r>
-          </a:p>
-          <a:p>
-            <a:r>
-              <a:t>The chronology lives on the slide. Temidayo does not read it: "The slide has the chapters, so I am not going to read them to you."</a:t>
-            </a:r>
-          </a:p>
-          <a:p>
-            <a:r>
-              <a:t>What she does instead is confess the old habit — listing the jobs and handing the listener a pile of parts. That admission earns the method. Keep it.</a:t>
+              <a:t>Timing: approximately 0:30.</a:t>
+            </a:r>
+          </a:p>
+          <a:p>
+            <a:r>
+              <a:t>Slide 1 — Career Path.</a:t>
+            </a:r>
+          </a:p>
+          <a:p>
+            <a:r>
+              <a:t>Cue — the line that lands on this slide: “I’m Temidayo Afonja.”</a:t>
+            </a:r>
+          </a:p>
+          <a:p>
+            <a:r>
+              <a:t>Do NOT open on this slide. Begin full screen on Temidayo. The opening is four beats: the viewer's career makes sense to them, they are less sure it makes sense to anybody else, the cat-with-nine-lives joke, and the offer of three sentences.</a:t>
+            </a:r>
+          </a:p>
+          <a:p>
+            <a:r>
+              <a:t>FACTUAL BOUNDARY: a senior-manager friend at EY used to joke that Temidayo was a cat with nine lives. That is the entire approved fact. Do not invent the original conversation and do not script words for the friend. The friend's pronouns are not established — the script says “they”, and captions must match.</a:t>
+            </a:r>
+          </a:p>
+          <a:p>
+            <a:r>
+              <a:t>NO CAT IMAGERY. Not in the edit, not in a graphic, not in the thumbnail.</a:t>
+            </a:r>
+          </a:p>
+          <a:p>
+            <a:r>
+              <a:t>This slide then carries the four chapters as chronology, plus the December 2008 accounting degree and the financial crisis, exactly as spoken.</a:t>
+            </a:r>
+          </a:p>
+          <a:p>
+            <a:r>
+              <a:t>Reveal states: 4. Reveal frame 1–4 in the build deck.</a:t>
             </a:r>
           </a:p>
         </p:txBody>
@@ -2522,27 +2677,42 @@
           </a:p>
           <a:p>
             <a:r>
-              <a:t>Timing: approximately 1:35.</a:t>
-            </a:r>
-          </a:p>
-          <a:p>
-            <a:r>
-              <a:t>The central distinction. Reveal the second half after the first has landed.</a:t>
-            </a:r>
-          </a:p>
-          <a:p>
-            <a:r>
-              <a:t>The straight-line versus non-straight-line explanation is the mechanism of the whole video: for a nonlinear path, a chronology actively works against you, because every jump is one more thing the listener has to explain to themselves.</a:t>
-            </a:r>
-          </a:p>
-          <a:p>
-            <a:r>
-              <a:t>Restrained treatment. No résumé-scroll animation, no timeline gag.</a:t>
-            </a:r>
-          </a:p>
-          <a:p>
-            <a:r>
-              <a:t>Close on the instruction, then the coaching turn: "There are three parts to it. I want to walk you through each one." </a:t>
+              <a:t>Timing: approximately 1:30.</a:t>
+            </a:r>
+          </a:p>
+          <a:p>
+            <a:r>
+              <a:t>Slide 2 — Chronology / Portability.</a:t>
+            </a:r>
+          </a:p>
+          <a:p>
+            <a:r>
+              <a:t>Cue — the line that lands on this slide: “Here is the mistake almost all of us make, and I made it for years.”</a:t>
+            </a:r>
+          </a:p>
+          <a:p>
+            <a:r>
+              <a:t>Chronology beside portability. Reveal chronology first, then portability.</a:t>
+            </a:r>
+          </a:p>
+          <a:p>
+            <a:r>
+              <a:t>“Chronology is where you have been. Portability is what travelled with you.” This is the core interpretation of the video. Hold it.</a:t>
+            </a:r>
+          </a:p>
+          <a:p>
+            <a:r>
+              <a:t>The inventing-the-plan warning is the honesty boundary arriving early. “It does not survive a follow-up question.” Keep it.</a:t>
+            </a:r>
+          </a:p>
+          <a:p>
+            <a:r>
+              <a:t>No résumé-scroll animation and no timeline gag anywhere.</a:t>
+            </a:r>
+          </a:p>
+          <a:p>
+            <a:r>
+              <a:t>Reveal states: 2. Reveal frame 5–6 in the build deck.</a:t>
             </a:r>
           </a:p>
         </p:txBody>
@@ -2617,27 +2787,42 @@
           </a:p>
           <a:p>
             <a:r>
-              <a:t>Timing: approximately 1:35.</a:t>
-            </a:r>
-          </a:p>
-          <a:p>
-            <a:r>
-              <a:t>The central distinction. Reveal the second half after the first has landed.</a:t>
-            </a:r>
-          </a:p>
-          <a:p>
-            <a:r>
-              <a:t>The straight-line versus non-straight-line explanation is the mechanism of the whole video: for a nonlinear path, a chronology actively works against you, because every jump is one more thing the listener has to explain to themselves.</a:t>
-            </a:r>
-          </a:p>
-          <a:p>
-            <a:r>
-              <a:t>Restrained treatment. No résumé-scroll animation, no timeline gag.</a:t>
-            </a:r>
-          </a:p>
-          <a:p>
-            <a:r>
-              <a:t>Close on the instruction, then the coaching turn: "There are three parts to it. I want to walk you through each one." </a:t>
+              <a:t>Timing: approximately 1:30.</a:t>
+            </a:r>
+          </a:p>
+          <a:p>
+            <a:r>
+              <a:t>Slide 2 — Chronology / Portability.</a:t>
+            </a:r>
+          </a:p>
+          <a:p>
+            <a:r>
+              <a:t>Cue — the line that lands on this slide: “Here is the mistake almost all of us make, and I made it for years.”</a:t>
+            </a:r>
+          </a:p>
+          <a:p>
+            <a:r>
+              <a:t>Chronology beside portability. Reveal chronology first, then portability.</a:t>
+            </a:r>
+          </a:p>
+          <a:p>
+            <a:r>
+              <a:t>“Chronology is where you have been. Portability is what travelled with you.” This is the core interpretation of the video. Hold it.</a:t>
+            </a:r>
+          </a:p>
+          <a:p>
+            <a:r>
+              <a:t>The inventing-the-plan warning is the honesty boundary arriving early. “It does not survive a follow-up question.” Keep it.</a:t>
+            </a:r>
+          </a:p>
+          <a:p>
+            <a:r>
+              <a:t>No résumé-scroll animation and no timeline gag anywhere.</a:t>
+            </a:r>
+          </a:p>
+          <a:p>
+            <a:r>
+              <a:t>Reveal states: 2. Reveal frame 5–6 in the build deck.</a:t>
             </a:r>
           </a:p>
         </p:txBody>
@@ -2712,27 +2897,37 @@
           </a:p>
           <a:p>
             <a:r>
-              <a:t>Timing: approximately 2:28.</a:t>
-            </a:r>
-          </a:p>
-          <a:p>
-            <a:r>
-              <a:t>Reveal the cues as she names them.</a:t>
-            </a:r>
-          </a:p>
-          <a:p>
-            <a:r>
-              <a:t>"Your first sentence has one job: orientation. Not defence." Do not cut it.</a:t>
-            </a:r>
-          </a:p>
-          <a:p>
-            <a:r>
-              <a:t>The December 2008 context stays exactly as spoken — accounting degree, financial crisis, took the door that was open, not a designed plan. Nothing is added.</a:t>
-            </a:r>
-          </a:p>
-          <a:p>
-            <a:r>
-              <a:t>Close on the honesty line: a career story does not become coherent by pretending every move was strategic.</a:t>
+              <a:t>Timing: approximately 2:46.</a:t>
+            </a:r>
+          </a:p>
+          <a:p>
+            <a:r>
+              <a:t>Slide 3 — 1 Name the Chapters Briefly.</a:t>
+            </a:r>
+          </a:p>
+          <a:p>
+            <a:r>
+              <a:t>Cue — the line that lands on this slide: “Sentence one names the chapters, briefly.”</a:t>
+            </a:r>
+          </a:p>
+          <a:p>
+            <a:r>
+              <a:t>Sentence one. Brief is the whole instruction — no dates, no employers, no explaining why each chapter ended.</a:t>
+            </a:r>
+          </a:p>
+          <a:p>
+            <a:r>
+              <a:t>Temidayo's own version is spoken as one sentence. Put it on screen as one line, not as a list of four bullets.</a:t>
+            </a:r>
+          </a:p>
+          <a:p>
+            <a:r>
+              <a:t>“Justifying in sentence one is what makes a career sound defensive.” Keep it.</a:t>
+            </a:r>
+          </a:p>
+          <a:p>
+            <a:r>
+              <a:t>Single state. Reveal frame 7 in the build deck.</a:t>
             </a:r>
           </a:p>
         </p:txBody>
@@ -2807,22 +3002,27 @@
           </a:p>
           <a:p>
             <a:r>
-              <a:t>Timing: approximately 3:26, holding to about 3:56.</a:t>
-            </a:r>
-          </a:p>
-          <a:p>
-            <a:r>
-              <a:t>Reveal NOTICE • TRANSLATE • BUILD • DECIDE as the questions arrive.</a:t>
-            </a:r>
-          </a:p>
-          <a:p>
-            <a:r>
-              <a:t>"In your second sentence, I want you to look under the labels." That is the coaching bridge into the section.</a:t>
-            </a:r>
-          </a:p>
-          <a:p>
-            <a:r>
-              <a:t>Four questions, one at a time. Do not stack them into a single graphic.</a:t>
+              <a:t>Timing: approximately 3:23.</a:t>
+            </a:r>
+          </a:p>
+          <a:p>
+            <a:r>
+              <a:t>Slide 4 — 2 Find the Repeated Work.</a:t>
+            </a:r>
+          </a:p>
+          <a:p>
+            <a:r>
+              <a:t>Cue — the line that lands on this slide: “Sentence two names the work that repeats underneath the chapters.”</a:t>
+            </a:r>
+          </a:p>
+          <a:p>
+            <a:r>
+              <a:t>Sentence two. Section break into the harder half of the method.</a:t>
+            </a:r>
+          </a:p>
+          <a:p>
+            <a:r>
+              <a:t>Reveal states: 5. Reveal frame 8–12 in the build deck.</a:t>
             </a:r>
           </a:p>
         </p:txBody>
@@ -2897,22 +3097,27 @@
           </a:p>
           <a:p>
             <a:r>
-              <a:t>Timing: approximately 3:26, holding to about 3:56.</a:t>
-            </a:r>
-          </a:p>
-          <a:p>
-            <a:r>
-              <a:t>Reveal NOTICE • TRANSLATE • BUILD • DECIDE as the questions arrive.</a:t>
-            </a:r>
-          </a:p>
-          <a:p>
-            <a:r>
-              <a:t>"In your second sentence, I want you to look under the labels." That is the coaching bridge into the section.</a:t>
-            </a:r>
-          </a:p>
-          <a:p>
-            <a:r>
-              <a:t>Four questions, one at a time. Do not stack them into a single graphic.</a:t>
+              <a:t>Timing: approximately 3:23.</a:t>
+            </a:r>
+          </a:p>
+          <a:p>
+            <a:r>
+              <a:t>Slide 4 — 2 Find the Repeated Work.</a:t>
+            </a:r>
+          </a:p>
+          <a:p>
+            <a:r>
+              <a:t>Cue — the line that lands on this slide: “Sentence two names the work that repeats underneath the chapters.”</a:t>
+            </a:r>
+          </a:p>
+          <a:p>
+            <a:r>
+              <a:t>Sentence two. Section break into the harder half of the method.</a:t>
+            </a:r>
+          </a:p>
+          <a:p>
+            <a:r>
+              <a:t>Reveal states: 5. Reveal frame 8–12 in the build deck.</a:t>
             </a:r>
           </a:p>
         </p:txBody>

--- a/deliverables/video-4-slides/out/Video_4_Reveal_Builds.pptx
+++ b/deliverables/video-4-slides/out/Video_4_Reveal_Builds.pptx
@@ -642,7 +642,7 @@
           </a:p>
           <a:p>
             <a:r>
-              <a:t>Timing: approximately 3:23.</a:t>
+              <a:t>Timing: approximately 3:22.</a:t>
             </a:r>
           </a:p>
           <a:p>
@@ -737,7 +737,7 @@
           </a:p>
           <a:p>
             <a:r>
-              <a:t>Timing: approximately 3:23.</a:t>
+              <a:t>Timing: approximately 3:22.</a:t>
             </a:r>
           </a:p>
           <a:p>
@@ -832,7 +832,7 @@
           </a:p>
           <a:p>
             <a:r>
-              <a:t>Timing: approximately 3:23.</a:t>
+              <a:t>Timing: approximately 3:22.</a:t>
             </a:r>
           </a:p>
           <a:p>
@@ -927,7 +927,7 @@
           </a:p>
           <a:p>
             <a:r>
-              <a:t>Timing: approximately 3:27.</a:t>
+              <a:t>Timing: approximately 3:26.</a:t>
             </a:r>
           </a:p>
           <a:p>
@@ -1032,7 +1032,7 @@
           </a:p>
           <a:p>
             <a:r>
-              <a:t>Timing: approximately 3:27.</a:t>
+              <a:t>Timing: approximately 3:26.</a:t>
             </a:r>
           </a:p>
           <a:p>
@@ -1137,7 +1137,7 @@
           </a:p>
           <a:p>
             <a:r>
-              <a:t>Timing: approximately 5:06.</a:t>
+              <a:t>Timing: approximately 5:04.</a:t>
             </a:r>
           </a:p>
           <a:p>
@@ -1232,7 +1232,7 @@
           </a:p>
           <a:p>
             <a:r>
-              <a:t>Timing: approximately 5:06.</a:t>
+              <a:t>Timing: approximately 5:04.</a:t>
             </a:r>
           </a:p>
           <a:p>
@@ -1327,7 +1327,7 @@
           </a:p>
           <a:p>
             <a:r>
-              <a:t>Timing: approximately 5:06.</a:t>
+              <a:t>Timing: approximately 5:04.</a:t>
             </a:r>
           </a:p>
           <a:p>
@@ -1422,7 +1422,7 @@
           </a:p>
           <a:p>
             <a:r>
-              <a:t>Timing: approximately 5:09.</a:t>
+              <a:t>Timing: approximately 5:08.</a:t>
             </a:r>
           </a:p>
           <a:p>
@@ -1522,7 +1522,7 @@
           </a:p>
           <a:p>
             <a:r>
-              <a:t>Timing: approximately 5:09.</a:t>
+              <a:t>Timing: approximately 5:08.</a:t>
             </a:r>
           </a:p>
           <a:p>
@@ -1732,7 +1732,7 @@
           </a:p>
           <a:p>
             <a:r>
-              <a:t>Timing: approximately 5:09.</a:t>
+              <a:t>Timing: approximately 5:08.</a:t>
             </a:r>
           </a:p>
           <a:p>
@@ -1832,7 +1832,7 @@
           </a:p>
           <a:p>
             <a:r>
-              <a:t>Timing: approximately 5:57.</a:t>
+              <a:t>Timing: approximately 5:56.</a:t>
             </a:r>
           </a:p>
           <a:p>
@@ -1942,7 +1942,7 @@
           </a:p>
           <a:p>
             <a:r>
-              <a:t>Timing: approximately 7:00.</a:t>
+              <a:t>Timing: approximately 6:59.</a:t>
             </a:r>
           </a:p>
           <a:p>
@@ -1967,7 +1967,7 @@
           </a:p>
           <a:p>
             <a:r>
-              <a:t>THE IDENTITY EXIT sits at the end of this slide: describing a career that did not go in a straight line without apologising for it, and without inventing a plan you were never running. It is the point of the video. If the edit runs long, cut something else.</a:t>
+              <a:t>THE IDENTITY EXIT sits at the end of this slide: describing a career that did not go in a straight line without apologizing for it, and without inventing a plan you were never running. It is the point of the video. If the edit runs long, cut something else.</a:t>
             </a:r>
           </a:p>
           <a:p>
@@ -2047,7 +2047,7 @@
           </a:p>
           <a:p>
             <a:r>
-              <a:t>Timing: approximately 7:00.</a:t>
+              <a:t>Timing: approximately 6:59.</a:t>
             </a:r>
           </a:p>
           <a:p>
@@ -2072,7 +2072,7 @@
           </a:p>
           <a:p>
             <a:r>
-              <a:t>THE IDENTITY EXIT sits at the end of this slide: describing a career that did not go in a straight line without apologising for it, and without inventing a plan you were never running. It is the point of the video. If the edit runs long, cut something else.</a:t>
+              <a:t>THE IDENTITY EXIT sits at the end of this slide: describing a career that did not go in a straight line without apologizing for it, and without inventing a plan you were never running. It is the point of the video. If the edit runs long, cut something else.</a:t>
             </a:r>
           </a:p>
           <a:p>
@@ -2152,7 +2152,7 @@
           </a:p>
           <a:p>
             <a:r>
-              <a:t>Timing: approximately 7:00.</a:t>
+              <a:t>Timing: approximately 6:59.</a:t>
             </a:r>
           </a:p>
           <a:p>
@@ -2177,7 +2177,7 @@
           </a:p>
           <a:p>
             <a:r>
-              <a:t>THE IDENTITY EXIT sits at the end of this slide: describing a career that did not go in a straight line without apologising for it, and without inventing a plan you were never running. It is the point of the video. If the edit runs long, cut something else.</a:t>
+              <a:t>THE IDENTITY EXIT sits at the end of this slide: describing a career that did not go in a straight line without apologizing for it, and without inventing a plan you were never running. It is the point of the video. If the edit runs long, cut something else.</a:t>
             </a:r>
           </a:p>
           <a:p>
@@ -2257,7 +2257,7 @@
           </a:p>
           <a:p>
             <a:r>
-              <a:t>Timing: approximately 8:17.</a:t>
+              <a:t>Timing: approximately 8:16.</a:t>
             </a:r>
           </a:p>
           <a:p>
@@ -2357,7 +2357,7 @@
           </a:p>
           <a:p>
             <a:r>
-              <a:t>Timing: approximately 8:45.</a:t>
+              <a:t>Timing: approximately 8:44.</a:t>
             </a:r>
           </a:p>
           <a:p>
@@ -2687,7 +2687,7 @@
           </a:p>
           <a:p>
             <a:r>
-              <a:t>Cue — the line that lands on this slide: “Here is the mistake almost all of us make, and I made it for years.”</a:t>
+              <a:t>Cue — the line that lands on this slide: “Here is a mistake I made for years, and one I still hear often.”</a:t>
             </a:r>
           </a:p>
           <a:p>
@@ -2697,7 +2697,7 @@
           </a:p>
           <a:p>
             <a:r>
-              <a:t>“Chronology is where you have been. Portability is what travelled with you.” This is the core interpretation of the video. Hold it.</a:t>
+              <a:t>“Chronology is where you have been. Portability is what traveled with you.” This is the core interpretation of the video. Hold it.</a:t>
             </a:r>
           </a:p>
           <a:p>
@@ -2797,7 +2797,7 @@
           </a:p>
           <a:p>
             <a:r>
-              <a:t>Cue — the line that lands on this slide: “Here is the mistake almost all of us make, and I made it for years.”</a:t>
+              <a:t>Cue — the line that lands on this slide: “Here is a mistake I made for years, and one I still hear often.”</a:t>
             </a:r>
           </a:p>
           <a:p>
@@ -2807,7 +2807,7 @@
           </a:p>
           <a:p>
             <a:r>
-              <a:t>“Chronology is where you have been. Portability is what travelled with you.” This is the core interpretation of the video. Hold it.</a:t>
+              <a:t>“Chronology is where you have been. Portability is what traveled with you.” This is the core interpretation of the video. Hold it.</a:t>
             </a:r>
           </a:p>
           <a:p>
@@ -2897,7 +2897,7 @@
           </a:p>
           <a:p>
             <a:r>
-              <a:t>Timing: approximately 2:46.</a:t>
+              <a:t>Timing: approximately 2:45.</a:t>
             </a:r>
           </a:p>
           <a:p>
@@ -3002,7 +3002,7 @@
           </a:p>
           <a:p>
             <a:r>
-              <a:t>Timing: approximately 3:23.</a:t>
+              <a:t>Timing: approximately 3:22.</a:t>
             </a:r>
           </a:p>
           <a:p>
@@ -3097,7 +3097,7 @@
           </a:p>
           <a:p>
             <a:r>
-              <a:t>Timing: approximately 3:23.</a:t>
+              <a:t>Timing: approximately 3:22.</a:t>
             </a:r>
           </a:p>
           <a:p>
